--- a/docs/Presentation/Final_Project_Presentation.pptx
+++ b/docs/Presentation/Final_Project_Presentation.pptx
@@ -867,100 +867,126 @@
           <a:lstStyle/>
           <a:p>
             <a:r>
-              <a:t>Los requisitos del proyecto mencionan varios patrones de IA Agéntica —Multi-Agent,</a:t>
-            </a:r>
-          </a:p>
-          <a:p>
-            <a:r>
-              <a:t>Planner-Executor, Memory, Guardrails, RAG, y también ReAct, LLM-as-a-Judge y Self-Reflection—, y</a:t>
-            </a:r>
-          </a:p>
-          <a:p>
-            <a:r>
-              <a:t>quiero explicar explícitamente cómo se posiciona esta arquitectura frente a ese conjunto completo,</a:t>
-            </a:r>
-          </a:p>
-          <a:p>
-            <a:r>
-              <a:t>en lugar de dejarlo implícito.</a:t>
+              <a:t>Esta diapositiva cambió de fondo desde la versión anterior de esta defensa, y quiero</a:t>
+            </a:r>
+          </a:p>
+          <a:p>
+            <a:r>
+              <a:t>explicar exactamente qué cambió y por qué.</a:t>
             </a:r>
           </a:p>
           <a:p/>
           <a:p>
             <a:r>
-              <a:t>Durante el diseño se eligió la arquitectura de referencia inspirada en el modelo Supervisor más</a:t>
-            </a:r>
-          </a:p>
-          <a:p>
-            <a:r>
-              <a:t>Agentes Especialistas porque ofrece ejecución determinista y encaja mejor con procesos de negocio</a:t>
-            </a:r>
-          </a:p>
-          <a:p>
-            <a:r>
-              <a:t>de seguros, donde la auditabilidad no es negociable. Esta arquitectura ya implementa cinco de los</a:t>
-            </a:r>
-          </a:p>
-          <a:p>
-            <a:r>
-              <a:t>patrones requeridos: Multi-Agent, Planner-Executor, Memory, Guardrails, y RAG con su arquitectura</a:t>
-            </a:r>
-          </a:p>
-          <a:p>
-            <a:r>
-              <a:t>lista aunque hoy con datos sintéticos.</a:t>
+              <a:t>Anteriormente presentaba ReAct como una evolución futura. Un análisis dedicado de brechas contra</a:t>
+            </a:r>
+          </a:p>
+          <a:p>
+            <a:r>
+              <a:t>el requisito del curso —ReAct más Tool Calling como patrón primario— encontró que el mecanismo ya</a:t>
+            </a:r>
+          </a:p>
+          <a:p>
+            <a:r>
+              <a:t>existía: ToolCallingOrchestrator ya implementaba un bucle acotado de Razonar, Actuar, Observar,</a:t>
+            </a:r>
+          </a:p>
+          <a:p>
+            <a:r>
+              <a:t>Razonar de nuevo, con quince pruebas que ya lo confirmaban. Lo que faltaba no era construir algo</a:t>
+            </a:r>
+          </a:p>
+          <a:p>
+            <a:r>
+              <a:t>nuevo: faltaba generalizarlo —estaba conectado solo al agente de Siniestros— y nombrarlo</a:t>
+            </a:r>
+          </a:p>
+          <a:p>
+            <a:r>
+              <a:t>explícitamente como lo que es.</a:t>
             </a:r>
           </a:p>
           <a:p/>
           <a:p>
             <a:r>
-              <a:t>ReAct se evaluó explícitamente durante la fase de diseño. En lugar de forzar una implementación</a:t>
-            </a:r>
-          </a:p>
-          <a:p>
-            <a:r>
-              <a:t>completa de ReAct dentro del alcance académico —lo que habría introducido razonamiento menos</a:t>
-            </a:r>
-          </a:p>
-          <a:p>
-            <a:r>
-              <a:t>predecible en un dominio que exige justamente lo contrario— se decidió preservar la orquestación</a:t>
-            </a:r>
-          </a:p>
-          <a:p>
-            <a:r>
-              <a:t>determinista del Supervisor y dejar identificado a ReAct como la siguiente evolución</a:t>
-            </a:r>
-          </a:p>
-          <a:p>
-            <a:r>
-              <a:t>arquitectónica, no como algo ya construido. El diagrama de la derecha lo muestra con claridad: la</a:t>
-            </a:r>
-          </a:p>
-          <a:p>
-            <a:r>
-              <a:t>versión actual va directo de Tool Calling a la respuesta; la evolución agrega un bucle de</a:t>
-            </a:r>
-          </a:p>
-          <a:p>
-            <a:r>
-              <a:t>razonamiento —Reason, Tool, Observation, Reason— dentro del agente especialista, sin tocar al</a:t>
-            </a:r>
-          </a:p>
-          <a:p>
-            <a:r>
-              <a:t>Supervisor, sin tocar los Guardrails, sin tocar la memoria ni la seguridad empresarial.</a:t>
+              <a:t>Por eso hoy ReAct más Tool Calling es el patrón primario, implementado en los tres agentes</a:t>
+            </a:r>
+          </a:p>
+          <a:p>
+            <a:r>
+              <a:t>especialistas: Claims, Broker Services y Commercial Intake. Cada uno razona internamente antes de</a:t>
+            </a:r>
+          </a:p>
+          <a:p>
+            <a:r>
+              <a:t>responder, decide si necesita una herramienta, la invoca, observa el resultado, y repite ese ciclo</a:t>
+            </a:r>
+          </a:p>
+          <a:p>
+            <a:r>
+              <a:t>solo lo necesario antes de dar su respuesta final. El Supervisor, en cambio, permanece</a:t>
+            </a:r>
+          </a:p>
+          <a:p>
+            <a:r>
+              <a:t>completamente fuera de ese bucle: sigue enrutando de forma determinista, por palabras clave, sin</a:t>
+            </a:r>
+          </a:p>
+          <a:p>
+            <a:r>
+              <a:t>ningún modelo de lenguaje involucrado — esa separación es intencional y está documentada en el</a:t>
+            </a:r>
+          </a:p>
+          <a:p>
+            <a:r>
+              <a:t>ADR-0011: el enrutamiento es una decisión de gobierno que debe ser reproducible; el razonamiento</a:t>
+            </a:r>
+          </a:p>
+          <a:p>
+            <a:r>
+              <a:t>sobre qué herramienta usar es responsabilidad de cada agente especialista.</a:t>
             </a:r>
           </a:p>
           <a:p/>
           <a:p>
             <a:r>
-              <a:t>Esa evolución mejoraría el razonamiento autónomo en varios pasos y la validación de la conversación,</a:t>
-            </a:r>
-          </a:p>
-          <a:p>
-            <a:r>
-              <a:t>preservando en todo momento la gobernanza y la seguridad empresarial ya construidas.</a:t>
+              <a:t>Los patrones complementarios que ya estaban implementados —Multi-Agent, Planner-Executor, Memory,</a:t>
+            </a:r>
+          </a:p>
+          <a:p>
+            <a:r>
+              <a:t>Guardrails— siguen ahí, sin cambios; ReAct los complementa, no los reemplaza. Lo que sí cambió es</a:t>
+            </a:r>
+          </a:p>
+          <a:p>
+            <a:r>
+              <a:t>la lista de evolución futura: ya no incluye ReAct, porque dejó de ser futuro. Lo que queda son dos</a:t>
+            </a:r>
+          </a:p>
+          <a:p>
+            <a:r>
+              <a:t>patrones genuinamente no implementados — LLM-as-a-Judge y Self-Reflection — que evaluarían o</a:t>
+            </a:r>
+          </a:p>
+          <a:p>
+            <a:r>
+              <a:t>corregirían el propio razonamiento del agente, algo que este sistema no hace hoy.</a:t>
+            </a:r>
+          </a:p>
+          <a:p/>
+          <a:p>
+            <a:r>
+              <a:t>Y quiero cerrar con la regla que no cambió en absoluto: el razonamiento interno de ese bucle nunca</a:t>
+            </a:r>
+          </a:p>
+          <a:p>
+            <a:r>
+              <a:t>se expone al usuario ni se guarda en el historial de conversación — solo la respuesta final. Eso</a:t>
+            </a:r>
+          </a:p>
+          <a:p>
+            <a:r>
+              <a:t>está comprobado con pruebas dedicadas, no solo diseñado.</a:t>
             </a:r>
           </a:p>
         </p:txBody>
@@ -8660,6 +8686,1071 @@
 </file>
 
 <file path=ppt/slides/slide10.xml><?xml version="1.0" encoding="utf-8"?>
+<p:sld xmlns:a="http://schemas.openxmlformats.org/drawingml/2006/main" xmlns:r="http://schemas.openxmlformats.org/officeDocument/2006/relationships" xmlns:p="http://schemas.openxmlformats.org/presentationml/2006/main">
+  <p:cSld>
+    <p:bg>
+      <p:bgPr>
+        <a:solidFill>
+          <a:srgbClr val="FFFFFF"/>
+        </a:solidFill>
+        <a:effectLst/>
+      </p:bgPr>
+    </p:bg>
+    <p:spTree>
+      <p:nvGrpSpPr>
+        <p:cNvPr id="1" name=""/>
+        <p:cNvGrpSpPr/>
+        <p:nvPr/>
+      </p:nvGrpSpPr>
+      <p:grpSpPr>
+        <a:xfrm>
+          <a:off x="0" y="0"/>
+          <a:ext cx="0" cy="0"/>
+          <a:chOff x="0" y="0"/>
+          <a:chExt cx="0" cy="0"/>
+        </a:xfrm>
+      </p:grpSpPr>
+      <p:sp>
+        <p:nvSpPr>
+          <p:cNvPr id="2" name="Rounded Rectangle 1"/>
+          <p:cNvSpPr/>
+          <p:nvPr/>
+        </p:nvSpPr>
+        <p:spPr>
+          <a:xfrm>
+            <a:off x="0" y="0"/>
+            <a:ext cx="12191695" cy="960120"/>
+          </a:xfrm>
+          <a:prstGeom prst="roundRect">
+            <a:avLst>
+              <a:gd name="adj" fmla="val 6000"/>
+            </a:avLst>
+          </a:prstGeom>
+          <a:solidFill>
+            <a:srgbClr val="1F3A5F"/>
+          </a:solidFill>
+          <a:ln>
+            <a:noFill/>
+          </a:ln>
+          <a:effectLst/>
+        </p:spPr>
+        <p:style>
+          <a:lnRef idx="1">
+            <a:schemeClr val="accent1"/>
+          </a:lnRef>
+          <a:fillRef idx="3">
+            <a:schemeClr val="accent1"/>
+          </a:fillRef>
+          <a:effectRef idx="2">
+            <a:schemeClr val="accent1"/>
+          </a:effectRef>
+          <a:fontRef idx="minor">
+            <a:schemeClr val="lt1"/>
+          </a:fontRef>
+        </p:style>
+        <p:txBody>
+          <a:bodyPr rtlCol="0" anchor="ctr"/>
+          <a:lstStyle/>
+          <a:p>
+            <a:pPr algn="ctr"/>
+            <a:endParaRPr/>
+          </a:p>
+        </p:txBody>
+      </p:sp>
+      <p:sp>
+        <p:nvSpPr>
+          <p:cNvPr id="3" name="TextBox 2"/>
+          <p:cNvSpPr txBox="1"/>
+          <p:nvPr/>
+        </p:nvSpPr>
+        <p:spPr>
+          <a:xfrm>
+            <a:off x="502920" y="91440"/>
+            <a:ext cx="8686800" cy="274320"/>
+          </a:xfrm>
+          <a:prstGeom prst="rect">
+            <a:avLst/>
+          </a:prstGeom>
+          <a:noFill/>
+        </p:spPr>
+        <p:txBody>
+          <a:bodyPr wrap="square" lIns="50800" tIns="25400" rIns="50800" bIns="25400" anchor="t">
+            <a:spAutoFit/>
+          </a:bodyPr>
+          <a:lstStyle/>
+          <a:p>
+            <a:pPr algn="l">
+              <a:lnSpc>
+                <a:spcPct val="100000"/>
+              </a:lnSpc>
+            </a:pPr>
+            <a:r>
+              <a:rPr sz="1200" b="1" i="0">
+                <a:solidFill>
+                  <a:srgbClr val="B9CCE0"/>
+                </a:solidFill>
+                <a:latin typeface="Calibri"/>
+              </a:rPr>
+              <a:t>CÓMO SE CONSTRUYE, VALIDA Y DESPLIEGA</a:t>
+            </a:r>
+          </a:p>
+        </p:txBody>
+      </p:sp>
+      <p:sp>
+        <p:nvSpPr>
+          <p:cNvPr id="4" name="TextBox 3"/>
+          <p:cNvSpPr txBox="1"/>
+          <p:nvPr/>
+        </p:nvSpPr>
+        <p:spPr>
+          <a:xfrm>
+            <a:off x="502920" y="329184"/>
+            <a:ext cx="9875520" cy="548640"/>
+          </a:xfrm>
+          <a:prstGeom prst="rect">
+            <a:avLst/>
+          </a:prstGeom>
+          <a:noFill/>
+        </p:spPr>
+        <p:txBody>
+          <a:bodyPr wrap="square" lIns="50800" tIns="25400" rIns="50800" bIns="25400" anchor="t">
+            <a:spAutoFit/>
+          </a:bodyPr>
+          <a:lstStyle/>
+          <a:p>
+            <a:pPr algn="l">
+              <a:lnSpc>
+                <a:spcPct val="100000"/>
+              </a:lnSpc>
+            </a:pPr>
+            <a:r>
+              <a:rPr sz="2500" b="1" i="0">
+                <a:solidFill>
+                  <a:srgbClr val="FFFFFF"/>
+                </a:solidFill>
+                <a:latin typeface="Calibri"/>
+              </a:rPr>
+              <a:t>DevOps</a:t>
+            </a:r>
+          </a:p>
+        </p:txBody>
+      </p:sp>
+      <p:sp>
+        <p:nvSpPr>
+          <p:cNvPr id="5" name="TextBox 4"/>
+          <p:cNvSpPr txBox="1"/>
+          <p:nvPr/>
+        </p:nvSpPr>
+        <p:spPr>
+          <a:xfrm>
+            <a:off x="11155680" y="292608"/>
+            <a:ext cx="822960" cy="365760"/>
+          </a:xfrm>
+          <a:prstGeom prst="rect">
+            <a:avLst/>
+          </a:prstGeom>
+          <a:noFill/>
+        </p:spPr>
+        <p:txBody>
+          <a:bodyPr wrap="square" lIns="50800" tIns="25400" rIns="50800" bIns="25400" anchor="t">
+            <a:spAutoFit/>
+          </a:bodyPr>
+          <a:lstStyle/>
+          <a:p>
+            <a:pPr algn="r">
+              <a:lnSpc>
+                <a:spcPct val="100000"/>
+              </a:lnSpc>
+            </a:pPr>
+            <a:r>
+              <a:rPr sz="1300" b="1" i="0">
+                <a:solidFill>
+                  <a:srgbClr val="B9CCE0"/>
+                </a:solidFill>
+                <a:latin typeface="Calibri"/>
+              </a:rPr>
+              <a:t>10 / 14</a:t>
+            </a:r>
+          </a:p>
+        </p:txBody>
+      </p:sp>
+      <p:sp>
+        <p:nvSpPr>
+          <p:cNvPr id="6" name="TextBox 5"/>
+          <p:cNvSpPr txBox="1"/>
+          <p:nvPr/>
+        </p:nvSpPr>
+        <p:spPr>
+          <a:xfrm>
+            <a:off x="502920" y="1143000"/>
+            <a:ext cx="5669280" cy="274320"/>
+          </a:xfrm>
+          <a:prstGeom prst="rect">
+            <a:avLst/>
+          </a:prstGeom>
+          <a:noFill/>
+        </p:spPr>
+        <p:txBody>
+          <a:bodyPr wrap="square" lIns="50800" tIns="25400" rIns="50800" bIns="25400" anchor="t">
+            <a:spAutoFit/>
+          </a:bodyPr>
+          <a:lstStyle/>
+          <a:p>
+            <a:pPr algn="l">
+              <a:lnSpc>
+                <a:spcPct val="100000"/>
+              </a:lnSpc>
+            </a:pPr>
+            <a:r>
+              <a:rPr sz="1400" b="1" i="0">
+                <a:solidFill>
+                  <a:srgbClr val="0E7C86"/>
+                </a:solidFill>
+                <a:latin typeface="Calibri"/>
+              </a:rPr>
+              <a:t>Pipeline de integración y entrega continua</a:t>
+            </a:r>
+          </a:p>
+        </p:txBody>
+      </p:sp>
+      <p:sp>
+        <p:nvSpPr>
+          <p:cNvPr id="7" name="Rounded Rectangle 6"/>
+          <p:cNvSpPr/>
+          <p:nvPr/>
+        </p:nvSpPr>
+        <p:spPr>
+          <a:xfrm>
+            <a:off x="738479" y="1508760"/>
+            <a:ext cx="1508760" cy="548640"/>
+          </a:xfrm>
+          <a:prstGeom prst="roundRect">
+            <a:avLst>
+              <a:gd name="adj" fmla="val 6000"/>
+            </a:avLst>
+          </a:prstGeom>
+          <a:solidFill>
+            <a:srgbClr val="FFFFFF"/>
+          </a:solidFill>
+          <a:ln w="17780">
+            <a:solidFill>
+              <a:srgbClr val="0E7C86"/>
+            </a:solidFill>
+          </a:ln>
+          <a:effectLst/>
+        </p:spPr>
+        <p:style>
+          <a:lnRef idx="1">
+            <a:schemeClr val="accent1"/>
+          </a:lnRef>
+          <a:fillRef idx="3">
+            <a:schemeClr val="accent1"/>
+          </a:fillRef>
+          <a:effectRef idx="2">
+            <a:schemeClr val="accent1"/>
+          </a:effectRef>
+          <a:fontRef idx="minor">
+            <a:schemeClr val="lt1"/>
+          </a:fontRef>
+        </p:style>
+        <p:txBody>
+          <a:bodyPr wrap="square" lIns="38100" rIns="38100" rtlCol="0" anchor="ctr"/>
+          <a:lstStyle/>
+          <a:p>
+            <a:pPr algn="ctr"/>
+            <a:r>
+              <a:rPr sz="1000" b="1">
+                <a:solidFill>
+                  <a:srgbClr val="0E7C86"/>
+                </a:solidFill>
+                <a:latin typeface="Calibri"/>
+              </a:rPr>
+              <a:t>CI — Calidad</a:t>
+            </a:r>
+          </a:p>
+        </p:txBody>
+      </p:sp>
+      <p:sp>
+        <p:nvSpPr>
+          <p:cNvPr id="8" name="Rounded Rectangle 7"/>
+          <p:cNvSpPr/>
+          <p:nvPr/>
+        </p:nvSpPr>
+        <p:spPr>
+          <a:xfrm>
+            <a:off x="2475839" y="1508760"/>
+            <a:ext cx="1508760" cy="548640"/>
+          </a:xfrm>
+          <a:prstGeom prst="roundRect">
+            <a:avLst>
+              <a:gd name="adj" fmla="val 6000"/>
+            </a:avLst>
+          </a:prstGeom>
+          <a:solidFill>
+            <a:srgbClr val="FFFFFF"/>
+          </a:solidFill>
+          <a:ln w="17780">
+            <a:solidFill>
+              <a:srgbClr val="0E7C86"/>
+            </a:solidFill>
+          </a:ln>
+          <a:effectLst/>
+        </p:spPr>
+        <p:style>
+          <a:lnRef idx="1">
+            <a:schemeClr val="accent1"/>
+          </a:lnRef>
+          <a:fillRef idx="3">
+            <a:schemeClr val="accent1"/>
+          </a:fillRef>
+          <a:effectRef idx="2">
+            <a:schemeClr val="accent1"/>
+          </a:effectRef>
+          <a:fontRef idx="minor">
+            <a:schemeClr val="lt1"/>
+          </a:fontRef>
+        </p:style>
+        <p:txBody>
+          <a:bodyPr wrap="square" lIns="38100" rIns="38100" rtlCol="0" anchor="ctr"/>
+          <a:lstStyle/>
+          <a:p>
+            <a:pPr algn="ctr"/>
+            <a:r>
+              <a:rPr sz="1000" b="1" dirty="0">
+                <a:solidFill>
+                  <a:srgbClr val="0E7C86"/>
+                </a:solidFill>
+                <a:latin typeface="Calibri"/>
+              </a:rPr>
+              <a:t>Quality
+Gates</a:t>
+            </a:r>
+          </a:p>
+        </p:txBody>
+      </p:sp>
+      <p:cxnSp>
+        <p:nvCxnSpPr>
+          <p:cNvPr id="9" name="Connector 8"/>
+          <p:cNvCxnSpPr>
+            <a:cxnSpLocks/>
+            <a:stCxn id="7" idx="3"/>
+          </p:cNvCxnSpPr>
+          <p:nvPr/>
+        </p:nvCxnSpPr>
+        <p:spPr>
+          <a:xfrm>
+            <a:off x="2247239" y="1783080"/>
+            <a:ext cx="224028" cy="0"/>
+          </a:xfrm>
+          <a:prstGeom prst="line">
+            <a:avLst/>
+          </a:prstGeom>
+          <a:ln w="22225">
+            <a:solidFill>
+              <a:srgbClr val="0E7C86"/>
+            </a:solidFill>
+          </a:ln>
+        </p:spPr>
+        <p:style>
+          <a:lnRef idx="2">
+            <a:schemeClr val="accent1"/>
+          </a:lnRef>
+          <a:fillRef idx="0">
+            <a:schemeClr val="accent1"/>
+          </a:fillRef>
+          <a:effectRef idx="1">
+            <a:schemeClr val="accent1"/>
+          </a:effectRef>
+          <a:fontRef idx="minor">
+            <a:schemeClr val="tx1"/>
+          </a:fontRef>
+        </p:style>
+      </p:cxnSp>
+      <p:sp>
+        <p:nvSpPr>
+          <p:cNvPr id="10" name="Rounded Rectangle 9"/>
+          <p:cNvSpPr/>
+          <p:nvPr/>
+        </p:nvSpPr>
+        <p:spPr>
+          <a:xfrm>
+            <a:off x="4213199" y="1508760"/>
+            <a:ext cx="1508760" cy="548640"/>
+          </a:xfrm>
+          <a:prstGeom prst="roundRect">
+            <a:avLst>
+              <a:gd name="adj" fmla="val 6000"/>
+            </a:avLst>
+          </a:prstGeom>
+          <a:solidFill>
+            <a:srgbClr val="FFFFFF"/>
+          </a:solidFill>
+          <a:ln w="17780">
+            <a:solidFill>
+              <a:srgbClr val="0E7C86"/>
+            </a:solidFill>
+          </a:ln>
+          <a:effectLst/>
+        </p:spPr>
+        <p:style>
+          <a:lnRef idx="1">
+            <a:schemeClr val="accent1"/>
+          </a:lnRef>
+          <a:fillRef idx="3">
+            <a:schemeClr val="accent1"/>
+          </a:fillRef>
+          <a:effectRef idx="2">
+            <a:schemeClr val="accent1"/>
+          </a:effectRef>
+          <a:fontRef idx="minor">
+            <a:schemeClr val="lt1"/>
+          </a:fontRef>
+        </p:style>
+        <p:txBody>
+          <a:bodyPr wrap="square" lIns="38100" rIns="38100" rtlCol="0" anchor="ctr"/>
+          <a:lstStyle/>
+          <a:p>
+            <a:pPr algn="ctr"/>
+            <a:r>
+              <a:rPr sz="1000" b="1">
+                <a:solidFill>
+                  <a:srgbClr val="0E7C86"/>
+                </a:solidFill>
+                <a:latin typeface="Calibri"/>
+              </a:rPr>
+              <a:t>Docker
+Build</a:t>
+            </a:r>
+          </a:p>
+        </p:txBody>
+      </p:sp>
+      <p:cxnSp>
+        <p:nvCxnSpPr>
+          <p:cNvPr id="11" name="Connector 10"/>
+          <p:cNvCxnSpPr>
+            <a:cxnSpLocks/>
+            <a:stCxn id="8" idx="3"/>
+          </p:cNvCxnSpPr>
+          <p:nvPr/>
+        </p:nvCxnSpPr>
+        <p:spPr>
+          <a:xfrm>
+            <a:off x="3984599" y="1783080"/>
+            <a:ext cx="224028" cy="0"/>
+          </a:xfrm>
+          <a:prstGeom prst="line">
+            <a:avLst/>
+          </a:prstGeom>
+          <a:ln w="22225">
+            <a:solidFill>
+              <a:srgbClr val="0E7C86"/>
+            </a:solidFill>
+          </a:ln>
+        </p:spPr>
+        <p:style>
+          <a:lnRef idx="2">
+            <a:schemeClr val="accent1"/>
+          </a:lnRef>
+          <a:fillRef idx="0">
+            <a:schemeClr val="accent1"/>
+          </a:fillRef>
+          <a:effectRef idx="1">
+            <a:schemeClr val="accent1"/>
+          </a:effectRef>
+          <a:fontRef idx="minor">
+            <a:schemeClr val="tx1"/>
+          </a:fontRef>
+        </p:style>
+      </p:cxnSp>
+      <p:sp>
+        <p:nvSpPr>
+          <p:cNvPr id="12" name="Rounded Rectangle 11"/>
+          <p:cNvSpPr/>
+          <p:nvPr/>
+        </p:nvSpPr>
+        <p:spPr>
+          <a:xfrm>
+            <a:off x="5950559" y="1508760"/>
+            <a:ext cx="1508760" cy="548640"/>
+          </a:xfrm>
+          <a:prstGeom prst="roundRect">
+            <a:avLst>
+              <a:gd name="adj" fmla="val 6000"/>
+            </a:avLst>
+          </a:prstGeom>
+          <a:solidFill>
+            <a:srgbClr val="FFFFFF"/>
+          </a:solidFill>
+          <a:ln w="17780">
+            <a:solidFill>
+              <a:srgbClr val="0E7C86"/>
+            </a:solidFill>
+          </a:ln>
+          <a:effectLst/>
+        </p:spPr>
+        <p:style>
+          <a:lnRef idx="1">
+            <a:schemeClr val="accent1"/>
+          </a:lnRef>
+          <a:fillRef idx="3">
+            <a:schemeClr val="accent1"/>
+          </a:fillRef>
+          <a:effectRef idx="2">
+            <a:schemeClr val="accent1"/>
+          </a:effectRef>
+          <a:fontRef idx="minor">
+            <a:schemeClr val="lt1"/>
+          </a:fontRef>
+        </p:style>
+        <p:txBody>
+          <a:bodyPr wrap="square" lIns="38100" rIns="38100" rtlCol="0" anchor="ctr"/>
+          <a:lstStyle/>
+          <a:p>
+            <a:pPr algn="ctr"/>
+            <a:r>
+              <a:rPr sz="1000" b="1">
+                <a:solidFill>
+                  <a:srgbClr val="0E7C86"/>
+                </a:solidFill>
+                <a:latin typeface="Calibri"/>
+              </a:rPr>
+              <a:t>IaC
+(Bicep)</a:t>
+            </a:r>
+          </a:p>
+        </p:txBody>
+      </p:sp>
+      <p:cxnSp>
+        <p:nvCxnSpPr>
+          <p:cNvPr id="13" name="Connector 12"/>
+          <p:cNvCxnSpPr>
+            <a:cxnSpLocks/>
+            <a:stCxn id="10" idx="3"/>
+          </p:cNvCxnSpPr>
+          <p:nvPr/>
+        </p:nvCxnSpPr>
+        <p:spPr>
+          <a:xfrm>
+            <a:off x="5721959" y="1783080"/>
+            <a:ext cx="224028" cy="0"/>
+          </a:xfrm>
+          <a:prstGeom prst="line">
+            <a:avLst/>
+          </a:prstGeom>
+          <a:ln w="22225">
+            <a:solidFill>
+              <a:srgbClr val="0E7C86"/>
+            </a:solidFill>
+          </a:ln>
+        </p:spPr>
+        <p:style>
+          <a:lnRef idx="2">
+            <a:schemeClr val="accent1"/>
+          </a:lnRef>
+          <a:fillRef idx="0">
+            <a:schemeClr val="accent1"/>
+          </a:fillRef>
+          <a:effectRef idx="1">
+            <a:schemeClr val="accent1"/>
+          </a:effectRef>
+          <a:fontRef idx="minor">
+            <a:schemeClr val="tx1"/>
+          </a:fontRef>
+        </p:style>
+      </p:cxnSp>
+      <p:sp>
+        <p:nvSpPr>
+          <p:cNvPr id="14" name="Rounded Rectangle 13"/>
+          <p:cNvSpPr/>
+          <p:nvPr/>
+        </p:nvSpPr>
+        <p:spPr>
+          <a:xfrm>
+            <a:off x="7687919" y="1508760"/>
+            <a:ext cx="1508760" cy="548640"/>
+          </a:xfrm>
+          <a:prstGeom prst="roundRect">
+            <a:avLst>
+              <a:gd name="adj" fmla="val 6000"/>
+            </a:avLst>
+          </a:prstGeom>
+          <a:solidFill>
+            <a:srgbClr val="FFFFFF"/>
+          </a:solidFill>
+          <a:ln w="17780">
+            <a:solidFill>
+              <a:srgbClr val="0E7C86"/>
+            </a:solidFill>
+          </a:ln>
+          <a:effectLst/>
+        </p:spPr>
+        <p:style>
+          <a:lnRef idx="1">
+            <a:schemeClr val="accent1"/>
+          </a:lnRef>
+          <a:fillRef idx="3">
+            <a:schemeClr val="accent1"/>
+          </a:fillRef>
+          <a:effectRef idx="2">
+            <a:schemeClr val="accent1"/>
+          </a:effectRef>
+          <a:fontRef idx="minor">
+            <a:schemeClr val="lt1"/>
+          </a:fontRef>
+        </p:style>
+        <p:txBody>
+          <a:bodyPr wrap="square" lIns="38100" rIns="38100" rtlCol="0" anchor="ctr"/>
+          <a:lstStyle/>
+          <a:p>
+            <a:pPr algn="ctr"/>
+            <a:r>
+              <a:rPr sz="1000" b="1">
+                <a:solidFill>
+                  <a:srgbClr val="0E7C86"/>
+                </a:solidFill>
+                <a:latin typeface="Calibri"/>
+              </a:rPr>
+              <a:t>Despliegue
+DEV</a:t>
+            </a:r>
+          </a:p>
+        </p:txBody>
+      </p:sp>
+      <p:cxnSp>
+        <p:nvCxnSpPr>
+          <p:cNvPr id="15" name="Connector 14"/>
+          <p:cNvCxnSpPr>
+            <a:cxnSpLocks/>
+            <a:stCxn id="12" idx="3"/>
+          </p:cNvCxnSpPr>
+          <p:nvPr/>
+        </p:nvCxnSpPr>
+        <p:spPr>
+          <a:xfrm>
+            <a:off x="7459319" y="1783080"/>
+            <a:ext cx="224028" cy="0"/>
+          </a:xfrm>
+          <a:prstGeom prst="line">
+            <a:avLst/>
+          </a:prstGeom>
+          <a:ln w="22225">
+            <a:solidFill>
+              <a:srgbClr val="0E7C86"/>
+            </a:solidFill>
+          </a:ln>
+        </p:spPr>
+        <p:style>
+          <a:lnRef idx="2">
+            <a:schemeClr val="accent1"/>
+          </a:lnRef>
+          <a:fillRef idx="0">
+            <a:schemeClr val="accent1"/>
+          </a:fillRef>
+          <a:effectRef idx="1">
+            <a:schemeClr val="accent1"/>
+          </a:effectRef>
+          <a:fontRef idx="minor">
+            <a:schemeClr val="tx1"/>
+          </a:fontRef>
+        </p:style>
+      </p:cxnSp>
+      <p:sp>
+        <p:nvSpPr>
+          <p:cNvPr id="16" name="Rounded Rectangle 15"/>
+          <p:cNvSpPr/>
+          <p:nvPr/>
+        </p:nvSpPr>
+        <p:spPr>
+          <a:xfrm>
+            <a:off x="9425279" y="1508760"/>
+            <a:ext cx="1508760" cy="548640"/>
+          </a:xfrm>
+          <a:prstGeom prst="roundRect">
+            <a:avLst>
+              <a:gd name="adj" fmla="val 6000"/>
+            </a:avLst>
+          </a:prstGeom>
+          <a:solidFill>
+            <a:srgbClr val="FFFFFF"/>
+          </a:solidFill>
+          <a:ln w="17780">
+            <a:solidFill>
+              <a:srgbClr val="0E7C86"/>
+            </a:solidFill>
+          </a:ln>
+          <a:effectLst/>
+        </p:spPr>
+        <p:style>
+          <a:lnRef idx="1">
+            <a:schemeClr val="accent1"/>
+          </a:lnRef>
+          <a:fillRef idx="3">
+            <a:schemeClr val="accent1"/>
+          </a:fillRef>
+          <a:effectRef idx="2">
+            <a:schemeClr val="accent1"/>
+          </a:effectRef>
+          <a:fontRef idx="minor">
+            <a:schemeClr val="lt1"/>
+          </a:fontRef>
+        </p:style>
+        <p:txBody>
+          <a:bodyPr wrap="square" lIns="38100" rIns="38100" rtlCol="0" anchor="ctr"/>
+          <a:lstStyle/>
+          <a:p>
+            <a:pPr algn="ctr"/>
+            <a:r>
+              <a:rPr sz="1000" b="1">
+                <a:solidFill>
+                  <a:srgbClr val="0E7C86"/>
+                </a:solidFill>
+                <a:latin typeface="Calibri"/>
+              </a:rPr>
+              <a:t>Smoke
+Tests</a:t>
+            </a:r>
+          </a:p>
+        </p:txBody>
+      </p:sp>
+      <p:cxnSp>
+        <p:nvCxnSpPr>
+          <p:cNvPr id="17" name="Connector 16"/>
+          <p:cNvCxnSpPr>
+            <a:cxnSpLocks/>
+            <a:stCxn id="14" idx="3"/>
+          </p:cNvCxnSpPr>
+          <p:nvPr/>
+        </p:nvCxnSpPr>
+        <p:spPr>
+          <a:xfrm>
+            <a:off x="9196679" y="1783080"/>
+            <a:ext cx="224028" cy="0"/>
+          </a:xfrm>
+          <a:prstGeom prst="line">
+            <a:avLst/>
+          </a:prstGeom>
+          <a:ln w="22225">
+            <a:solidFill>
+              <a:srgbClr val="0E7C86"/>
+            </a:solidFill>
+          </a:ln>
+        </p:spPr>
+        <p:style>
+          <a:lnRef idx="2">
+            <a:schemeClr val="accent1"/>
+          </a:lnRef>
+          <a:fillRef idx="0">
+            <a:schemeClr val="accent1"/>
+          </a:fillRef>
+          <a:effectRef idx="1">
+            <a:schemeClr val="accent1"/>
+          </a:effectRef>
+          <a:fontRef idx="minor">
+            <a:schemeClr val="tx1"/>
+          </a:fontRef>
+        </p:style>
+      </p:cxnSp>
+      <p:sp>
+        <p:nvSpPr>
+          <p:cNvPr id="18" name="TextBox 17"/>
+          <p:cNvSpPr txBox="1"/>
+          <p:nvPr/>
+        </p:nvSpPr>
+        <p:spPr>
+          <a:xfrm>
+            <a:off x="502920" y="2286000"/>
+            <a:ext cx="11155680" cy="914400"/>
+          </a:xfrm>
+          <a:prstGeom prst="rect">
+            <a:avLst/>
+          </a:prstGeom>
+          <a:noFill/>
+        </p:spPr>
+        <p:txBody>
+          <a:bodyPr wrap="square">
+            <a:spAutoFit/>
+          </a:bodyPr>
+          <a:lstStyle/>
+          <a:p>
+            <a:pPr>
+              <a:spcAft>
+                <a:spcPts val="800"/>
+              </a:spcAft>
+            </a:pPr>
+            <a:r>
+              <a:rPr sz="1250">
+                <a:solidFill>
+                  <a:srgbClr val="142640"/>
+                </a:solidFill>
+                <a:latin typeface="Calibri"/>
+              </a:rPr>
+              <a:t>▪  Cada etapa bloquea a la siguiente — nada avanza a producción si la calidad o la seguridad fallan.</a:t>
+            </a:r>
+          </a:p>
+          <a:p>
+            <a:pPr>
+              <a:spcAft>
+                <a:spcPts val="800"/>
+              </a:spcAft>
+            </a:pPr>
+            <a:r>
+              <a:rPr sz="1250">
+                <a:solidFill>
+                  <a:srgbClr val="142640"/>
+                </a:solidFill>
+                <a:latin typeface="Calibri"/>
+              </a:rPr>
+              <a:t>▪  El despliegue ocurre solo desde la rama principal; cada imagen queda trazable a un commit.</a:t>
+            </a:r>
+          </a:p>
+        </p:txBody>
+      </p:sp>
+      <p:sp>
+        <p:nvSpPr>
+          <p:cNvPr id="19" name="Rounded Rectangle 18"/>
+          <p:cNvSpPr/>
+          <p:nvPr/>
+        </p:nvSpPr>
+        <p:spPr>
+          <a:xfrm>
+            <a:off x="502920" y="3383280"/>
+            <a:ext cx="11201400" cy="2468880"/>
+          </a:xfrm>
+          <a:prstGeom prst="roundRect">
+            <a:avLst>
+              <a:gd name="adj" fmla="val 6000"/>
+            </a:avLst>
+          </a:prstGeom>
+          <a:solidFill>
+            <a:srgbClr val="F2F2F2"/>
+          </a:solidFill>
+          <a:ln w="15875">
+            <a:solidFill>
+              <a:srgbClr val="B87A00"/>
+            </a:solidFill>
+          </a:ln>
+          <a:effectLst/>
+        </p:spPr>
+        <p:style>
+          <a:lnRef idx="1">
+            <a:schemeClr val="accent1"/>
+          </a:lnRef>
+          <a:fillRef idx="3">
+            <a:schemeClr val="accent1"/>
+          </a:fillRef>
+          <a:effectRef idx="2">
+            <a:schemeClr val="accent1"/>
+          </a:effectRef>
+          <a:fontRef idx="minor">
+            <a:schemeClr val="lt1"/>
+          </a:fontRef>
+        </p:style>
+        <p:txBody>
+          <a:bodyPr rtlCol="0" anchor="ctr"/>
+          <a:lstStyle/>
+          <a:p>
+            <a:pPr algn="ctr"/>
+            <a:endParaRPr/>
+          </a:p>
+        </p:txBody>
+      </p:sp>
+      <p:sp>
+        <p:nvSpPr>
+          <p:cNvPr id="20" name="TextBox 19"/>
+          <p:cNvSpPr txBox="1"/>
+          <p:nvPr/>
+        </p:nvSpPr>
+        <p:spPr>
+          <a:xfrm>
+            <a:off x="731520" y="3547872"/>
+            <a:ext cx="10607040" cy="259045"/>
+          </a:xfrm>
+          <a:prstGeom prst="rect">
+            <a:avLst/>
+          </a:prstGeom>
+          <a:noFill/>
+        </p:spPr>
+        <p:txBody>
+          <a:bodyPr wrap="square" lIns="50800" tIns="25400" rIns="50800" bIns="25400" anchor="t">
+            <a:spAutoFit/>
+          </a:bodyPr>
+          <a:lstStyle/>
+          <a:p>
+            <a:pPr algn="l">
+              <a:lnSpc>
+                <a:spcPct val="100000"/>
+              </a:lnSpc>
+            </a:pPr>
+            <a:r>
+              <a:rPr sz="1350" b="1" i="0" dirty="0">
+                <a:solidFill>
+                  <a:srgbClr val="B87A00"/>
+                </a:solidFill>
+                <a:latin typeface="Calibri"/>
+              </a:rPr>
+              <a:t>¿Por </a:t>
+            </a:r>
+            <a:r>
+              <a:rPr sz="1350" b="1" i="0" dirty="0" err="1">
+                <a:solidFill>
+                  <a:srgbClr val="B87A00"/>
+                </a:solidFill>
+                <a:latin typeface="Calibri"/>
+              </a:rPr>
+              <a:t>qué</a:t>
+            </a:r>
+            <a:r>
+              <a:rPr sz="1350" b="1" i="0" dirty="0">
+                <a:solidFill>
+                  <a:srgbClr val="B87A00"/>
+                </a:solidFill>
+                <a:latin typeface="Calibri"/>
+              </a:rPr>
+              <a:t> Azure Functions no </a:t>
+            </a:r>
+            <a:r>
+              <a:rPr sz="1350" b="1" i="0" dirty="0" err="1">
+                <a:solidFill>
+                  <a:srgbClr val="B87A00"/>
+                </a:solidFill>
+                <a:latin typeface="Calibri"/>
+              </a:rPr>
+              <a:t>está</a:t>
+            </a:r>
+            <a:r>
+              <a:rPr sz="1350" b="1" i="0" dirty="0">
+                <a:solidFill>
+                  <a:srgbClr val="B87A00"/>
+                </a:solidFill>
+                <a:latin typeface="Calibri"/>
+              </a:rPr>
+              <a:t> </a:t>
+            </a:r>
+            <a:r>
+              <a:rPr sz="1350" b="1" i="0" dirty="0" err="1">
+                <a:solidFill>
+                  <a:srgbClr val="B87A00"/>
+                </a:solidFill>
+                <a:latin typeface="Calibri"/>
+              </a:rPr>
+              <a:t>desplegado</a:t>
+            </a:r>
+            <a:r>
+              <a:rPr sz="1350" b="1" i="0" dirty="0">
+                <a:solidFill>
+                  <a:srgbClr val="B87A00"/>
+                </a:solidFill>
+                <a:latin typeface="Calibri"/>
+              </a:rPr>
+              <a:t>? — </a:t>
+            </a:r>
+            <a:r>
+              <a:rPr lang="es-MX" sz="1350" b="1" dirty="0">
+                <a:solidFill>
+                  <a:srgbClr val="B87A00"/>
+                </a:solidFill>
+                <a:latin typeface="Calibri"/>
+              </a:rPr>
+              <a:t>E</a:t>
+            </a:r>
+            <a:r>
+              <a:rPr sz="1350" b="1" i="0" dirty="0" err="1">
+                <a:solidFill>
+                  <a:srgbClr val="B87A00"/>
+                </a:solidFill>
+                <a:latin typeface="Calibri"/>
+              </a:rPr>
+              <a:t>xplicación</a:t>
+            </a:r>
+            <a:endParaRPr sz="1350" b="1" i="0" dirty="0">
+              <a:solidFill>
+                <a:srgbClr val="B87A00"/>
+              </a:solidFill>
+              <a:latin typeface="Calibri"/>
+            </a:endParaRPr>
+          </a:p>
+        </p:txBody>
+      </p:sp>
+      <p:sp>
+        <p:nvSpPr>
+          <p:cNvPr id="21" name="TextBox 20"/>
+          <p:cNvSpPr txBox="1"/>
+          <p:nvPr/>
+        </p:nvSpPr>
+        <p:spPr>
+          <a:xfrm>
+            <a:off x="731520" y="3931920"/>
+            <a:ext cx="10607040" cy="1828800"/>
+          </a:xfrm>
+          <a:prstGeom prst="rect">
+            <a:avLst/>
+          </a:prstGeom>
+          <a:noFill/>
+        </p:spPr>
+        <p:txBody>
+          <a:bodyPr wrap="square">
+            <a:spAutoFit/>
+          </a:bodyPr>
+          <a:lstStyle/>
+          <a:p>
+            <a:pPr>
+              <a:spcAft>
+                <a:spcPts val="1000"/>
+              </a:spcAft>
+            </a:pPr>
+            <a:r>
+              <a:rPr sz="1250">
+                <a:solidFill>
+                  <a:srgbClr val="B87A00"/>
+                </a:solidFill>
+                <a:latin typeface="Calibri"/>
+              </a:rPr>
+              <a:t>▪  La suscripción de Azure usada en DEV tiene cuota cero para Microsoft.Web / App Service — confirmado con múltiples intentos reales de despliegue, en distintos SKU, todos rechazados por la misma razón de cuota.</a:t>
+            </a:r>
+          </a:p>
+          <a:p>
+            <a:pPr>
+              <a:spcAft>
+                <a:spcPts val="1000"/>
+              </a:spcAft>
+            </a:pPr>
+            <a:r>
+              <a:rPr sz="1250">
+                <a:solidFill>
+                  <a:srgbClr val="B87A00"/>
+                </a:solidFill>
+                <a:latin typeface="Calibri"/>
+              </a:rPr>
+              <a:t>▪  Es una restricción externa de la suscripción, no una limitación de diseño ni un defecto de arquitectura — el código, las pruebas y la infraestructura de Azure Functions ya existen.</a:t>
+            </a:r>
+          </a:p>
+          <a:p>
+            <a:pPr>
+              <a:spcAft>
+                <a:spcPts val="1000"/>
+              </a:spcAft>
+            </a:pPr>
+            <a:r>
+              <a:rPr sz="1250">
+                <a:solidFill>
+                  <a:srgbClr val="B87A00"/>
+                </a:solidFill>
+                <a:latin typeface="Calibri"/>
+              </a:rPr>
+              <a:t>▪  Por eso el runtime actual es "Tool Provider en proceso": exactamente la misma arquitectura de herramientas, ejecutando en un runtime distinto al objetivo. Cambiar de runtime es un cambio de configuración, no una reescritura de código.</a:t>
+            </a:r>
+          </a:p>
+        </p:txBody>
+      </p:sp>
+    </p:spTree>
+  </p:cSld>
+  <p:clrMapOvr>
+    <a:masterClrMapping/>
+  </p:clrMapOvr>
+</p:sld>
+</file>
+
+<file path=ppt/slides/slide11.xml><?xml version="1.0" encoding="utf-8"?>
 <p:sld xmlns:a="http://schemas.openxmlformats.org/drawingml/2006/main" xmlns:r="http://schemas.openxmlformats.org/officeDocument/2006/relationships" xmlns:p="http://schemas.openxmlformats.org/presentationml/2006/main">
   <p:cSld>
     <p:bg>
@@ -9810,7 +10901,7 @@
 </p:sld>
 </file>
 
-<file path=ppt/slides/slide11.xml><?xml version="1.0" encoding="utf-8"?>
+<file path=ppt/slides/slide12.xml><?xml version="1.0" encoding="utf-8"?>
 <p:sld xmlns:a="http://schemas.openxmlformats.org/drawingml/2006/main" xmlns:r="http://schemas.openxmlformats.org/officeDocument/2006/relationships" xmlns:p="http://schemas.openxmlformats.org/presentationml/2006/main">
   <p:cSld>
     <p:spTree>
@@ -10667,7 +11758,7 @@
 </p:sld>
 </file>
 
-<file path=ppt/slides/slide12.xml><?xml version="1.0" encoding="utf-8"?>
+<file path=ppt/slides/slide13.xml><?xml version="1.0" encoding="utf-8"?>
 <p:sld xmlns:a="http://schemas.openxmlformats.org/drawingml/2006/main" xmlns:r="http://schemas.openxmlformats.org/officeDocument/2006/relationships" xmlns:p="http://schemas.openxmlformats.org/presentationml/2006/main">
   <p:cSld>
     <p:bg>
@@ -11753,7 +12844,7 @@
 </p:sld>
 </file>
 
-<file path=ppt/slides/slide13.xml><?xml version="1.0" encoding="utf-8"?>
+<file path=ppt/slides/slide14.xml><?xml version="1.0" encoding="utf-8"?>
 <p:sld xmlns:a="http://schemas.openxmlformats.org/drawingml/2006/main" xmlns:r="http://schemas.openxmlformats.org/officeDocument/2006/relationships" xmlns:p="http://schemas.openxmlformats.org/presentationml/2006/main">
   <p:cSld>
     <p:bg>
@@ -12362,2412 +13453,6 @@
                 <a:latin typeface="Calibri"/>
               </a:rPr>
               <a:t>Gracias — Preguntas</a:t>
-            </a:r>
-          </a:p>
-        </p:txBody>
-      </p:sp>
-    </p:spTree>
-  </p:cSld>
-  <p:clrMapOvr>
-    <a:masterClrMapping/>
-  </p:clrMapOvr>
-</p:sld>
-</file>
-
-<file path=ppt/slides/slide14.xml><?xml version="1.0" encoding="utf-8"?>
-<p:sld xmlns:a="http://schemas.openxmlformats.org/drawingml/2006/main" xmlns:p="http://schemas.openxmlformats.org/presentationml/2006/main" xmlns:r="http://schemas.openxmlformats.org/officeDocument/2006/relationships">
-  <p:cSld>
-    <p:bg>
-      <p:bgPr>
-        <a:solidFill>
-          <a:srgbClr val="FFFFFF"/>
-        </a:solidFill>
-        <a:effectLst/>
-      </p:bgPr>
-    </p:bg>
-    <p:spTree>
-      <p:nvGrpSpPr>
-        <p:cNvPr id="1" name=""/>
-        <p:cNvGrpSpPr/>
-        <p:nvPr/>
-      </p:nvGrpSpPr>
-      <p:grpSpPr/>
-      <p:sp>
-        <p:nvSpPr>
-          <p:cNvPr id="2" name="Rounded Rectangle 1"/>
-          <p:cNvSpPr/>
-          <p:nvPr/>
-        </p:nvSpPr>
-        <p:spPr>
-          <a:xfrm>
-            <a:off x="0" y="0"/>
-            <a:ext cx="12192000" cy="960120"/>
-          </a:xfrm>
-          <a:prstGeom prst="roundRect">
-            <a:avLst>
-              <a:gd name="adj" fmla="val 6000"/>
-            </a:avLst>
-          </a:prstGeom>
-          <a:solidFill>
-            <a:srgbClr val="1F3A5F"/>
-          </a:solidFill>
-          <a:ln>
-            <a:noFill/>
-          </a:ln>
-          <a:effectLst/>
-        </p:spPr>
-        <p:style>
-          <a:lnRef idx="1">
-            <a:schemeClr val="accent1"/>
-          </a:lnRef>
-          <a:fillRef idx="3">
-            <a:schemeClr val="accent1"/>
-          </a:fillRef>
-          <a:effectRef idx="2">
-            <a:schemeClr val="accent1"/>
-          </a:effectRef>
-          <a:fontRef idx="minor">
-            <a:schemeClr val="lt1"/>
-          </a:fontRef>
-        </p:style>
-        <p:txBody>
-          <a:bodyPr rtlCol="0" anchor="ctr"/>
-          <a:lstStyle/>
-          <a:p>
-            <a:pPr algn="ctr"/>
-          </a:p>
-        </p:txBody>
-      </p:sp>
-      <p:sp>
-        <p:nvSpPr>
-          <p:cNvPr id="3" name="TextBox 2"/>
-          <p:cNvSpPr txBox="1"/>
-          <p:nvPr/>
-        </p:nvSpPr>
-        <p:spPr>
-          <a:xfrm>
-            <a:off x="502920" y="91440"/>
-            <a:ext cx="8686800" cy="274320"/>
-          </a:xfrm>
-          <a:prstGeom prst="rect">
-            <a:avLst/>
-          </a:prstGeom>
-          <a:noFill/>
-        </p:spPr>
-        <p:txBody>
-          <a:bodyPr wrap="square" anchor="t" lIns="50800" rIns="50800" tIns="25400" bIns="25400">
-            <a:spAutoFit/>
-          </a:bodyPr>
-          <a:lstStyle/>
-          <a:p>
-            <a:pPr algn="l">
-              <a:lnSpc>
-                <a:spcPct val="100000"/>
-              </a:lnSpc>
-            </a:pPr>
-            <a:r>
-              <a:rPr sz="1200" b="1" i="0">
-                <a:solidFill>
-                  <a:srgbClr val="B9CCE0"/>
-                </a:solidFill>
-                <a:latin typeface="Calibri"/>
-              </a:rPr>
-              <a:t>POR QUÉ ESTA ARQUITECTURA, EN EL LENGUAJE DE PATRONES DEL CURSO</a:t>
-            </a:r>
-          </a:p>
-        </p:txBody>
-      </p:sp>
-      <p:sp>
-        <p:nvSpPr>
-          <p:cNvPr id="4" name="TextBox 3"/>
-          <p:cNvSpPr txBox="1"/>
-          <p:nvPr/>
-        </p:nvSpPr>
-        <p:spPr>
-          <a:xfrm>
-            <a:off x="502920" y="329184"/>
-            <a:ext cx="9875520" cy="548640"/>
-          </a:xfrm>
-          <a:prstGeom prst="rect">
-            <a:avLst/>
-          </a:prstGeom>
-          <a:noFill/>
-        </p:spPr>
-        <p:txBody>
-          <a:bodyPr wrap="square" anchor="t" lIns="50800" rIns="50800" tIns="25400" bIns="25400">
-            <a:spAutoFit/>
-          </a:bodyPr>
-          <a:lstStyle/>
-          <a:p>
-            <a:pPr algn="l">
-              <a:lnSpc>
-                <a:spcPct val="100000"/>
-              </a:lnSpc>
-            </a:pPr>
-            <a:r>
-              <a:rPr sz="2500" b="1" i="0">
-                <a:solidFill>
-                  <a:srgbClr val="FFFFFF"/>
-                </a:solidFill>
-                <a:latin typeface="Calibri"/>
-              </a:rPr>
-              <a:t>Patrones de IA Agéntica</a:t>
-            </a:r>
-          </a:p>
-        </p:txBody>
-      </p:sp>
-      <p:sp>
-        <p:nvSpPr>
-          <p:cNvPr id="5" name="TextBox 4"/>
-          <p:cNvSpPr txBox="1"/>
-          <p:nvPr/>
-        </p:nvSpPr>
-        <p:spPr>
-          <a:xfrm>
-            <a:off x="11155680" y="292608"/>
-            <a:ext cx="822960" cy="365760"/>
-          </a:xfrm>
-          <a:prstGeom prst="rect">
-            <a:avLst/>
-          </a:prstGeom>
-          <a:noFill/>
-        </p:spPr>
-        <p:txBody>
-          <a:bodyPr wrap="square" anchor="t" lIns="50800" rIns="50800" tIns="25400" bIns="25400">
-            <a:spAutoFit/>
-          </a:bodyPr>
-          <a:lstStyle/>
-          <a:p>
-            <a:pPr algn="r">
-              <a:lnSpc>
-                <a:spcPct val="100000"/>
-              </a:lnSpc>
-            </a:pPr>
-            <a:r>
-              <a:rPr sz="1300" b="1" i="0">
-                <a:solidFill>
-                  <a:srgbClr val="B9CCE0"/>
-                </a:solidFill>
-                <a:latin typeface="Calibri"/>
-              </a:rPr>
-              <a:t>05 / 14</a:t>
-            </a:r>
-          </a:p>
-        </p:txBody>
-      </p:sp>
-      <p:sp>
-        <p:nvSpPr>
-          <p:cNvPr id="6" name="Rounded Rectangle 5"/>
-          <p:cNvSpPr/>
-          <p:nvPr/>
-        </p:nvSpPr>
-        <p:spPr>
-          <a:xfrm>
-            <a:off x="502920" y="1024128"/>
-            <a:ext cx="11201400" cy="566928"/>
-          </a:xfrm>
-          <a:prstGeom prst="roundRect">
-            <a:avLst>
-              <a:gd name="adj" fmla="val 6000"/>
-            </a:avLst>
-          </a:prstGeom>
-          <a:solidFill>
-            <a:srgbClr val="F2F2F2"/>
-          </a:solidFill>
-          <a:ln w="12700">
-            <a:solidFill>
-              <a:srgbClr val="0E7C86"/>
-            </a:solidFill>
-          </a:ln>
-          <a:effectLst/>
-        </p:spPr>
-        <p:style>
-          <a:lnRef idx="1">
-            <a:schemeClr val="accent1"/>
-          </a:lnRef>
-          <a:fillRef idx="3">
-            <a:schemeClr val="accent1"/>
-          </a:fillRef>
-          <a:effectRef idx="2">
-            <a:schemeClr val="accent1"/>
-          </a:effectRef>
-          <a:fontRef idx="minor">
-            <a:schemeClr val="lt1"/>
-          </a:fontRef>
-        </p:style>
-        <p:txBody>
-          <a:bodyPr rtlCol="0" anchor="ctr"/>
-          <a:lstStyle/>
-          <a:p>
-            <a:pPr algn="ctr"/>
-          </a:p>
-        </p:txBody>
-      </p:sp>
-      <p:sp>
-        <p:nvSpPr>
-          <p:cNvPr id="7" name="TextBox 6"/>
-          <p:cNvSpPr txBox="1"/>
-          <p:nvPr/>
-        </p:nvSpPr>
-        <p:spPr>
-          <a:xfrm>
-            <a:off x="685800" y="1069848"/>
-            <a:ext cx="10881360" cy="228600"/>
-          </a:xfrm>
-          <a:prstGeom prst="rect">
-            <a:avLst/>
-          </a:prstGeom>
-          <a:noFill/>
-        </p:spPr>
-        <p:txBody>
-          <a:bodyPr wrap="square" anchor="t" lIns="50800" rIns="50800" tIns="25400" bIns="25400">
-            <a:spAutoFit/>
-          </a:bodyPr>
-          <a:lstStyle/>
-          <a:p>
-            <a:pPr algn="l">
-              <a:lnSpc>
-                <a:spcPct val="100000"/>
-              </a:lnSpc>
-            </a:pPr>
-            <a:r>
-              <a:rPr sz="1050" b="1" i="0">
-                <a:solidFill>
-                  <a:srgbClr val="0E7C86"/>
-                </a:solidFill>
-                <a:latin typeface="Calibri"/>
-              </a:rPr>
-              <a:t>ARQUITECTURA DE REFERENCIA — el punto de partida del diseño</a:t>
-            </a:r>
-          </a:p>
-        </p:txBody>
-      </p:sp>
-      <p:sp>
-        <p:nvSpPr>
-          <p:cNvPr id="8" name="TextBox 7"/>
-          <p:cNvSpPr txBox="1"/>
-          <p:nvPr/>
-        </p:nvSpPr>
-        <p:spPr>
-          <a:xfrm>
-            <a:off x="685800" y="1298448"/>
-            <a:ext cx="10881360" cy="320040"/>
-          </a:xfrm>
-          <a:prstGeom prst="rect">
-            <a:avLst/>
-          </a:prstGeom>
-          <a:noFill/>
-        </p:spPr>
-        <p:txBody>
-          <a:bodyPr wrap="square" anchor="t" lIns="50800" rIns="50800" tIns="25400" bIns="25400">
-            <a:spAutoFit/>
-          </a:bodyPr>
-          <a:lstStyle/>
-          <a:p>
-            <a:pPr algn="l">
-              <a:lnSpc>
-                <a:spcPct val="100000"/>
-              </a:lnSpc>
-            </a:pPr>
-            <a:r>
-              <a:rPr sz="969" b="0" i="0">
-                <a:solidFill>
-                  <a:srgbClr val="142640"/>
-                </a:solidFill>
-                <a:latin typeface="Calibri"/>
-              </a:rPr>
-              <a:t>El diseño se inspiró en una arquitectura de referencia empresarial multiagente basada en Supervisor Agent, Agentes Especialistas, Tool Calling, Fuentes de Datos Empresariales, Memoria, RAG y Observabilidad — se adoptó como base porque encaja naturalmente con flujos de seguros que exigen especialización, trazabilidad y separación de responsabilidades.</a:t>
-            </a:r>
-          </a:p>
-        </p:txBody>
-      </p:sp>
-      <p:sp>
-        <p:nvSpPr>
-          <p:cNvPr id="9" name="TextBox 8"/>
-          <p:cNvSpPr txBox="1"/>
-          <p:nvPr/>
-        </p:nvSpPr>
-        <p:spPr>
-          <a:xfrm>
-            <a:off x="502920" y="1664208"/>
-            <a:ext cx="5486400" cy="228600"/>
-          </a:xfrm>
-          <a:prstGeom prst="rect">
-            <a:avLst/>
-          </a:prstGeom>
-          <a:noFill/>
-        </p:spPr>
-        <p:txBody>
-          <a:bodyPr wrap="square" anchor="t" lIns="50800" rIns="50800" tIns="25400" bIns="25400">
-            <a:spAutoFit/>
-          </a:bodyPr>
-          <a:lstStyle/>
-          <a:p>
-            <a:pPr algn="l">
-              <a:lnSpc>
-                <a:spcPct val="100000"/>
-              </a:lnSpc>
-            </a:pPr>
-            <a:r>
-              <a:rPr sz="1100" b="1" i="0">
-                <a:solidFill>
-                  <a:srgbClr val="1F3A5F"/>
-                </a:solidFill>
-                <a:latin typeface="Calibri"/>
-              </a:rPr>
-              <a:t>PATRONES IMPLEMENTADOS</a:t>
-            </a:r>
-          </a:p>
-        </p:txBody>
-      </p:sp>
-      <p:graphicFrame>
-        <p:nvGraphicFramePr>
-          <p:cNvPr id="10" name="Table 9"/>
-          <p:cNvGraphicFramePr>
-            <a:graphicFrameLocks noGrp="1"/>
-          </p:cNvGraphicFramePr>
-          <p:nvPr/>
-        </p:nvGraphicFramePr>
-        <p:xfrm>
-          <a:off x="502920" y="1920240"/>
-          <a:ext cx="11201400" cy="1874519"/>
-        </p:xfrm>
-        <a:graphic>
-          <a:graphicData uri="http://schemas.openxmlformats.org/drawingml/2006/table">
-            <a:tbl>
-              <a:tblPr firstRow="1" bandRow="1">
-                <a:tableStyleId>{5C22544A-7EE6-4342-B048-85BDC9FD1C3A}</a:tableStyleId>
-              </a:tblPr>
-              <a:tblGrid>
-                <a:gridCol w="1828800"/>
-                <a:gridCol w="4663440"/>
-                <a:gridCol w="3246120"/>
-                <a:gridCol w="1463040"/>
-              </a:tblGrid>
-              <a:tr h="312419">
-                <a:tc>
-                  <a:txBody>
-                    <a:bodyPr/>
-                    <a:lstStyle/>
-                    <a:p>
-                      <a:r>
-                        <a:rPr b="1" sz="950">
-                          <a:solidFill>
-                            <a:srgbClr val="FFFFFF"/>
-                          </a:solidFill>
-                        </a:rPr>
-                        <a:t>Patrón</a:t>
-                      </a:r>
-                    </a:p>
-                  </a:txBody>
-                  <a:tcPr anchor="ctr" marL="50800" marR="50800" marT="25400" marB="25400">
-                    <a:solidFill>
-                      <a:srgbClr val="1F3A5F"/>
-                    </a:solidFill>
-                  </a:tcPr>
-                </a:tc>
-                <a:tc>
-                  <a:txBody>
-                    <a:bodyPr/>
-                    <a:lstStyle/>
-                    <a:p>
-                      <a:r>
-                        <a:rPr b="1" sz="950">
-                          <a:solidFill>
-                            <a:srgbClr val="FFFFFF"/>
-                          </a:solidFill>
-                        </a:rPr>
-                        <a:t>Implementación actual</a:t>
-                      </a:r>
-                    </a:p>
-                  </a:txBody>
-                  <a:tcPr anchor="ctr" marL="50800" marR="50800" marT="25400" marB="25400">
-                    <a:solidFill>
-                      <a:srgbClr val="1F3A5F"/>
-                    </a:solidFill>
-                  </a:tcPr>
-                </a:tc>
-                <a:tc>
-                  <a:txBody>
-                    <a:bodyPr/>
-                    <a:lstStyle/>
-                    <a:p>
-                      <a:r>
-                        <a:rPr b="1" sz="950">
-                          <a:solidFill>
-                            <a:srgbClr val="FFFFFF"/>
-                          </a:solidFill>
-                        </a:rPr>
-                        <a:t>Propósito</a:t>
-                      </a:r>
-                    </a:p>
-                  </a:txBody>
-                  <a:tcPr anchor="ctr" marL="50800" marR="50800" marT="25400" marB="25400">
-                    <a:solidFill>
-                      <a:srgbClr val="1F3A5F"/>
-                    </a:solidFill>
-                  </a:tcPr>
-                </a:tc>
-                <a:tc>
-                  <a:txBody>
-                    <a:bodyPr/>
-                    <a:lstStyle/>
-                    <a:p>
-                      <a:r>
-                        <a:rPr b="1" sz="950">
-                          <a:solidFill>
-                            <a:srgbClr val="FFFFFF"/>
-                          </a:solidFill>
-                        </a:rPr>
-                        <a:t>Estado</a:t>
-                      </a:r>
-                    </a:p>
-                  </a:txBody>
-                  <a:tcPr anchor="ctr" marL="50800" marR="50800" marT="25400" marB="25400">
-                    <a:solidFill>
-                      <a:srgbClr val="1F3A5F"/>
-                    </a:solidFill>
-                  </a:tcPr>
-                </a:tc>
-              </a:tr>
-              <a:tr h="312419">
-                <a:tc>
-                  <a:txBody>
-                    <a:bodyPr wrap="square"/>
-                    <a:lstStyle/>
-                    <a:p>
-                      <a:r>
-                        <a:rPr sz="869">
-                          <a:solidFill>
-                            <a:srgbClr val="142640"/>
-                          </a:solidFill>
-                        </a:rPr>
-                        <a:t>Multi-Agent Pattern</a:t>
-                      </a:r>
-                    </a:p>
-                  </a:txBody>
-                  <a:tcPr anchor="ctr" marL="50800" marR="50800" marT="25400" marB="25400">
-                    <a:solidFill>
-                      <a:srgbClr val="FFFFFF"/>
-                    </a:solidFill>
-                  </a:tcPr>
-                </a:tc>
-                <a:tc>
-                  <a:txBody>
-                    <a:bodyPr wrap="square"/>
-                    <a:lstStyle/>
-                    <a:p>
-                      <a:r>
-                        <a:rPr sz="869">
-                          <a:solidFill>
-                            <a:srgbClr val="142640"/>
-                          </a:solidFill>
-                        </a:rPr>
-                        <a:t>Supervisor Agent + Claims Agent + Broker Agent + Commercial Intake Agent</a:t>
-                      </a:r>
-                    </a:p>
-                  </a:txBody>
-                  <a:tcPr anchor="ctr" marL="50800" marR="50800" marT="25400" marB="25400">
-                    <a:solidFill>
-                      <a:srgbClr val="FFFFFF"/>
-                    </a:solidFill>
-                  </a:tcPr>
-                </a:tc>
-                <a:tc>
-                  <a:txBody>
-                    <a:bodyPr wrap="square"/>
-                    <a:lstStyle/>
-                    <a:p>
-                      <a:r>
-                        <a:rPr sz="869">
-                          <a:solidFill>
-                            <a:srgbClr val="142640"/>
-                          </a:solidFill>
-                        </a:rPr>
-                        <a:t>Especialización por dominio de negocio y mantenibilidad</a:t>
-                      </a:r>
-                    </a:p>
-                  </a:txBody>
-                  <a:tcPr anchor="ctr" marL="50800" marR="50800" marT="25400" marB="25400">
-                    <a:solidFill>
-                      <a:srgbClr val="FFFFFF"/>
-                    </a:solidFill>
-                  </a:tcPr>
-                </a:tc>
-                <a:tc>
-                  <a:txBody>
-                    <a:bodyPr wrap="square"/>
-                    <a:lstStyle/>
-                    <a:p>
-                      <a:r>
-                        <a:rPr sz="869">
-                          <a:solidFill>
-                            <a:srgbClr val="142640"/>
-                          </a:solidFill>
-                        </a:rPr>
-                        <a:t>Implementado</a:t>
-                      </a:r>
-                    </a:p>
-                  </a:txBody>
-                  <a:tcPr anchor="ctr" marL="50800" marR="50800" marT="25400" marB="25400">
-                    <a:solidFill>
-                      <a:srgbClr val="FFFFFF"/>
-                    </a:solidFill>
-                  </a:tcPr>
-                </a:tc>
-              </a:tr>
-              <a:tr h="312419">
-                <a:tc>
-                  <a:txBody>
-                    <a:bodyPr wrap="square"/>
-                    <a:lstStyle/>
-                    <a:p>
-                      <a:r>
-                        <a:rPr sz="869">
-                          <a:solidFill>
-                            <a:srgbClr val="142640"/>
-                          </a:solidFill>
-                        </a:rPr>
-                        <a:t>Planner–Executor Pattern</a:t>
-                      </a:r>
-                    </a:p>
-                  </a:txBody>
-                  <a:tcPr anchor="ctr" marL="50800" marR="50800" marT="25400" marB="25400">
-                    <a:solidFill>
-                      <a:srgbClr val="F2F2F2"/>
-                    </a:solidFill>
-                  </a:tcPr>
-                </a:tc>
-                <a:tc>
-                  <a:txBody>
-                    <a:bodyPr wrap="square"/>
-                    <a:lstStyle/>
-                    <a:p>
-                      <a:r>
-                        <a:rPr sz="869">
-                          <a:solidFill>
-                            <a:srgbClr val="142640"/>
-                          </a:solidFill>
-                        </a:rPr>
-                        <a:t>El Supervisor interpreta la intención del usuario y delega la ejecución al agente especialista correspondiente</a:t>
-                      </a:r>
-                    </a:p>
-                  </a:txBody>
-                  <a:tcPr anchor="ctr" marL="50800" marR="50800" marT="25400" marB="25400">
-                    <a:solidFill>
-                      <a:srgbClr val="F2F2F2"/>
-                    </a:solidFill>
-                  </a:tcPr>
-                </a:tc>
-                <a:tc>
-                  <a:txBody>
-                    <a:bodyPr wrap="square"/>
-                    <a:lstStyle/>
-                    <a:p>
-                      <a:r>
-                        <a:rPr sz="869">
-                          <a:solidFill>
-                            <a:srgbClr val="142640"/>
-                          </a:solidFill>
-                        </a:rPr>
-                        <a:t>Separar orquestación de ejecución</a:t>
-                      </a:r>
-                    </a:p>
-                  </a:txBody>
-                  <a:tcPr anchor="ctr" marL="50800" marR="50800" marT="25400" marB="25400">
-                    <a:solidFill>
-                      <a:srgbClr val="F2F2F2"/>
-                    </a:solidFill>
-                  </a:tcPr>
-                </a:tc>
-                <a:tc>
-                  <a:txBody>
-                    <a:bodyPr wrap="square"/>
-                    <a:lstStyle/>
-                    <a:p>
-                      <a:r>
-                        <a:rPr sz="869">
-                          <a:solidFill>
-                            <a:srgbClr val="142640"/>
-                          </a:solidFill>
-                        </a:rPr>
-                        <a:t>Implementado</a:t>
-                      </a:r>
-                    </a:p>
-                  </a:txBody>
-                  <a:tcPr anchor="ctr" marL="50800" marR="50800" marT="25400" marB="25400">
-                    <a:solidFill>
-                      <a:srgbClr val="F2F2F2"/>
-                    </a:solidFill>
-                  </a:tcPr>
-                </a:tc>
-              </a:tr>
-              <a:tr h="312419">
-                <a:tc>
-                  <a:txBody>
-                    <a:bodyPr wrap="square"/>
-                    <a:lstStyle/>
-                    <a:p>
-                      <a:r>
-                        <a:rPr sz="869">
-                          <a:solidFill>
-                            <a:srgbClr val="142640"/>
-                          </a:solidFill>
-                        </a:rPr>
-                        <a:t>Memory Pattern</a:t>
-                      </a:r>
-                    </a:p>
-                  </a:txBody>
-                  <a:tcPr anchor="ctr" marL="50800" marR="50800" marT="25400" marB="25400">
-                    <a:solidFill>
-                      <a:srgbClr val="FFFFFF"/>
-                    </a:solidFill>
-                  </a:tcPr>
-                </a:tc>
-                <a:tc>
-                  <a:txBody>
-                    <a:bodyPr wrap="square"/>
-                    <a:lstStyle/>
-                    <a:p>
-                      <a:r>
-                        <a:rPr sz="869">
-                          <a:solidFill>
-                            <a:srgbClr val="142640"/>
-                          </a:solidFill>
-                        </a:rPr>
-                        <a:t>Memoria conversacional en Cosmos DB</a:t>
-                      </a:r>
-                    </a:p>
-                  </a:txBody>
-                  <a:tcPr anchor="ctr" marL="50800" marR="50800" marT="25400" marB="25400">
-                    <a:solidFill>
-                      <a:srgbClr val="FFFFFF"/>
-                    </a:solidFill>
-                  </a:tcPr>
-                </a:tc>
-                <a:tc>
-                  <a:txBody>
-                    <a:bodyPr wrap="square"/>
-                    <a:lstStyle/>
-                    <a:p>
-                      <a:r>
-                        <a:rPr sz="869">
-                          <a:solidFill>
-                            <a:srgbClr val="142640"/>
-                          </a:solidFill>
-                        </a:rPr>
-                        <a:t>Mantener contexto entre interacciones</a:t>
-                      </a:r>
-                    </a:p>
-                  </a:txBody>
-                  <a:tcPr anchor="ctr" marL="50800" marR="50800" marT="25400" marB="25400">
-                    <a:solidFill>
-                      <a:srgbClr val="FFFFFF"/>
-                    </a:solidFill>
-                  </a:tcPr>
-                </a:tc>
-                <a:tc>
-                  <a:txBody>
-                    <a:bodyPr wrap="square"/>
-                    <a:lstStyle/>
-                    <a:p>
-                      <a:r>
-                        <a:rPr sz="869">
-                          <a:solidFill>
-                            <a:srgbClr val="142640"/>
-                          </a:solidFill>
-                        </a:rPr>
-                        <a:t>Implementado</a:t>
-                      </a:r>
-                    </a:p>
-                  </a:txBody>
-                  <a:tcPr anchor="ctr" marL="50800" marR="50800" marT="25400" marB="25400">
-                    <a:solidFill>
-                      <a:srgbClr val="FFFFFF"/>
-                    </a:solidFill>
-                  </a:tcPr>
-                </a:tc>
-              </a:tr>
-              <a:tr h="312419">
-                <a:tc>
-                  <a:txBody>
-                    <a:bodyPr wrap="square"/>
-                    <a:lstStyle/>
-                    <a:p>
-                      <a:r>
-                        <a:rPr sz="869">
-                          <a:solidFill>
-                            <a:srgbClr val="142640"/>
-                          </a:solidFill>
-                        </a:rPr>
-                        <a:t>Guardrail Pattern</a:t>
-                      </a:r>
-                    </a:p>
-                  </a:txBody>
-                  <a:tcPr anchor="ctr" marL="50800" marR="50800" marT="25400" marB="25400">
-                    <a:solidFill>
-                      <a:srgbClr val="F2F2F2"/>
-                    </a:solidFill>
-                  </a:tcPr>
-                </a:tc>
-                <a:tc>
-                  <a:txBody>
-                    <a:bodyPr wrap="square"/>
-                    <a:lstStyle/>
-                    <a:p>
-                      <a:r>
-                        <a:rPr sz="869">
-                          <a:solidFill>
-                            <a:srgbClr val="142640"/>
-                          </a:solidFill>
-                        </a:rPr>
-                        <a:t>Entra ID + OAuth2 PKCE + validación JWT/JWKS; acciones de negocio solo mediante herramientas deterministas</a:t>
-                      </a:r>
-                    </a:p>
-                  </a:txBody>
-                  <a:tcPr anchor="ctr" marL="50800" marR="50800" marT="25400" marB="25400">
-                    <a:solidFill>
-                      <a:srgbClr val="F2F2F2"/>
-                    </a:solidFill>
-                  </a:tcPr>
-                </a:tc>
-                <a:tc>
-                  <a:txBody>
-                    <a:bodyPr wrap="square"/>
-                    <a:lstStyle/>
-                    <a:p>
-                      <a:r>
-                        <a:rPr sz="869">
-                          <a:solidFill>
-                            <a:srgbClr val="142640"/>
-                          </a:solidFill>
-                        </a:rPr>
-                        <a:t>Seguridad, trazabilidad y ejecución controlada</a:t>
-                      </a:r>
-                    </a:p>
-                  </a:txBody>
-                  <a:tcPr anchor="ctr" marL="50800" marR="50800" marT="25400" marB="25400">
-                    <a:solidFill>
-                      <a:srgbClr val="F2F2F2"/>
-                    </a:solidFill>
-                  </a:tcPr>
-                </a:tc>
-                <a:tc>
-                  <a:txBody>
-                    <a:bodyPr wrap="square"/>
-                    <a:lstStyle/>
-                    <a:p>
-                      <a:r>
-                        <a:rPr sz="869">
-                          <a:solidFill>
-                            <a:srgbClr val="142640"/>
-                          </a:solidFill>
-                        </a:rPr>
-                        <a:t>Implementado</a:t>
-                      </a:r>
-                    </a:p>
-                  </a:txBody>
-                  <a:tcPr anchor="ctr" marL="50800" marR="50800" marT="25400" marB="25400">
-                    <a:solidFill>
-                      <a:srgbClr val="F2F2F2"/>
-                    </a:solidFill>
-                  </a:tcPr>
-                </a:tc>
-              </a:tr>
-              <a:tr h="312424">
-                <a:tc>
-                  <a:txBody>
-                    <a:bodyPr wrap="square"/>
-                    <a:lstStyle/>
-                    <a:p>
-                      <a:r>
-                        <a:rPr sz="869">
-                          <a:solidFill>
-                            <a:srgbClr val="142640"/>
-                          </a:solidFill>
-                        </a:rPr>
-                        <a:t>RAG Pattern</a:t>
-                      </a:r>
-                    </a:p>
-                  </a:txBody>
-                  <a:tcPr anchor="ctr" marL="50800" marR="50800" marT="25400" marB="25400">
-                    <a:solidFill>
-                      <a:srgbClr val="FFFFFF"/>
-                    </a:solidFill>
-                  </a:tcPr>
-                </a:tc>
-                <a:tc>
-                  <a:txBody>
-                    <a:bodyPr wrap="square"/>
-                    <a:lstStyle/>
-                    <a:p>
-                      <a:r>
-                        <a:rPr sz="869">
-                          <a:solidFill>
-                            <a:srgbClr val="142640"/>
-                          </a:solidFill>
-                        </a:rPr>
-                        <a:t>Azure AI Search integrado en la arquitectura; hoy con datos sintéticos, en producción recuperaría documentación empresarial</a:t>
-                      </a:r>
-                    </a:p>
-                  </a:txBody>
-                  <a:tcPr anchor="ctr" marL="50800" marR="50800" marT="25400" marB="25400">
-                    <a:solidFill>
-                      <a:srgbClr val="FFFFFF"/>
-                    </a:solidFill>
-                  </a:tcPr>
-                </a:tc>
-                <a:tc>
-                  <a:txBody>
-                    <a:bodyPr wrap="square"/>
-                    <a:lstStyle/>
-                    <a:p>
-                      <a:r>
-                        <a:rPr sz="869">
-                          <a:solidFill>
-                            <a:srgbClr val="142640"/>
-                          </a:solidFill>
-                        </a:rPr>
-                        <a:t>Fundamentar respuestas en documentos reales y citables</a:t>
-                      </a:r>
-                    </a:p>
-                  </a:txBody>
-                  <a:tcPr anchor="ctr" marL="50800" marR="50800" marT="25400" marB="25400">
-                    <a:solidFill>
-                      <a:srgbClr val="FFFFFF"/>
-                    </a:solidFill>
-                  </a:tcPr>
-                </a:tc>
-                <a:tc>
-                  <a:txBody>
-                    <a:bodyPr wrap="square"/>
-                    <a:lstStyle/>
-                    <a:p>
-                      <a:r>
-                        <a:rPr sz="869">
-                          <a:solidFill>
-                            <a:srgbClr val="142640"/>
-                          </a:solidFill>
-                        </a:rPr>
-                        <a:t>Arquitectura lista</a:t>
-                      </a:r>
-                    </a:p>
-                  </a:txBody>
-                  <a:tcPr anchor="ctr" marL="50800" marR="50800" marT="25400" marB="25400">
-                    <a:solidFill>
-                      <a:srgbClr val="FFFFFF"/>
-                    </a:solidFill>
-                  </a:tcPr>
-                </a:tc>
-              </a:tr>
-            </a:tbl>
-          </a:graphicData>
-        </a:graphic>
-      </p:graphicFrame>
-      <p:sp>
-        <p:nvSpPr>
-          <p:cNvPr id="11" name="Rounded Rectangle 10"/>
-          <p:cNvSpPr/>
-          <p:nvPr/>
-        </p:nvSpPr>
-        <p:spPr>
-          <a:xfrm>
-            <a:off x="502920" y="3913632"/>
-            <a:ext cx="11201400" cy="2542032"/>
-          </a:xfrm>
-          <a:prstGeom prst="roundRect">
-            <a:avLst>
-              <a:gd name="adj" fmla="val 6000"/>
-            </a:avLst>
-          </a:prstGeom>
-          <a:solidFill>
-            <a:srgbClr val="F2F2F2"/>
-          </a:solidFill>
-          <a:ln w="13970">
-            <a:solidFill>
-              <a:srgbClr val="B87A00"/>
-            </a:solidFill>
-          </a:ln>
-          <a:effectLst/>
-        </p:spPr>
-        <p:style>
-          <a:lnRef idx="1">
-            <a:schemeClr val="accent1"/>
-          </a:lnRef>
-          <a:fillRef idx="3">
-            <a:schemeClr val="accent1"/>
-          </a:fillRef>
-          <a:effectRef idx="2">
-            <a:schemeClr val="accent1"/>
-          </a:effectRef>
-          <a:fontRef idx="minor">
-            <a:schemeClr val="lt1"/>
-          </a:fontRef>
-        </p:style>
-        <p:txBody>
-          <a:bodyPr rtlCol="0" anchor="ctr"/>
-          <a:lstStyle/>
-          <a:p>
-            <a:pPr algn="ctr"/>
-          </a:p>
-        </p:txBody>
-      </p:sp>
-      <p:sp>
-        <p:nvSpPr>
-          <p:cNvPr id="12" name="TextBox 11"/>
-          <p:cNvSpPr txBox="1"/>
-          <p:nvPr/>
-        </p:nvSpPr>
-        <p:spPr>
-          <a:xfrm>
-            <a:off x="685800" y="3986784"/>
-            <a:ext cx="5486400" cy="256032"/>
-          </a:xfrm>
-          <a:prstGeom prst="rect">
-            <a:avLst/>
-          </a:prstGeom>
-          <a:noFill/>
-        </p:spPr>
-        <p:txBody>
-          <a:bodyPr wrap="square" anchor="t" lIns="50800" rIns="50800" tIns="25400" bIns="25400">
-            <a:spAutoFit/>
-          </a:bodyPr>
-          <a:lstStyle/>
-          <a:p>
-            <a:pPr algn="l">
-              <a:lnSpc>
-                <a:spcPct val="100000"/>
-              </a:lnSpc>
-            </a:pPr>
-            <a:r>
-              <a:rPr sz="1250" b="1" i="0">
-                <a:solidFill>
-                  <a:srgbClr val="B87A00"/>
-                </a:solidFill>
-                <a:latin typeface="Calibri"/>
-              </a:rPr>
-              <a:t>EVOLUCIÓN PREVISTA</a:t>
-            </a:r>
-          </a:p>
-        </p:txBody>
-      </p:sp>
-      <p:sp>
-        <p:nvSpPr>
-          <p:cNvPr id="13" name="TextBox 12"/>
-          <p:cNvSpPr txBox="1"/>
-          <p:nvPr/>
-        </p:nvSpPr>
-        <p:spPr>
-          <a:xfrm>
-            <a:off x="685800" y="4279392"/>
-            <a:ext cx="5577840" cy="2103120"/>
-          </a:xfrm>
-          <a:prstGeom prst="rect">
-            <a:avLst/>
-          </a:prstGeom>
-          <a:noFill/>
-        </p:spPr>
-        <p:txBody>
-          <a:bodyPr wrap="square">
-            <a:spAutoFit/>
-          </a:bodyPr>
-          <a:lstStyle/>
-          <a:p>
-            <a:pPr>
-              <a:spcAft>
-                <a:spcPts val="700"/>
-              </a:spcAft>
-            </a:pPr>
-            <a:r>
-              <a:rPr sz="969">
-                <a:solidFill>
-                  <a:srgbClr val="142640"/>
-                </a:solidFill>
-                <a:latin typeface="Calibri"/>
-              </a:rPr>
-              <a:t>▪  Próximos patrones a incorporar: ReAct · LLM-as-a-Judge · Self-Reflection.</a:t>
-            </a:r>
-          </a:p>
-          <a:p>
-            <a:pPr>
-              <a:spcAft>
-                <a:spcPts val="700"/>
-              </a:spcAft>
-            </a:pPr>
-            <a:r>
-              <a:rPr sz="969">
-                <a:solidFill>
-                  <a:srgbClr val="142640"/>
-                </a:solidFill>
-                <a:latin typeface="Calibri"/>
-              </a:rPr>
-              <a:t>▪  Los procesos de seguros exigen auditabilidad y operación predecible — por eso la arquitectura actual prioriza deliberadamente la ejecución determinista.</a:t>
-            </a:r>
-          </a:p>
-          <a:p>
-            <a:pPr>
-              <a:spcAft>
-                <a:spcPts val="700"/>
-              </a:spcAft>
-            </a:pPr>
-            <a:r>
-              <a:rPr sz="969">
-                <a:solidFill>
-                  <a:srgbClr val="142640"/>
-                </a:solidFill>
-                <a:latin typeface="Calibri"/>
-              </a:rPr>
-              <a:t>▪  La siguiente evolución incorporará un bucle de razonamiento ReAct dentro de los agentes especialistas — mejora razonamiento multi-paso, validación de la conversación, planificación dinámica y recolección de información compleja.</a:t>
-            </a:r>
-          </a:p>
-          <a:p>
-            <a:pPr>
-              <a:spcAft>
-                <a:spcPts val="700"/>
-              </a:spcAft>
-            </a:pPr>
-            <a:r>
-              <a:rPr sz="969">
-                <a:solidFill>
-                  <a:srgbClr val="142640"/>
-                </a:solidFill>
-                <a:latin typeface="Calibri"/>
-              </a:rPr>
-              <a:t>▪  Se preservan sin cambios: Supervisor, Tool Calling, Guardrails, Memoria y Seguridad empresarial.</a:t>
-            </a:r>
-          </a:p>
-        </p:txBody>
-      </p:sp>
-      <p:sp>
-        <p:nvSpPr>
-          <p:cNvPr id="14" name="TextBox 13"/>
-          <p:cNvSpPr txBox="1"/>
-          <p:nvPr/>
-        </p:nvSpPr>
-        <p:spPr>
-          <a:xfrm>
-            <a:off x="7818120" y="4224528"/>
-            <a:ext cx="1920240" cy="201168"/>
-          </a:xfrm>
-          <a:prstGeom prst="rect">
-            <a:avLst/>
-          </a:prstGeom>
-          <a:noFill/>
-        </p:spPr>
-        <p:txBody>
-          <a:bodyPr wrap="square" anchor="t" lIns="50800" rIns="50800" tIns="25400" bIns="25400">
-            <a:spAutoFit/>
-          </a:bodyPr>
-          <a:lstStyle/>
-          <a:p>
-            <a:pPr algn="ctr">
-              <a:lnSpc>
-                <a:spcPct val="100000"/>
-              </a:lnSpc>
-            </a:pPr>
-            <a:r>
-              <a:rPr sz="950" b="1" i="0">
-                <a:solidFill>
-                  <a:srgbClr val="1F3A5F"/>
-                </a:solidFill>
-                <a:latin typeface="Calibri"/>
-              </a:rPr>
-              <a:t>ACTUAL</a:t>
-            </a:r>
-          </a:p>
-        </p:txBody>
-      </p:sp>
-      <p:sp>
-        <p:nvSpPr>
-          <p:cNvPr id="15" name="TextBox 14"/>
-          <p:cNvSpPr txBox="1"/>
-          <p:nvPr/>
-        </p:nvSpPr>
-        <p:spPr>
-          <a:xfrm>
-            <a:off x="9921240" y="4224528"/>
-            <a:ext cx="1920240" cy="201168"/>
-          </a:xfrm>
-          <a:prstGeom prst="rect">
-            <a:avLst/>
-          </a:prstGeom>
-          <a:noFill/>
-        </p:spPr>
-        <p:txBody>
-          <a:bodyPr wrap="square" anchor="t" lIns="50800" rIns="50800" tIns="25400" bIns="25400">
-            <a:spAutoFit/>
-          </a:bodyPr>
-          <a:lstStyle/>
-          <a:p>
-            <a:pPr algn="ctr">
-              <a:lnSpc>
-                <a:spcPct val="100000"/>
-              </a:lnSpc>
-            </a:pPr>
-            <a:r>
-              <a:rPr sz="950" b="1" i="0">
-                <a:solidFill>
-                  <a:srgbClr val="B87A00"/>
-                </a:solidFill>
-                <a:latin typeface="Calibri"/>
-              </a:rPr>
-              <a:t>EVOLUCIÓN (ReAct)</a:t>
-            </a:r>
-          </a:p>
-        </p:txBody>
-      </p:sp>
-      <p:sp>
-        <p:nvSpPr>
-          <p:cNvPr id="16" name="Rounded Rectangle 15"/>
-          <p:cNvSpPr/>
-          <p:nvPr/>
-        </p:nvSpPr>
-        <p:spPr>
-          <a:xfrm>
-            <a:off x="7909560" y="4407408"/>
-            <a:ext cx="1737360" cy="292608"/>
-          </a:xfrm>
-          <a:prstGeom prst="roundRect">
-            <a:avLst>
-              <a:gd name="adj" fmla="val 6000"/>
-            </a:avLst>
-          </a:prstGeom>
-          <a:solidFill>
-            <a:srgbClr val="FFFFFF"/>
-          </a:solidFill>
-          <a:ln w="15240">
-            <a:solidFill>
-              <a:srgbClr val="1F3A5F"/>
-            </a:solidFill>
-          </a:ln>
-          <a:effectLst/>
-        </p:spPr>
-        <p:style>
-          <a:lnRef idx="1">
-            <a:schemeClr val="accent1"/>
-          </a:lnRef>
-          <a:fillRef idx="3">
-            <a:schemeClr val="accent1"/>
-          </a:fillRef>
-          <a:effectRef idx="2">
-            <a:schemeClr val="accent1"/>
-          </a:effectRef>
-          <a:fontRef idx="minor">
-            <a:schemeClr val="lt1"/>
-          </a:fontRef>
-        </p:style>
-        <p:txBody>
-          <a:bodyPr rtlCol="0" anchor="ctr" wrap="square" lIns="25400" rIns="25400" tIns="12700" bIns="12700"/>
-          <a:lstStyle/>
-          <a:p>
-            <a:pPr algn="ctr"/>
-            <a:r>
-              <a:rPr sz="830" b="1">
-                <a:solidFill>
-                  <a:srgbClr val="142640"/>
-                </a:solidFill>
-                <a:latin typeface="Calibri"/>
-              </a:rPr>
-              <a:t>Usuario</a:t>
-            </a:r>
-          </a:p>
-        </p:txBody>
-      </p:sp>
-      <p:sp>
-        <p:nvSpPr>
-          <p:cNvPr id="17" name="Rounded Rectangle 16"/>
-          <p:cNvSpPr/>
-          <p:nvPr/>
-        </p:nvSpPr>
-        <p:spPr>
-          <a:xfrm>
-            <a:off x="7909560" y="4828032"/>
-            <a:ext cx="1737360" cy="292608"/>
-          </a:xfrm>
-          <a:prstGeom prst="roundRect">
-            <a:avLst>
-              <a:gd name="adj" fmla="val 6000"/>
-            </a:avLst>
-          </a:prstGeom>
-          <a:solidFill>
-            <a:srgbClr val="FFFFFF"/>
-          </a:solidFill>
-          <a:ln w="15240">
-            <a:solidFill>
-              <a:srgbClr val="1F3A5F"/>
-            </a:solidFill>
-          </a:ln>
-          <a:effectLst/>
-        </p:spPr>
-        <p:style>
-          <a:lnRef idx="1">
-            <a:schemeClr val="accent1"/>
-          </a:lnRef>
-          <a:fillRef idx="3">
-            <a:schemeClr val="accent1"/>
-          </a:fillRef>
-          <a:effectRef idx="2">
-            <a:schemeClr val="accent1"/>
-          </a:effectRef>
-          <a:fontRef idx="minor">
-            <a:schemeClr val="lt1"/>
-          </a:fontRef>
-        </p:style>
-        <p:txBody>
-          <a:bodyPr rtlCol="0" anchor="ctr" wrap="square" lIns="25400" rIns="25400" tIns="12700" bIns="12700"/>
-          <a:lstStyle/>
-          <a:p>
-            <a:pPr algn="ctr"/>
-            <a:r>
-              <a:rPr sz="830" b="1">
-                <a:solidFill>
-                  <a:srgbClr val="142640"/>
-                </a:solidFill>
-                <a:latin typeface="Calibri"/>
-              </a:rPr>
-              <a:t>Supervisor</a:t>
-            </a:r>
-          </a:p>
-        </p:txBody>
-      </p:sp>
-      <p:cxnSp>
-        <p:nvCxnSpPr>
-          <p:cNvPr id="18" name="Connector 17"/>
-          <p:cNvCxnSpPr/>
-          <p:nvPr/>
-        </p:nvCxnSpPr>
-        <p:spPr>
-          <a:xfrm>
-            <a:off x="8778240" y="4700016.0"/>
-            <a:ext cx="0" cy="128016.0"/>
-          </a:xfrm>
-          <a:prstGeom prst="line">
-            <a:avLst/>
-          </a:prstGeom>
-          <a:ln w="13970">
-            <a:solidFill>
-              <a:srgbClr val="1F3A5F"/>
-            </a:solidFill>
-          </a:ln>
-        </p:spPr>
-        <p:style>
-          <a:lnRef idx="2">
-            <a:schemeClr val="accent1"/>
-          </a:lnRef>
-          <a:fillRef idx="0">
-            <a:schemeClr val="accent1"/>
-          </a:fillRef>
-          <a:effectRef idx="1">
-            <a:schemeClr val="accent1"/>
-          </a:effectRef>
-          <a:fontRef idx="minor">
-            <a:schemeClr val="tx1"/>
-          </a:fontRef>
-        </p:style>
-      </p:cxnSp>
-      <p:sp>
-        <p:nvSpPr>
-          <p:cNvPr id="19" name="Rounded Rectangle 18"/>
-          <p:cNvSpPr/>
-          <p:nvPr/>
-        </p:nvSpPr>
-        <p:spPr>
-          <a:xfrm>
-            <a:off x="7909560" y="5248656"/>
-            <a:ext cx="1737360" cy="292608"/>
-          </a:xfrm>
-          <a:prstGeom prst="roundRect">
-            <a:avLst>
-              <a:gd name="adj" fmla="val 6000"/>
-            </a:avLst>
-          </a:prstGeom>
-          <a:solidFill>
-            <a:srgbClr val="FFFFFF"/>
-          </a:solidFill>
-          <a:ln w="15240">
-            <a:solidFill>
-              <a:srgbClr val="1F3A5F"/>
-            </a:solidFill>
-          </a:ln>
-          <a:effectLst/>
-        </p:spPr>
-        <p:style>
-          <a:lnRef idx="1">
-            <a:schemeClr val="accent1"/>
-          </a:lnRef>
-          <a:fillRef idx="3">
-            <a:schemeClr val="accent1"/>
-          </a:fillRef>
-          <a:effectRef idx="2">
-            <a:schemeClr val="accent1"/>
-          </a:effectRef>
-          <a:fontRef idx="minor">
-            <a:schemeClr val="lt1"/>
-          </a:fontRef>
-        </p:style>
-        <p:txBody>
-          <a:bodyPr rtlCol="0" anchor="ctr" wrap="square" lIns="25400" rIns="25400" tIns="12700" bIns="12700"/>
-          <a:lstStyle/>
-          <a:p>
-            <a:pPr algn="ctr"/>
-            <a:r>
-              <a:rPr sz="830" b="1">
-                <a:solidFill>
-                  <a:srgbClr val="142640"/>
-                </a:solidFill>
-                <a:latin typeface="Calibri"/>
-              </a:rPr>
-              <a:t>Agente
-Especialista</a:t>
-            </a:r>
-          </a:p>
-        </p:txBody>
-      </p:sp>
-      <p:cxnSp>
-        <p:nvCxnSpPr>
-          <p:cNvPr id="20" name="Connector 19"/>
-          <p:cNvCxnSpPr/>
-          <p:nvPr/>
-        </p:nvCxnSpPr>
-        <p:spPr>
-          <a:xfrm>
-            <a:off x="8778240" y="5120640.0"/>
-            <a:ext cx="0" cy="128016.0"/>
-          </a:xfrm>
-          <a:prstGeom prst="line">
-            <a:avLst/>
-          </a:prstGeom>
-          <a:ln w="13970">
-            <a:solidFill>
-              <a:srgbClr val="1F3A5F"/>
-            </a:solidFill>
-          </a:ln>
-        </p:spPr>
-        <p:style>
-          <a:lnRef idx="2">
-            <a:schemeClr val="accent1"/>
-          </a:lnRef>
-          <a:fillRef idx="0">
-            <a:schemeClr val="accent1"/>
-          </a:fillRef>
-          <a:effectRef idx="1">
-            <a:schemeClr val="accent1"/>
-          </a:effectRef>
-          <a:fontRef idx="minor">
-            <a:schemeClr val="tx1"/>
-          </a:fontRef>
-        </p:style>
-      </p:cxnSp>
-      <p:sp>
-        <p:nvSpPr>
-          <p:cNvPr id="21" name="Rounded Rectangle 20"/>
-          <p:cNvSpPr/>
-          <p:nvPr/>
-        </p:nvSpPr>
-        <p:spPr>
-          <a:xfrm>
-            <a:off x="7909560" y="5669280"/>
-            <a:ext cx="1737360" cy="292608"/>
-          </a:xfrm>
-          <a:prstGeom prst="roundRect">
-            <a:avLst>
-              <a:gd name="adj" fmla="val 6000"/>
-            </a:avLst>
-          </a:prstGeom>
-          <a:solidFill>
-            <a:srgbClr val="FFFFFF"/>
-          </a:solidFill>
-          <a:ln w="15240">
-            <a:solidFill>
-              <a:srgbClr val="1F3A5F"/>
-            </a:solidFill>
-          </a:ln>
-          <a:effectLst/>
-        </p:spPr>
-        <p:style>
-          <a:lnRef idx="1">
-            <a:schemeClr val="accent1"/>
-          </a:lnRef>
-          <a:fillRef idx="3">
-            <a:schemeClr val="accent1"/>
-          </a:fillRef>
-          <a:effectRef idx="2">
-            <a:schemeClr val="accent1"/>
-          </a:effectRef>
-          <a:fontRef idx="minor">
-            <a:schemeClr val="lt1"/>
-          </a:fontRef>
-        </p:style>
-        <p:txBody>
-          <a:bodyPr rtlCol="0" anchor="ctr" wrap="square" lIns="25400" rIns="25400" tIns="12700" bIns="12700"/>
-          <a:lstStyle/>
-          <a:p>
-            <a:pPr algn="ctr"/>
-            <a:r>
-              <a:rPr sz="830" b="1">
-                <a:solidFill>
-                  <a:srgbClr val="142640"/>
-                </a:solidFill>
-                <a:latin typeface="Calibri"/>
-              </a:rPr>
-              <a:t>Tool
-Calling</a:t>
-            </a:r>
-          </a:p>
-        </p:txBody>
-      </p:sp>
-      <p:cxnSp>
-        <p:nvCxnSpPr>
-          <p:cNvPr id="22" name="Connector 21"/>
-          <p:cNvCxnSpPr/>
-          <p:nvPr/>
-        </p:nvCxnSpPr>
-        <p:spPr>
-          <a:xfrm>
-            <a:off x="8778240" y="5541264.0"/>
-            <a:ext cx="0" cy="128016.0"/>
-          </a:xfrm>
-          <a:prstGeom prst="line">
-            <a:avLst/>
-          </a:prstGeom>
-          <a:ln w="13970">
-            <a:solidFill>
-              <a:srgbClr val="1F3A5F"/>
-            </a:solidFill>
-          </a:ln>
-        </p:spPr>
-        <p:style>
-          <a:lnRef idx="2">
-            <a:schemeClr val="accent1"/>
-          </a:lnRef>
-          <a:fillRef idx="0">
-            <a:schemeClr val="accent1"/>
-          </a:fillRef>
-          <a:effectRef idx="1">
-            <a:schemeClr val="accent1"/>
-          </a:effectRef>
-          <a:fontRef idx="minor">
-            <a:schemeClr val="tx1"/>
-          </a:fontRef>
-        </p:style>
-      </p:cxnSp>
-      <p:sp>
-        <p:nvSpPr>
-          <p:cNvPr id="23" name="Rounded Rectangle 22"/>
-          <p:cNvSpPr/>
-          <p:nvPr/>
-        </p:nvSpPr>
-        <p:spPr>
-          <a:xfrm>
-            <a:off x="7909560" y="6089904"/>
-            <a:ext cx="1737360" cy="292608"/>
-          </a:xfrm>
-          <a:prstGeom prst="roundRect">
-            <a:avLst>
-              <a:gd name="adj" fmla="val 6000"/>
-            </a:avLst>
-          </a:prstGeom>
-          <a:solidFill>
-            <a:srgbClr val="FFFFFF"/>
-          </a:solidFill>
-          <a:ln w="15240">
-            <a:solidFill>
-              <a:srgbClr val="1F3A5F"/>
-            </a:solidFill>
-          </a:ln>
-          <a:effectLst/>
-        </p:spPr>
-        <p:style>
-          <a:lnRef idx="1">
-            <a:schemeClr val="accent1"/>
-          </a:lnRef>
-          <a:fillRef idx="3">
-            <a:schemeClr val="accent1"/>
-          </a:fillRef>
-          <a:effectRef idx="2">
-            <a:schemeClr val="accent1"/>
-          </a:effectRef>
-          <a:fontRef idx="minor">
-            <a:schemeClr val="lt1"/>
-          </a:fontRef>
-        </p:style>
-        <p:txBody>
-          <a:bodyPr rtlCol="0" anchor="ctr" wrap="square" lIns="25400" rIns="25400" tIns="12700" bIns="12700"/>
-          <a:lstStyle/>
-          <a:p>
-            <a:pPr algn="ctr"/>
-            <a:r>
-              <a:rPr sz="830" b="1">
-                <a:solidFill>
-                  <a:srgbClr val="142640"/>
-                </a:solidFill>
-                <a:latin typeface="Calibri"/>
-              </a:rPr>
-              <a:t>Respuesta</a:t>
-            </a:r>
-          </a:p>
-        </p:txBody>
-      </p:sp>
-      <p:cxnSp>
-        <p:nvCxnSpPr>
-          <p:cNvPr id="24" name="Connector 23"/>
-          <p:cNvCxnSpPr/>
-          <p:nvPr/>
-        </p:nvCxnSpPr>
-        <p:spPr>
-          <a:xfrm>
-            <a:off x="8778240" y="5961888.0"/>
-            <a:ext cx="0" cy="128016.0"/>
-          </a:xfrm>
-          <a:prstGeom prst="line">
-            <a:avLst/>
-          </a:prstGeom>
-          <a:ln w="13970">
-            <a:solidFill>
-              <a:srgbClr val="1F3A5F"/>
-            </a:solidFill>
-          </a:ln>
-        </p:spPr>
-        <p:style>
-          <a:lnRef idx="2">
-            <a:schemeClr val="accent1"/>
-          </a:lnRef>
-          <a:fillRef idx="0">
-            <a:schemeClr val="accent1"/>
-          </a:fillRef>
-          <a:effectRef idx="1">
-            <a:schemeClr val="accent1"/>
-          </a:effectRef>
-          <a:fontRef idx="minor">
-            <a:schemeClr val="tx1"/>
-          </a:fontRef>
-        </p:style>
-      </p:cxnSp>
-      <p:sp>
-        <p:nvSpPr>
-          <p:cNvPr id="25" name="Rounded Rectangle 24"/>
-          <p:cNvSpPr/>
-          <p:nvPr/>
-        </p:nvSpPr>
-        <p:spPr>
-          <a:xfrm>
-            <a:off x="9966960" y="4373118"/>
-            <a:ext cx="1828800" cy="214884"/>
-          </a:xfrm>
-          <a:prstGeom prst="roundRect">
-            <a:avLst>
-              <a:gd name="adj" fmla="val 6000"/>
-            </a:avLst>
-          </a:prstGeom>
-          <a:solidFill>
-            <a:srgbClr val="FFFFFF"/>
-          </a:solidFill>
-          <a:ln w="15240">
-            <a:solidFill>
-              <a:srgbClr val="1F3A5F"/>
-            </a:solidFill>
-          </a:ln>
-          <a:effectLst/>
-        </p:spPr>
-        <p:style>
-          <a:lnRef idx="1">
-            <a:schemeClr val="accent1"/>
-          </a:lnRef>
-          <a:fillRef idx="3">
-            <a:schemeClr val="accent1"/>
-          </a:fillRef>
-          <a:effectRef idx="2">
-            <a:schemeClr val="accent1"/>
-          </a:effectRef>
-          <a:fontRef idx="minor">
-            <a:schemeClr val="lt1"/>
-          </a:fontRef>
-        </p:style>
-        <p:txBody>
-          <a:bodyPr rtlCol="0" anchor="ctr" wrap="square" lIns="25400" rIns="25400" tIns="12700" bIns="12700"/>
-          <a:lstStyle/>
-          <a:p>
-            <a:pPr algn="ctr"/>
-            <a:r>
-              <a:rPr sz="730" b="1">
-                <a:solidFill>
-                  <a:srgbClr val="142640"/>
-                </a:solidFill>
-                <a:latin typeface="Calibri"/>
-              </a:rPr>
-              <a:t>Usuario</a:t>
-            </a:r>
-          </a:p>
-        </p:txBody>
-      </p:sp>
-      <p:sp>
-        <p:nvSpPr>
-          <p:cNvPr id="26" name="Rounded Rectangle 25"/>
-          <p:cNvSpPr/>
-          <p:nvPr/>
-        </p:nvSpPr>
-        <p:spPr>
-          <a:xfrm>
-            <a:off x="9966960" y="4633721"/>
-            <a:ext cx="1828800" cy="214884"/>
-          </a:xfrm>
-          <a:prstGeom prst="roundRect">
-            <a:avLst>
-              <a:gd name="adj" fmla="val 6000"/>
-            </a:avLst>
-          </a:prstGeom>
-          <a:solidFill>
-            <a:srgbClr val="FFFFFF"/>
-          </a:solidFill>
-          <a:ln w="15240">
-            <a:solidFill>
-              <a:srgbClr val="1F3A5F"/>
-            </a:solidFill>
-          </a:ln>
-          <a:effectLst/>
-        </p:spPr>
-        <p:style>
-          <a:lnRef idx="1">
-            <a:schemeClr val="accent1"/>
-          </a:lnRef>
-          <a:fillRef idx="3">
-            <a:schemeClr val="accent1"/>
-          </a:fillRef>
-          <a:effectRef idx="2">
-            <a:schemeClr val="accent1"/>
-          </a:effectRef>
-          <a:fontRef idx="minor">
-            <a:schemeClr val="lt1"/>
-          </a:fontRef>
-        </p:style>
-        <p:txBody>
-          <a:bodyPr rtlCol="0" anchor="ctr" wrap="square" lIns="25400" rIns="25400" tIns="12700" bIns="12700"/>
-          <a:lstStyle/>
-          <a:p>
-            <a:pPr algn="ctr"/>
-            <a:r>
-              <a:rPr sz="730" b="1">
-                <a:solidFill>
-                  <a:srgbClr val="142640"/>
-                </a:solidFill>
-                <a:latin typeface="Calibri"/>
-              </a:rPr>
-              <a:t>Supervisor</a:t>
-            </a:r>
-          </a:p>
-        </p:txBody>
-      </p:sp>
-      <p:cxnSp>
-        <p:nvCxnSpPr>
-          <p:cNvPr id="27" name="Connector 26"/>
-          <p:cNvCxnSpPr/>
-          <p:nvPr/>
-        </p:nvCxnSpPr>
-        <p:spPr>
-          <a:xfrm>
-            <a:off x="10881360" y="4588002.0"/>
-            <a:ext cx="0" cy="45719.0"/>
-          </a:xfrm>
-          <a:prstGeom prst="line">
-            <a:avLst/>
-          </a:prstGeom>
-          <a:ln w="12700">
-            <a:solidFill>
-              <a:srgbClr val="1F3A5F"/>
-            </a:solidFill>
-          </a:ln>
-        </p:spPr>
-        <p:style>
-          <a:lnRef idx="2">
-            <a:schemeClr val="accent1"/>
-          </a:lnRef>
-          <a:fillRef idx="0">
-            <a:schemeClr val="accent1"/>
-          </a:fillRef>
-          <a:effectRef idx="1">
-            <a:schemeClr val="accent1"/>
-          </a:effectRef>
-          <a:fontRef idx="minor">
-            <a:schemeClr val="tx1"/>
-          </a:fontRef>
-        </p:style>
-      </p:cxnSp>
-      <p:sp>
-        <p:nvSpPr>
-          <p:cNvPr id="28" name="Rounded Rectangle 27"/>
-          <p:cNvSpPr/>
-          <p:nvPr/>
-        </p:nvSpPr>
-        <p:spPr>
-          <a:xfrm>
-            <a:off x="9966960" y="4894324"/>
-            <a:ext cx="1828800" cy="214884"/>
-          </a:xfrm>
-          <a:prstGeom prst="roundRect">
-            <a:avLst>
-              <a:gd name="adj" fmla="val 6000"/>
-            </a:avLst>
-          </a:prstGeom>
-          <a:solidFill>
-            <a:srgbClr val="FFFFFF"/>
-          </a:solidFill>
-          <a:ln w="15240">
-            <a:solidFill>
-              <a:srgbClr val="1F3A5F"/>
-            </a:solidFill>
-          </a:ln>
-          <a:effectLst/>
-        </p:spPr>
-        <p:style>
-          <a:lnRef idx="1">
-            <a:schemeClr val="accent1"/>
-          </a:lnRef>
-          <a:fillRef idx="3">
-            <a:schemeClr val="accent1"/>
-          </a:fillRef>
-          <a:effectRef idx="2">
-            <a:schemeClr val="accent1"/>
-          </a:effectRef>
-          <a:fontRef idx="minor">
-            <a:schemeClr val="lt1"/>
-          </a:fontRef>
-        </p:style>
-        <p:txBody>
-          <a:bodyPr rtlCol="0" anchor="ctr" wrap="square" lIns="25400" rIns="25400" tIns="12700" bIns="12700"/>
-          <a:lstStyle/>
-          <a:p>
-            <a:pPr algn="ctr"/>
-            <a:r>
-              <a:rPr sz="730" b="1">
-                <a:solidFill>
-                  <a:srgbClr val="142640"/>
-                </a:solidFill>
-                <a:latin typeface="Calibri"/>
-              </a:rPr>
-              <a:t>Agente
-Especialista</a:t>
-            </a:r>
-          </a:p>
-        </p:txBody>
-      </p:sp>
-      <p:cxnSp>
-        <p:nvCxnSpPr>
-          <p:cNvPr id="29" name="Connector 28"/>
-          <p:cNvCxnSpPr/>
-          <p:nvPr/>
-        </p:nvCxnSpPr>
-        <p:spPr>
-          <a:xfrm>
-            <a:off x="10881360" y="4848605.0"/>
-            <a:ext cx="0" cy="45719.0"/>
-          </a:xfrm>
-          <a:prstGeom prst="line">
-            <a:avLst/>
-          </a:prstGeom>
-          <a:ln w="12700">
-            <a:solidFill>
-              <a:srgbClr val="1F3A5F"/>
-            </a:solidFill>
-          </a:ln>
-        </p:spPr>
-        <p:style>
-          <a:lnRef idx="2">
-            <a:schemeClr val="accent1"/>
-          </a:lnRef>
-          <a:fillRef idx="0">
-            <a:schemeClr val="accent1"/>
-          </a:fillRef>
-          <a:effectRef idx="1">
-            <a:schemeClr val="accent1"/>
-          </a:effectRef>
-          <a:fontRef idx="minor">
-            <a:schemeClr val="tx1"/>
-          </a:fontRef>
-        </p:style>
-      </p:cxnSp>
-      <p:sp>
-        <p:nvSpPr>
-          <p:cNvPr id="30" name="Rounded Rectangle 29"/>
-          <p:cNvSpPr/>
-          <p:nvPr/>
-        </p:nvSpPr>
-        <p:spPr>
-          <a:xfrm>
-            <a:off x="9966960" y="5154927"/>
-            <a:ext cx="1828800" cy="214884"/>
-          </a:xfrm>
-          <a:prstGeom prst="roundRect">
-            <a:avLst>
-              <a:gd name="adj" fmla="val 6000"/>
-            </a:avLst>
-          </a:prstGeom>
-          <a:solidFill>
-            <a:srgbClr val="FFFFFF"/>
-          </a:solidFill>
-          <a:ln w="15240">
-            <a:solidFill>
-              <a:srgbClr val="8A8A8A"/>
-            </a:solidFill>
-            <a:prstDash val="dash"/>
-          </a:ln>
-          <a:effectLst/>
-        </p:spPr>
-        <p:style>
-          <a:lnRef idx="1">
-            <a:schemeClr val="accent1"/>
-          </a:lnRef>
-          <a:fillRef idx="3">
-            <a:schemeClr val="accent1"/>
-          </a:fillRef>
-          <a:effectRef idx="2">
-            <a:schemeClr val="accent1"/>
-          </a:effectRef>
-          <a:fontRef idx="minor">
-            <a:schemeClr val="lt1"/>
-          </a:fontRef>
-        </p:style>
-        <p:txBody>
-          <a:bodyPr rtlCol="0" anchor="ctr" wrap="square" lIns="25400" rIns="25400" tIns="12700" bIns="12700"/>
-          <a:lstStyle/>
-          <a:p>
-            <a:pPr algn="ctr"/>
-            <a:r>
-              <a:rPr sz="730" b="1">
-                <a:solidFill>
-                  <a:srgbClr val="555555"/>
-                </a:solidFill>
-                <a:latin typeface="Calibri"/>
-              </a:rPr>
-              <a:t>Reason</a:t>
-            </a:r>
-          </a:p>
-        </p:txBody>
-      </p:sp>
-      <p:cxnSp>
-        <p:nvCxnSpPr>
-          <p:cNvPr id="31" name="Connector 30"/>
-          <p:cNvCxnSpPr/>
-          <p:nvPr/>
-        </p:nvCxnSpPr>
-        <p:spPr>
-          <a:xfrm>
-            <a:off x="10881360" y="5109208.0"/>
-            <a:ext cx="0" cy="45719.0"/>
-          </a:xfrm>
-          <a:prstGeom prst="line">
-            <a:avLst/>
-          </a:prstGeom>
-          <a:ln w="12700">
-            <a:solidFill>
-              <a:srgbClr val="8A8A8A"/>
-            </a:solidFill>
-            <a:prstDash val="dash"/>
-          </a:ln>
-        </p:spPr>
-        <p:style>
-          <a:lnRef idx="2">
-            <a:schemeClr val="accent1"/>
-          </a:lnRef>
-          <a:fillRef idx="0">
-            <a:schemeClr val="accent1"/>
-          </a:fillRef>
-          <a:effectRef idx="1">
-            <a:schemeClr val="accent1"/>
-          </a:effectRef>
-          <a:fontRef idx="minor">
-            <a:schemeClr val="tx1"/>
-          </a:fontRef>
-        </p:style>
-      </p:cxnSp>
-      <p:sp>
-        <p:nvSpPr>
-          <p:cNvPr id="32" name="Rounded Rectangle 31"/>
-          <p:cNvSpPr/>
-          <p:nvPr/>
-        </p:nvSpPr>
-        <p:spPr>
-          <a:xfrm>
-            <a:off x="9966960" y="5415530"/>
-            <a:ext cx="1828800" cy="214884"/>
-          </a:xfrm>
-          <a:prstGeom prst="roundRect">
-            <a:avLst>
-              <a:gd name="adj" fmla="val 6000"/>
-            </a:avLst>
-          </a:prstGeom>
-          <a:solidFill>
-            <a:srgbClr val="FFFFFF"/>
-          </a:solidFill>
-          <a:ln w="15240">
-            <a:solidFill>
-              <a:srgbClr val="8A8A8A"/>
-            </a:solidFill>
-            <a:prstDash val="dash"/>
-          </a:ln>
-          <a:effectLst/>
-        </p:spPr>
-        <p:style>
-          <a:lnRef idx="1">
-            <a:schemeClr val="accent1"/>
-          </a:lnRef>
-          <a:fillRef idx="3">
-            <a:schemeClr val="accent1"/>
-          </a:fillRef>
-          <a:effectRef idx="2">
-            <a:schemeClr val="accent1"/>
-          </a:effectRef>
-          <a:fontRef idx="minor">
-            <a:schemeClr val="lt1"/>
-          </a:fontRef>
-        </p:style>
-        <p:txBody>
-          <a:bodyPr rtlCol="0" anchor="ctr" wrap="square" lIns="25400" rIns="25400" tIns="12700" bIns="12700"/>
-          <a:lstStyle/>
-          <a:p>
-            <a:pPr algn="ctr"/>
-            <a:r>
-              <a:rPr sz="730" b="1">
-                <a:solidFill>
-                  <a:srgbClr val="555555"/>
-                </a:solidFill>
-                <a:latin typeface="Calibri"/>
-              </a:rPr>
-              <a:t>Tool</a:t>
-            </a:r>
-          </a:p>
-        </p:txBody>
-      </p:sp>
-      <p:cxnSp>
-        <p:nvCxnSpPr>
-          <p:cNvPr id="33" name="Connector 32"/>
-          <p:cNvCxnSpPr/>
-          <p:nvPr/>
-        </p:nvCxnSpPr>
-        <p:spPr>
-          <a:xfrm>
-            <a:off x="10881360" y="5369811.0"/>
-            <a:ext cx="0" cy="45719.0"/>
-          </a:xfrm>
-          <a:prstGeom prst="line">
-            <a:avLst/>
-          </a:prstGeom>
-          <a:ln w="12700">
-            <a:solidFill>
-              <a:srgbClr val="8A8A8A"/>
-            </a:solidFill>
-            <a:prstDash val="dash"/>
-          </a:ln>
-        </p:spPr>
-        <p:style>
-          <a:lnRef idx="2">
-            <a:schemeClr val="accent1"/>
-          </a:lnRef>
-          <a:fillRef idx="0">
-            <a:schemeClr val="accent1"/>
-          </a:fillRef>
-          <a:effectRef idx="1">
-            <a:schemeClr val="accent1"/>
-          </a:effectRef>
-          <a:fontRef idx="minor">
-            <a:schemeClr val="tx1"/>
-          </a:fontRef>
-        </p:style>
-      </p:cxnSp>
-      <p:sp>
-        <p:nvSpPr>
-          <p:cNvPr id="34" name="Rounded Rectangle 33"/>
-          <p:cNvSpPr/>
-          <p:nvPr/>
-        </p:nvSpPr>
-        <p:spPr>
-          <a:xfrm>
-            <a:off x="9966960" y="5676133"/>
-            <a:ext cx="1828800" cy="214884"/>
-          </a:xfrm>
-          <a:prstGeom prst="roundRect">
-            <a:avLst>
-              <a:gd name="adj" fmla="val 6000"/>
-            </a:avLst>
-          </a:prstGeom>
-          <a:solidFill>
-            <a:srgbClr val="FFFFFF"/>
-          </a:solidFill>
-          <a:ln w="15240">
-            <a:solidFill>
-              <a:srgbClr val="8A8A8A"/>
-            </a:solidFill>
-            <a:prstDash val="dash"/>
-          </a:ln>
-          <a:effectLst/>
-        </p:spPr>
-        <p:style>
-          <a:lnRef idx="1">
-            <a:schemeClr val="accent1"/>
-          </a:lnRef>
-          <a:fillRef idx="3">
-            <a:schemeClr val="accent1"/>
-          </a:fillRef>
-          <a:effectRef idx="2">
-            <a:schemeClr val="accent1"/>
-          </a:effectRef>
-          <a:fontRef idx="minor">
-            <a:schemeClr val="lt1"/>
-          </a:fontRef>
-        </p:style>
-        <p:txBody>
-          <a:bodyPr rtlCol="0" anchor="ctr" wrap="square" lIns="25400" rIns="25400" tIns="12700" bIns="12700"/>
-          <a:lstStyle/>
-          <a:p>
-            <a:pPr algn="ctr"/>
-            <a:r>
-              <a:rPr sz="730" b="1">
-                <a:solidFill>
-                  <a:srgbClr val="555555"/>
-                </a:solidFill>
-                <a:latin typeface="Calibri"/>
-              </a:rPr>
-              <a:t>Observation</a:t>
-            </a:r>
-          </a:p>
-        </p:txBody>
-      </p:sp>
-      <p:cxnSp>
-        <p:nvCxnSpPr>
-          <p:cNvPr id="35" name="Connector 34"/>
-          <p:cNvCxnSpPr/>
-          <p:nvPr/>
-        </p:nvCxnSpPr>
-        <p:spPr>
-          <a:xfrm>
-            <a:off x="10881360" y="5630414.0"/>
-            <a:ext cx="0" cy="45719.0"/>
-          </a:xfrm>
-          <a:prstGeom prst="line">
-            <a:avLst/>
-          </a:prstGeom>
-          <a:ln w="12700">
-            <a:solidFill>
-              <a:srgbClr val="8A8A8A"/>
-            </a:solidFill>
-            <a:prstDash val="dash"/>
-          </a:ln>
-        </p:spPr>
-        <p:style>
-          <a:lnRef idx="2">
-            <a:schemeClr val="accent1"/>
-          </a:lnRef>
-          <a:fillRef idx="0">
-            <a:schemeClr val="accent1"/>
-          </a:fillRef>
-          <a:effectRef idx="1">
-            <a:schemeClr val="accent1"/>
-          </a:effectRef>
-          <a:fontRef idx="minor">
-            <a:schemeClr val="tx1"/>
-          </a:fontRef>
-        </p:style>
-      </p:cxnSp>
-      <p:sp>
-        <p:nvSpPr>
-          <p:cNvPr id="36" name="Rounded Rectangle 35"/>
-          <p:cNvSpPr/>
-          <p:nvPr/>
-        </p:nvSpPr>
-        <p:spPr>
-          <a:xfrm>
-            <a:off x="9966960" y="5936736"/>
-            <a:ext cx="1828800" cy="214884"/>
-          </a:xfrm>
-          <a:prstGeom prst="roundRect">
-            <a:avLst>
-              <a:gd name="adj" fmla="val 6000"/>
-            </a:avLst>
-          </a:prstGeom>
-          <a:solidFill>
-            <a:srgbClr val="FFFFFF"/>
-          </a:solidFill>
-          <a:ln w="15240">
-            <a:solidFill>
-              <a:srgbClr val="8A8A8A"/>
-            </a:solidFill>
-            <a:prstDash val="dash"/>
-          </a:ln>
-          <a:effectLst/>
-        </p:spPr>
-        <p:style>
-          <a:lnRef idx="1">
-            <a:schemeClr val="accent1"/>
-          </a:lnRef>
-          <a:fillRef idx="3">
-            <a:schemeClr val="accent1"/>
-          </a:fillRef>
-          <a:effectRef idx="2">
-            <a:schemeClr val="accent1"/>
-          </a:effectRef>
-          <a:fontRef idx="minor">
-            <a:schemeClr val="lt1"/>
-          </a:fontRef>
-        </p:style>
-        <p:txBody>
-          <a:bodyPr rtlCol="0" anchor="ctr" wrap="square" lIns="25400" rIns="25400" tIns="12700" bIns="12700"/>
-          <a:lstStyle/>
-          <a:p>
-            <a:pPr algn="ctr"/>
-            <a:r>
-              <a:rPr sz="730" b="1">
-                <a:solidFill>
-                  <a:srgbClr val="555555"/>
-                </a:solidFill>
-                <a:latin typeface="Calibri"/>
-              </a:rPr>
-              <a:t>Reason</a:t>
-            </a:r>
-          </a:p>
-        </p:txBody>
-      </p:sp>
-      <p:cxnSp>
-        <p:nvCxnSpPr>
-          <p:cNvPr id="37" name="Connector 36"/>
-          <p:cNvCxnSpPr/>
-          <p:nvPr/>
-        </p:nvCxnSpPr>
-        <p:spPr>
-          <a:xfrm>
-            <a:off x="10881360" y="5891017.0"/>
-            <a:ext cx="0" cy="45719.0"/>
-          </a:xfrm>
-          <a:prstGeom prst="line">
-            <a:avLst/>
-          </a:prstGeom>
-          <a:ln w="12700">
-            <a:solidFill>
-              <a:srgbClr val="8A8A8A"/>
-            </a:solidFill>
-            <a:prstDash val="dash"/>
-          </a:ln>
-        </p:spPr>
-        <p:style>
-          <a:lnRef idx="2">
-            <a:schemeClr val="accent1"/>
-          </a:lnRef>
-          <a:fillRef idx="0">
-            <a:schemeClr val="accent1"/>
-          </a:fillRef>
-          <a:effectRef idx="1">
-            <a:schemeClr val="accent1"/>
-          </a:effectRef>
-          <a:fontRef idx="minor">
-            <a:schemeClr val="tx1"/>
-          </a:fontRef>
-        </p:style>
-      </p:cxnSp>
-      <p:sp>
-        <p:nvSpPr>
-          <p:cNvPr id="38" name="Rounded Rectangle 37"/>
-          <p:cNvSpPr/>
-          <p:nvPr/>
-        </p:nvSpPr>
-        <p:spPr>
-          <a:xfrm>
-            <a:off x="9966960" y="6197339"/>
-            <a:ext cx="1828800" cy="214884"/>
-          </a:xfrm>
-          <a:prstGeom prst="roundRect">
-            <a:avLst>
-              <a:gd name="adj" fmla="val 6000"/>
-            </a:avLst>
-          </a:prstGeom>
-          <a:solidFill>
-            <a:srgbClr val="FFFFFF"/>
-          </a:solidFill>
-          <a:ln w="15240">
-            <a:solidFill>
-              <a:srgbClr val="8A8A8A"/>
-            </a:solidFill>
-            <a:prstDash val="dash"/>
-          </a:ln>
-          <a:effectLst/>
-        </p:spPr>
-        <p:style>
-          <a:lnRef idx="1">
-            <a:schemeClr val="accent1"/>
-          </a:lnRef>
-          <a:fillRef idx="3">
-            <a:schemeClr val="accent1"/>
-          </a:fillRef>
-          <a:effectRef idx="2">
-            <a:schemeClr val="accent1"/>
-          </a:effectRef>
-          <a:fontRef idx="minor">
-            <a:schemeClr val="lt1"/>
-          </a:fontRef>
-        </p:style>
-        <p:txBody>
-          <a:bodyPr rtlCol="0" anchor="ctr" wrap="square" lIns="25400" rIns="25400" tIns="12700" bIns="12700"/>
-          <a:lstStyle/>
-          <a:p>
-            <a:pPr algn="ctr"/>
-            <a:r>
-              <a:rPr sz="730" b="1">
-                <a:solidFill>
-                  <a:srgbClr val="555555"/>
-                </a:solidFill>
-                <a:latin typeface="Calibri"/>
-              </a:rPr>
-              <a:t>Respuesta</a:t>
-            </a:r>
-          </a:p>
-        </p:txBody>
-      </p:sp>
-      <p:cxnSp>
-        <p:nvCxnSpPr>
-          <p:cNvPr id="39" name="Connector 38"/>
-          <p:cNvCxnSpPr/>
-          <p:nvPr/>
-        </p:nvCxnSpPr>
-        <p:spPr>
-          <a:xfrm>
-            <a:off x="10881360" y="6151620.0"/>
-            <a:ext cx="0" cy="45719.0"/>
-          </a:xfrm>
-          <a:prstGeom prst="line">
-            <a:avLst/>
-          </a:prstGeom>
-          <a:ln w="12700">
-            <a:solidFill>
-              <a:srgbClr val="8A8A8A"/>
-            </a:solidFill>
-            <a:prstDash val="dash"/>
-          </a:ln>
-        </p:spPr>
-        <p:style>
-          <a:lnRef idx="2">
-            <a:schemeClr val="accent1"/>
-          </a:lnRef>
-          <a:fillRef idx="0">
-            <a:schemeClr val="accent1"/>
-          </a:fillRef>
-          <a:effectRef idx="1">
-            <a:schemeClr val="accent1"/>
-          </a:effectRef>
-          <a:fontRef idx="minor">
-            <a:schemeClr val="tx1"/>
-          </a:fontRef>
-        </p:style>
-      </p:cxnSp>
-      <p:sp>
-        <p:nvSpPr>
-          <p:cNvPr id="40" name="TextBox 39"/>
-          <p:cNvSpPr txBox="1"/>
-          <p:nvPr/>
-        </p:nvSpPr>
-        <p:spPr>
-          <a:xfrm>
-            <a:off x="7818120" y="6309360"/>
-            <a:ext cx="3840480" cy="228600"/>
-          </a:xfrm>
-          <a:prstGeom prst="rect">
-            <a:avLst/>
-          </a:prstGeom>
-          <a:noFill/>
-        </p:spPr>
-        <p:txBody>
-          <a:bodyPr wrap="square" anchor="t" lIns="50800" rIns="50800" tIns="25400" bIns="25400">
-            <a:spAutoFit/>
-          </a:bodyPr>
-          <a:lstStyle/>
-          <a:p>
-            <a:pPr algn="ctr">
-              <a:lnSpc>
-                <a:spcPct val="100000"/>
-              </a:lnSpc>
-            </a:pPr>
-            <a:r>
-              <a:rPr sz="780" b="0" i="1">
-                <a:solidFill>
-                  <a:srgbClr val="555555"/>
-                </a:solidFill>
-                <a:latin typeface="Calibri"/>
-              </a:rPr>
-              <a:t>ReAct extiende al agente especialista; no reemplaza al Supervisor.</a:t>
-            </a:r>
-          </a:p>
-        </p:txBody>
-      </p:sp>
-      <p:sp>
-        <p:nvSpPr>
-          <p:cNvPr id="41" name="TextBox 40"/>
-          <p:cNvSpPr txBox="1"/>
-          <p:nvPr/>
-        </p:nvSpPr>
-        <p:spPr>
-          <a:xfrm>
-            <a:off x="502920" y="6528816"/>
-            <a:ext cx="5943600" cy="274320"/>
-          </a:xfrm>
-          <a:prstGeom prst="rect">
-            <a:avLst/>
-          </a:prstGeom>
-          <a:noFill/>
-        </p:spPr>
-        <p:txBody>
-          <a:bodyPr wrap="square" anchor="t" lIns="50800" rIns="50800" tIns="25400" bIns="25400">
-            <a:spAutoFit/>
-          </a:bodyPr>
-          <a:lstStyle/>
-          <a:p>
-            <a:pPr algn="l">
-              <a:lnSpc>
-                <a:spcPct val="100000"/>
-              </a:lnSpc>
-            </a:pPr>
-            <a:r>
-              <a:rPr sz="900" b="0" i="0">
-                <a:solidFill>
-                  <a:srgbClr val="555555"/>
-                </a:solidFill>
-                <a:latin typeface="Calibri"/>
-              </a:rPr>
-              <a:t>TMX Enterprise AI Reference Platform — Defensa de Arquitectura</a:t>
-            </a:r>
-          </a:p>
-        </p:txBody>
-      </p:sp>
-      <p:sp>
-        <p:nvSpPr>
-          <p:cNvPr id="42" name="TextBox 41"/>
-          <p:cNvSpPr txBox="1"/>
-          <p:nvPr/>
-        </p:nvSpPr>
-        <p:spPr>
-          <a:xfrm>
-            <a:off x="6492240" y="6528816"/>
-            <a:ext cx="5212080" cy="274320"/>
-          </a:xfrm>
-          <a:prstGeom prst="rect">
-            <a:avLst/>
-          </a:prstGeom>
-          <a:noFill/>
-        </p:spPr>
-        <p:txBody>
-          <a:bodyPr wrap="square" anchor="t" lIns="50800" rIns="50800" tIns="25400" bIns="25400">
-            <a:spAutoFit/>
-          </a:bodyPr>
-          <a:lstStyle/>
-          <a:p>
-            <a:pPr algn="r">
-              <a:lnSpc>
-                <a:spcPct val="100000"/>
-              </a:lnSpc>
-            </a:pPr>
-            <a:r>
-              <a:rPr sz="830" b="0" i="1">
-                <a:solidFill>
-                  <a:srgbClr val="555555"/>
-                </a:solidFill>
-                <a:latin typeface="Calibri"/>
-              </a:rPr>
-              <a:t>Fuente: src/supervisor/, ADR-0006/0007/0010, review/06_enterprise_architecture_assessment.md</a:t>
             </a:r>
           </a:p>
         </p:txBody>
@@ -18682,6 +17367,1387 @@
 </file>
 
 <file path=ppt/slides/slide5.xml><?xml version="1.0" encoding="utf-8"?>
+<p:sld xmlns:a="http://schemas.openxmlformats.org/drawingml/2006/main" xmlns:p="http://schemas.openxmlformats.org/presentationml/2006/main" xmlns:r="http://schemas.openxmlformats.org/officeDocument/2006/relationships">
+  <p:cSld>
+    <p:bg>
+      <p:bgPr>
+        <a:solidFill>
+          <a:srgbClr val="FFFFFF"/>
+        </a:solidFill>
+        <a:effectLst/>
+      </p:bgPr>
+    </p:bg>
+    <p:spTree>
+      <p:nvGrpSpPr>
+        <p:cNvPr id="1" name=""/>
+        <p:cNvGrpSpPr/>
+        <p:nvPr/>
+      </p:nvGrpSpPr>
+      <p:grpSpPr/>
+      <p:sp>
+        <p:nvSpPr>
+          <p:cNvPr id="2" name="Rounded Rectangle 1"/>
+          <p:cNvSpPr/>
+          <p:nvPr/>
+        </p:nvSpPr>
+        <p:spPr>
+          <a:xfrm>
+            <a:off x="0" y="0"/>
+            <a:ext cx="12192000" cy="960120"/>
+          </a:xfrm>
+          <a:prstGeom prst="roundRect">
+            <a:avLst>
+              <a:gd name="adj" fmla="val 6000"/>
+            </a:avLst>
+          </a:prstGeom>
+          <a:solidFill>
+            <a:srgbClr val="1F3A5F"/>
+          </a:solidFill>
+          <a:ln>
+            <a:noFill/>
+          </a:ln>
+          <a:effectLst/>
+        </p:spPr>
+        <p:style>
+          <a:lnRef idx="1">
+            <a:schemeClr val="accent1"/>
+          </a:lnRef>
+          <a:fillRef idx="3">
+            <a:schemeClr val="accent1"/>
+          </a:fillRef>
+          <a:effectRef idx="2">
+            <a:schemeClr val="accent1"/>
+          </a:effectRef>
+          <a:fontRef idx="minor">
+            <a:schemeClr val="lt1"/>
+          </a:fontRef>
+        </p:style>
+        <p:txBody>
+          <a:bodyPr rtlCol="0" anchor="ctr"/>
+          <a:lstStyle/>
+          <a:p>
+            <a:pPr algn="ctr"/>
+          </a:p>
+        </p:txBody>
+      </p:sp>
+      <p:sp>
+        <p:nvSpPr>
+          <p:cNvPr id="3" name="TextBox 2"/>
+          <p:cNvSpPr txBox="1"/>
+          <p:nvPr/>
+        </p:nvSpPr>
+        <p:spPr>
+          <a:xfrm>
+            <a:off x="502920" y="91440"/>
+            <a:ext cx="8686800" cy="274320"/>
+          </a:xfrm>
+          <a:prstGeom prst="rect">
+            <a:avLst/>
+          </a:prstGeom>
+          <a:noFill/>
+        </p:spPr>
+        <p:txBody>
+          <a:bodyPr wrap="square" anchor="t" lIns="50800" rIns="50800" tIns="25400" bIns="25400">
+            <a:spAutoFit/>
+          </a:bodyPr>
+          <a:lstStyle/>
+          <a:p>
+            <a:pPr algn="l">
+              <a:lnSpc>
+                <a:spcPct val="100000"/>
+              </a:lnSpc>
+            </a:pPr>
+            <a:r>
+              <a:rPr sz="1200" b="1" i="0">
+                <a:solidFill>
+                  <a:srgbClr val="B9CCE0"/>
+                </a:solidFill>
+                <a:latin typeface="Calibri"/>
+              </a:rPr>
+              <a:t>Por qué esta arquitectura, en el lenguaje de patrones del curso</a:t>
+            </a:r>
+          </a:p>
+        </p:txBody>
+      </p:sp>
+      <p:sp>
+        <p:nvSpPr>
+          <p:cNvPr id="4" name="TextBox 3"/>
+          <p:cNvSpPr txBox="1"/>
+          <p:nvPr/>
+        </p:nvSpPr>
+        <p:spPr>
+          <a:xfrm>
+            <a:off x="502920" y="329184"/>
+            <a:ext cx="9875520" cy="548640"/>
+          </a:xfrm>
+          <a:prstGeom prst="rect">
+            <a:avLst/>
+          </a:prstGeom>
+          <a:noFill/>
+        </p:spPr>
+        <p:txBody>
+          <a:bodyPr wrap="square" anchor="t" lIns="50800" rIns="50800" tIns="25400" bIns="25400">
+            <a:spAutoFit/>
+          </a:bodyPr>
+          <a:lstStyle/>
+          <a:p>
+            <a:pPr algn="l">
+              <a:lnSpc>
+                <a:spcPct val="100000"/>
+              </a:lnSpc>
+            </a:pPr>
+            <a:r>
+              <a:rPr sz="2500" b="1" i="0">
+                <a:solidFill>
+                  <a:srgbClr val="FFFFFF"/>
+                </a:solidFill>
+                <a:latin typeface="Calibri"/>
+              </a:rPr>
+              <a:t>Patrones de IA Agéntica</a:t>
+            </a:r>
+          </a:p>
+        </p:txBody>
+      </p:sp>
+      <p:sp>
+        <p:nvSpPr>
+          <p:cNvPr id="5" name="TextBox 4"/>
+          <p:cNvSpPr txBox="1"/>
+          <p:nvPr/>
+        </p:nvSpPr>
+        <p:spPr>
+          <a:xfrm>
+            <a:off x="11155680" y="292608"/>
+            <a:ext cx="822960" cy="365760"/>
+          </a:xfrm>
+          <a:prstGeom prst="rect">
+            <a:avLst/>
+          </a:prstGeom>
+          <a:noFill/>
+        </p:spPr>
+        <p:txBody>
+          <a:bodyPr wrap="square" anchor="t" lIns="50800" rIns="50800" tIns="25400" bIns="25400">
+            <a:spAutoFit/>
+          </a:bodyPr>
+          <a:lstStyle/>
+          <a:p>
+            <a:pPr algn="r">
+              <a:lnSpc>
+                <a:spcPct val="100000"/>
+              </a:lnSpc>
+            </a:pPr>
+            <a:r>
+              <a:rPr sz="1300" b="1" i="0">
+                <a:solidFill>
+                  <a:srgbClr val="B9CCE0"/>
+                </a:solidFill>
+                <a:latin typeface="Calibri"/>
+              </a:rPr>
+              <a:t>05 / 14</a:t>
+            </a:r>
+          </a:p>
+        </p:txBody>
+      </p:sp>
+      <p:sp>
+        <p:nvSpPr>
+          <p:cNvPr id="6" name="TextBox 5"/>
+          <p:cNvSpPr txBox="1"/>
+          <p:nvPr/>
+        </p:nvSpPr>
+        <p:spPr>
+          <a:xfrm>
+            <a:off x="502920" y="6528816"/>
+            <a:ext cx="5943600" cy="274320"/>
+          </a:xfrm>
+          <a:prstGeom prst="rect">
+            <a:avLst/>
+          </a:prstGeom>
+          <a:noFill/>
+        </p:spPr>
+        <p:txBody>
+          <a:bodyPr wrap="square" anchor="t" lIns="50800" rIns="50800" tIns="25400" bIns="25400">
+            <a:spAutoFit/>
+          </a:bodyPr>
+          <a:lstStyle/>
+          <a:p>
+            <a:pPr algn="l">
+              <a:lnSpc>
+                <a:spcPct val="100000"/>
+              </a:lnSpc>
+            </a:pPr>
+            <a:r>
+              <a:rPr sz="900" b="0" i="0">
+                <a:solidFill>
+                  <a:srgbClr val="555555"/>
+                </a:solidFill>
+                <a:latin typeface="Calibri"/>
+              </a:rPr>
+              <a:t>TMX Enterprise AI Reference Platform — Defensa de Arquitectura</a:t>
+            </a:r>
+          </a:p>
+        </p:txBody>
+      </p:sp>
+      <p:sp>
+        <p:nvSpPr>
+          <p:cNvPr id="7" name="TextBox 6"/>
+          <p:cNvSpPr txBox="1"/>
+          <p:nvPr/>
+        </p:nvSpPr>
+        <p:spPr>
+          <a:xfrm>
+            <a:off x="6492240" y="6528816"/>
+            <a:ext cx="5212080" cy="274320"/>
+          </a:xfrm>
+          <a:prstGeom prst="rect">
+            <a:avLst/>
+          </a:prstGeom>
+          <a:noFill/>
+        </p:spPr>
+        <p:txBody>
+          <a:bodyPr wrap="square" anchor="t" lIns="50800" rIns="50800" tIns="25400" bIns="25400">
+            <a:spAutoFit/>
+          </a:bodyPr>
+          <a:lstStyle/>
+          <a:p>
+            <a:pPr algn="r">
+              <a:lnSpc>
+                <a:spcPct val="100000"/>
+              </a:lnSpc>
+            </a:pPr>
+            <a:r>
+              <a:rPr sz="830" b="0" i="1">
+                <a:solidFill>
+                  <a:srgbClr val="555555"/>
+                </a:solidFill>
+                <a:latin typeface="Calibri"/>
+              </a:rPr>
+              <a:t>Fuente: ADR-0011, src/core/tool_calling/orchestrator.py, review/06 §9</a:t>
+            </a:r>
+          </a:p>
+        </p:txBody>
+      </p:sp>
+      <p:sp>
+        <p:nvSpPr>
+          <p:cNvPr id="8" name="Rounded Rectangle 7"/>
+          <p:cNvSpPr/>
+          <p:nvPr/>
+        </p:nvSpPr>
+        <p:spPr>
+          <a:xfrm>
+            <a:off x="502920" y="1051560"/>
+            <a:ext cx="11201400" cy="777240"/>
+          </a:xfrm>
+          <a:prstGeom prst="roundRect">
+            <a:avLst>
+              <a:gd name="adj" fmla="val 6000"/>
+            </a:avLst>
+          </a:prstGeom>
+          <a:solidFill>
+            <a:srgbClr val="1F3A5F"/>
+          </a:solidFill>
+          <a:ln>
+            <a:noFill/>
+          </a:ln>
+          <a:effectLst/>
+        </p:spPr>
+        <p:style>
+          <a:lnRef idx="1">
+            <a:schemeClr val="accent1"/>
+          </a:lnRef>
+          <a:fillRef idx="3">
+            <a:schemeClr val="accent1"/>
+          </a:fillRef>
+          <a:effectRef idx="2">
+            <a:schemeClr val="accent1"/>
+          </a:effectRef>
+          <a:fontRef idx="minor">
+            <a:schemeClr val="lt1"/>
+          </a:fontRef>
+        </p:style>
+        <p:txBody>
+          <a:bodyPr rtlCol="0" anchor="ctr"/>
+          <a:lstStyle/>
+          <a:p>
+            <a:pPr algn="ctr"/>
+          </a:p>
+        </p:txBody>
+      </p:sp>
+      <p:sp>
+        <p:nvSpPr>
+          <p:cNvPr id="9" name="TextBox 8"/>
+          <p:cNvSpPr txBox="1"/>
+          <p:nvPr/>
+        </p:nvSpPr>
+        <p:spPr>
+          <a:xfrm>
+            <a:off x="731520" y="1133856"/>
+            <a:ext cx="10744200" cy="274320"/>
+          </a:xfrm>
+          <a:prstGeom prst="rect">
+            <a:avLst/>
+          </a:prstGeom>
+          <a:noFill/>
+        </p:spPr>
+        <p:txBody>
+          <a:bodyPr wrap="square" anchor="t" lIns="50800" rIns="50800" tIns="25400" bIns="25400">
+            <a:spAutoFit/>
+          </a:bodyPr>
+          <a:lstStyle/>
+          <a:p>
+            <a:pPr algn="l">
+              <a:lnSpc>
+                <a:spcPct val="100000"/>
+              </a:lnSpc>
+            </a:pPr>
+            <a:r>
+              <a:rPr sz="1100" b="1" i="0">
+                <a:solidFill>
+                  <a:srgbClr val="9FC1E0"/>
+                </a:solidFill>
+                <a:latin typeface="Calibri"/>
+              </a:rPr>
+              <a:t>PATRÓN PRIMARIO</a:t>
+            </a:r>
+          </a:p>
+        </p:txBody>
+      </p:sp>
+      <p:sp>
+        <p:nvSpPr>
+          <p:cNvPr id="10" name="TextBox 9"/>
+          <p:cNvSpPr txBox="1"/>
+          <p:nvPr/>
+        </p:nvSpPr>
+        <p:spPr>
+          <a:xfrm>
+            <a:off x="731520" y="1371600"/>
+            <a:ext cx="10744200" cy="411480"/>
+          </a:xfrm>
+          <a:prstGeom prst="rect">
+            <a:avLst/>
+          </a:prstGeom>
+          <a:noFill/>
+        </p:spPr>
+        <p:txBody>
+          <a:bodyPr wrap="square" anchor="t" lIns="50800" rIns="50800" tIns="25400" bIns="25400">
+            <a:spAutoFit/>
+          </a:bodyPr>
+          <a:lstStyle/>
+          <a:p>
+            <a:pPr algn="l">
+              <a:lnSpc>
+                <a:spcPct val="100000"/>
+              </a:lnSpc>
+            </a:pPr>
+            <a:r>
+              <a:rPr sz="1700" b="1" i="0">
+                <a:solidFill>
+                  <a:srgbClr val="FFFFFF"/>
+                </a:solidFill>
+                <a:latin typeface="Calibri"/>
+              </a:rPr>
+              <a:t>ReAct + Tool Calling — implementado en Claims, Broker Services y Commercial Intake</a:t>
+            </a:r>
+          </a:p>
+        </p:txBody>
+      </p:sp>
+      <p:sp>
+        <p:nvSpPr>
+          <p:cNvPr id="11" name="Rounded Rectangle 10"/>
+          <p:cNvSpPr/>
+          <p:nvPr/>
+        </p:nvSpPr>
+        <p:spPr>
+          <a:xfrm>
+            <a:off x="502920" y="1965960"/>
+            <a:ext cx="5532120" cy="1417320"/>
+          </a:xfrm>
+          <a:prstGeom prst="roundRect">
+            <a:avLst>
+              <a:gd name="adj" fmla="val 6000"/>
+            </a:avLst>
+          </a:prstGeom>
+          <a:solidFill>
+            <a:srgbClr val="F2F2F2"/>
+          </a:solidFill>
+          <a:ln w="13970">
+            <a:solidFill>
+              <a:srgbClr val="0E7C86"/>
+            </a:solidFill>
+          </a:ln>
+          <a:effectLst/>
+        </p:spPr>
+        <p:style>
+          <a:lnRef idx="1">
+            <a:schemeClr val="accent1"/>
+          </a:lnRef>
+          <a:fillRef idx="3">
+            <a:schemeClr val="accent1"/>
+          </a:fillRef>
+          <a:effectRef idx="2">
+            <a:schemeClr val="accent1"/>
+          </a:effectRef>
+          <a:fontRef idx="minor">
+            <a:schemeClr val="lt1"/>
+          </a:fontRef>
+        </p:style>
+        <p:txBody>
+          <a:bodyPr rtlCol="0" anchor="ctr"/>
+          <a:lstStyle/>
+          <a:p>
+            <a:pPr algn="ctr"/>
+          </a:p>
+        </p:txBody>
+      </p:sp>
+      <p:sp>
+        <p:nvSpPr>
+          <p:cNvPr id="12" name="TextBox 11"/>
+          <p:cNvSpPr txBox="1"/>
+          <p:nvPr/>
+        </p:nvSpPr>
+        <p:spPr>
+          <a:xfrm>
+            <a:off x="685800" y="2057400"/>
+            <a:ext cx="5166360" cy="274320"/>
+          </a:xfrm>
+          <a:prstGeom prst="rect">
+            <a:avLst/>
+          </a:prstGeom>
+          <a:noFill/>
+        </p:spPr>
+        <p:txBody>
+          <a:bodyPr wrap="square" anchor="t" lIns="50800" rIns="50800" tIns="25400" bIns="25400">
+            <a:spAutoFit/>
+          </a:bodyPr>
+          <a:lstStyle/>
+          <a:p>
+            <a:pPr algn="l">
+              <a:lnSpc>
+                <a:spcPct val="100000"/>
+              </a:lnSpc>
+            </a:pPr>
+            <a:r>
+              <a:rPr sz="1250" b="1" i="0">
+                <a:solidFill>
+                  <a:srgbClr val="0E7C86"/>
+                </a:solidFill>
+                <a:latin typeface="Calibri"/>
+              </a:rPr>
+              <a:t>Supervisor Agent</a:t>
+            </a:r>
+          </a:p>
+        </p:txBody>
+      </p:sp>
+      <p:sp>
+        <p:nvSpPr>
+          <p:cNvPr id="13" name="TextBox 12"/>
+          <p:cNvSpPr txBox="1"/>
+          <p:nvPr/>
+        </p:nvSpPr>
+        <p:spPr>
+          <a:xfrm>
+            <a:off x="685800" y="2359152"/>
+            <a:ext cx="5166360" cy="960120"/>
+          </a:xfrm>
+          <a:prstGeom prst="rect">
+            <a:avLst/>
+          </a:prstGeom>
+          <a:noFill/>
+        </p:spPr>
+        <p:txBody>
+          <a:bodyPr wrap="square">
+            <a:spAutoFit/>
+          </a:bodyPr>
+          <a:lstStyle/>
+          <a:p>
+            <a:pPr>
+              <a:spcAft>
+                <a:spcPts val="600"/>
+              </a:spcAft>
+            </a:pPr>
+            <a:r>
+              <a:rPr sz="1100">
+                <a:solidFill>
+                  <a:srgbClr val="142640"/>
+                </a:solidFill>
+                <a:latin typeface="Calibri"/>
+              </a:rPr>
+              <a:t>▪  Orquestación determinista — enrutamiento por palabras clave, sin LLM.</a:t>
+            </a:r>
+          </a:p>
+          <a:p>
+            <a:pPr>
+              <a:spcAft>
+                <a:spcPts val="600"/>
+              </a:spcAft>
+            </a:pPr>
+            <a:r>
+              <a:rPr sz="1100">
+                <a:solidFill>
+                  <a:srgbClr val="142640"/>
+                </a:solidFill>
+                <a:latin typeface="Calibri"/>
+              </a:rPr>
+              <a:t>▪  Permanece fuera del bucle ReAct por diseño (ADR-0011).</a:t>
+            </a:r>
+          </a:p>
+        </p:txBody>
+      </p:sp>
+      <p:sp>
+        <p:nvSpPr>
+          <p:cNvPr id="14" name="Rounded Rectangle 13"/>
+          <p:cNvSpPr/>
+          <p:nvPr/>
+        </p:nvSpPr>
+        <p:spPr>
+          <a:xfrm>
+            <a:off x="6172200" y="1965960"/>
+            <a:ext cx="5532120" cy="1417320"/>
+          </a:xfrm>
+          <a:prstGeom prst="roundRect">
+            <a:avLst>
+              <a:gd name="adj" fmla="val 6000"/>
+            </a:avLst>
+          </a:prstGeom>
+          <a:solidFill>
+            <a:srgbClr val="F2F2F2"/>
+          </a:solidFill>
+          <a:ln w="13970">
+            <a:solidFill>
+              <a:srgbClr val="0E7C86"/>
+            </a:solidFill>
+          </a:ln>
+          <a:effectLst/>
+        </p:spPr>
+        <p:style>
+          <a:lnRef idx="1">
+            <a:schemeClr val="accent1"/>
+          </a:lnRef>
+          <a:fillRef idx="3">
+            <a:schemeClr val="accent1"/>
+          </a:fillRef>
+          <a:effectRef idx="2">
+            <a:schemeClr val="accent1"/>
+          </a:effectRef>
+          <a:fontRef idx="minor">
+            <a:schemeClr val="lt1"/>
+          </a:fontRef>
+        </p:style>
+        <p:txBody>
+          <a:bodyPr rtlCol="0" anchor="ctr"/>
+          <a:lstStyle/>
+          <a:p>
+            <a:pPr algn="ctr"/>
+          </a:p>
+        </p:txBody>
+      </p:sp>
+      <p:sp>
+        <p:nvSpPr>
+          <p:cNvPr id="15" name="TextBox 14"/>
+          <p:cNvSpPr txBox="1"/>
+          <p:nvPr/>
+        </p:nvSpPr>
+        <p:spPr>
+          <a:xfrm>
+            <a:off x="6355080" y="2057400"/>
+            <a:ext cx="5166360" cy="274320"/>
+          </a:xfrm>
+          <a:prstGeom prst="rect">
+            <a:avLst/>
+          </a:prstGeom>
+          <a:noFill/>
+        </p:spPr>
+        <p:txBody>
+          <a:bodyPr wrap="square" anchor="t" lIns="50800" rIns="50800" tIns="25400" bIns="25400">
+            <a:spAutoFit/>
+          </a:bodyPr>
+          <a:lstStyle/>
+          <a:p>
+            <a:pPr algn="l">
+              <a:lnSpc>
+                <a:spcPct val="100000"/>
+              </a:lnSpc>
+            </a:pPr>
+            <a:r>
+              <a:rPr sz="1250" b="1" i="0">
+                <a:solidFill>
+                  <a:srgbClr val="0E7C86"/>
+                </a:solidFill>
+                <a:latin typeface="Calibri"/>
+              </a:rPr>
+              <a:t>Agentes Especialistas</a:t>
+            </a:r>
+          </a:p>
+        </p:txBody>
+      </p:sp>
+      <p:sp>
+        <p:nvSpPr>
+          <p:cNvPr id="16" name="TextBox 15"/>
+          <p:cNvSpPr txBox="1"/>
+          <p:nvPr/>
+        </p:nvSpPr>
+        <p:spPr>
+          <a:xfrm>
+            <a:off x="6355080" y="2359152"/>
+            <a:ext cx="5166360" cy="960120"/>
+          </a:xfrm>
+          <a:prstGeom prst="rect">
+            <a:avLst/>
+          </a:prstGeom>
+          <a:noFill/>
+        </p:spPr>
+        <p:txBody>
+          <a:bodyPr wrap="square">
+            <a:spAutoFit/>
+          </a:bodyPr>
+          <a:lstStyle/>
+          <a:p>
+            <a:pPr>
+              <a:spcAft>
+                <a:spcPts val="600"/>
+              </a:spcAft>
+            </a:pPr>
+            <a:r>
+              <a:rPr sz="1100">
+                <a:solidFill>
+                  <a:srgbClr val="142640"/>
+                </a:solidFill>
+                <a:latin typeface="Calibri"/>
+              </a:rPr>
+              <a:t>▪  Claims, Broker Services y Commercial Intake ejecutan el bucle ReAct.</a:t>
+            </a:r>
+          </a:p>
+          <a:p>
+            <a:pPr>
+              <a:spcAft>
+                <a:spcPts val="600"/>
+              </a:spcAft>
+            </a:pPr>
+            <a:r>
+              <a:rPr sz="1100">
+                <a:solidFill>
+                  <a:srgbClr val="142640"/>
+                </a:solidFill>
+                <a:latin typeface="Calibri"/>
+              </a:rPr>
+              <a:t>▪  Reason → Action (Tool) → Observation → Reason → ... → Final Answer.</a:t>
+            </a:r>
+          </a:p>
+        </p:txBody>
+      </p:sp>
+      <p:sp>
+        <p:nvSpPr>
+          <p:cNvPr id="17" name="TextBox 16"/>
+          <p:cNvSpPr txBox="1"/>
+          <p:nvPr/>
+        </p:nvSpPr>
+        <p:spPr>
+          <a:xfrm>
+            <a:off x="502920" y="3520440"/>
+            <a:ext cx="5486400" cy="228600"/>
+          </a:xfrm>
+          <a:prstGeom prst="rect">
+            <a:avLst/>
+          </a:prstGeom>
+          <a:noFill/>
+        </p:spPr>
+        <p:txBody>
+          <a:bodyPr wrap="square" anchor="t" lIns="50800" rIns="50800" tIns="25400" bIns="25400">
+            <a:spAutoFit/>
+          </a:bodyPr>
+          <a:lstStyle/>
+          <a:p>
+            <a:pPr algn="l">
+              <a:lnSpc>
+                <a:spcPct val="100000"/>
+              </a:lnSpc>
+            </a:pPr>
+            <a:r>
+              <a:rPr sz="1100" b="1" i="0">
+                <a:solidFill>
+                  <a:srgbClr val="1F3A5F"/>
+                </a:solidFill>
+                <a:latin typeface="Calibri"/>
+              </a:rPr>
+              <a:t>PATRONES COMPLEMENTARIOS YA IMPLEMENTADOS</a:t>
+            </a:r>
+          </a:p>
+        </p:txBody>
+      </p:sp>
+      <p:graphicFrame>
+        <p:nvGraphicFramePr>
+          <p:cNvPr id="18" name="Table 17"/>
+          <p:cNvGraphicFramePr>
+            <a:graphicFrameLocks noGrp="1"/>
+          </p:cNvGraphicFramePr>
+          <p:nvPr/>
+        </p:nvGraphicFramePr>
+        <p:xfrm>
+          <a:off x="502920" y="3794760"/>
+          <a:ext cx="11201400" cy="1691640"/>
+        </p:xfrm>
+        <a:graphic>
+          <a:graphicData uri="http://schemas.openxmlformats.org/drawingml/2006/table">
+            <a:tbl>
+              <a:tblPr firstRow="1" bandRow="1">
+                <a:tableStyleId>{5C22544A-7EE6-4342-B048-85BDC9FD1C3A}</a:tableStyleId>
+              </a:tblPr>
+              <a:tblGrid>
+                <a:gridCol w="2103120"/>
+                <a:gridCol w="7178040"/>
+                <a:gridCol w="1920240"/>
+              </a:tblGrid>
+              <a:tr h="281940">
+                <a:tc>
+                  <a:txBody>
+                    <a:bodyPr/>
+                    <a:lstStyle/>
+                    <a:p>
+                      <a:r>
+                        <a:rPr b="1" sz="1050">
+                          <a:solidFill>
+                            <a:srgbClr val="FFFFFF"/>
+                          </a:solidFill>
+                        </a:rPr>
+                        <a:t>Patrón</a:t>
+                      </a:r>
+                    </a:p>
+                  </a:txBody>
+                  <a:tcPr anchor="ctr" marL="50800" marR="50800">
+                    <a:solidFill>
+                      <a:srgbClr val="1F3A5F"/>
+                    </a:solidFill>
+                  </a:tcPr>
+                </a:tc>
+                <a:tc>
+                  <a:txBody>
+                    <a:bodyPr/>
+                    <a:lstStyle/>
+                    <a:p>
+                      <a:r>
+                        <a:rPr b="1" sz="1050">
+                          <a:solidFill>
+                            <a:srgbClr val="FFFFFF"/>
+                          </a:solidFill>
+                        </a:rPr>
+                        <a:t>Cómo se implementa</a:t>
+                      </a:r>
+                    </a:p>
+                  </a:txBody>
+                  <a:tcPr anchor="ctr" marL="50800" marR="50800">
+                    <a:solidFill>
+                      <a:srgbClr val="1F3A5F"/>
+                    </a:solidFill>
+                  </a:tcPr>
+                </a:tc>
+                <a:tc>
+                  <a:txBody>
+                    <a:bodyPr/>
+                    <a:lstStyle/>
+                    <a:p>
+                      <a:r>
+                        <a:rPr b="1" sz="1050">
+                          <a:solidFill>
+                            <a:srgbClr val="FFFFFF"/>
+                          </a:solidFill>
+                        </a:rPr>
+                        <a:t>Estado</a:t>
+                      </a:r>
+                    </a:p>
+                  </a:txBody>
+                  <a:tcPr anchor="ctr" marL="50800" marR="50800">
+                    <a:solidFill>
+                      <a:srgbClr val="1F3A5F"/>
+                    </a:solidFill>
+                  </a:tcPr>
+                </a:tc>
+              </a:tr>
+              <a:tr h="281940">
+                <a:tc>
+                  <a:txBody>
+                    <a:bodyPr wrap="square"/>
+                    <a:lstStyle/>
+                    <a:p>
+                      <a:r>
+                        <a:rPr sz="969">
+                          <a:solidFill>
+                            <a:srgbClr val="142640"/>
+                          </a:solidFill>
+                        </a:rPr>
+                        <a:t>Multi-Agent</a:t>
+                      </a:r>
+                    </a:p>
+                  </a:txBody>
+                  <a:tcPr anchor="ctr" marL="50800" marR="50800">
+                    <a:solidFill>
+                      <a:srgbClr val="FFFFFF"/>
+                    </a:solidFill>
+                  </a:tcPr>
+                </a:tc>
+                <a:tc>
+                  <a:txBody>
+                    <a:bodyPr wrap="square"/>
+                    <a:lstStyle/>
+                    <a:p>
+                      <a:r>
+                        <a:rPr sz="969">
+                          <a:solidFill>
+                            <a:srgbClr val="142640"/>
+                          </a:solidFill>
+                        </a:rPr>
+                        <a:t>Supervisor + Claims Agent + Broker Agent + Commercial Intake Agent</a:t>
+                      </a:r>
+                    </a:p>
+                  </a:txBody>
+                  <a:tcPr anchor="ctr" marL="50800" marR="50800">
+                    <a:solidFill>
+                      <a:srgbClr val="FFFFFF"/>
+                    </a:solidFill>
+                  </a:tcPr>
+                </a:tc>
+                <a:tc>
+                  <a:txBody>
+                    <a:bodyPr wrap="square"/>
+                    <a:lstStyle/>
+                    <a:p>
+                      <a:r>
+                        <a:rPr sz="969">
+                          <a:solidFill>
+                            <a:srgbClr val="142640"/>
+                          </a:solidFill>
+                        </a:rPr>
+                        <a:t>Implementado</a:t>
+                      </a:r>
+                    </a:p>
+                  </a:txBody>
+                  <a:tcPr anchor="ctr" marL="50800" marR="50800">
+                    <a:solidFill>
+                      <a:srgbClr val="FFFFFF"/>
+                    </a:solidFill>
+                  </a:tcPr>
+                </a:tc>
+              </a:tr>
+              <a:tr h="281940">
+                <a:tc>
+                  <a:txBody>
+                    <a:bodyPr wrap="square"/>
+                    <a:lstStyle/>
+                    <a:p>
+                      <a:r>
+                        <a:rPr sz="969">
+                          <a:solidFill>
+                            <a:srgbClr val="142640"/>
+                          </a:solidFill>
+                        </a:rPr>
+                        <a:t>Planner–Executor</a:t>
+                      </a:r>
+                    </a:p>
+                  </a:txBody>
+                  <a:tcPr anchor="ctr" marL="50800" marR="50800">
+                    <a:solidFill>
+                      <a:srgbClr val="F2F2F2"/>
+                    </a:solidFill>
+                  </a:tcPr>
+                </a:tc>
+                <a:tc>
+                  <a:txBody>
+                    <a:bodyPr wrap="square"/>
+                    <a:lstStyle/>
+                    <a:p>
+                      <a:r>
+                        <a:rPr sz="969">
+                          <a:solidFill>
+                            <a:srgbClr val="142640"/>
+                          </a:solidFill>
+                        </a:rPr>
+                        <a:t>El Supervisor enruta (planifica); cada agente especialista ejecuta</a:t>
+                      </a:r>
+                    </a:p>
+                  </a:txBody>
+                  <a:tcPr anchor="ctr" marL="50800" marR="50800">
+                    <a:solidFill>
+                      <a:srgbClr val="F2F2F2"/>
+                    </a:solidFill>
+                  </a:tcPr>
+                </a:tc>
+                <a:tc>
+                  <a:txBody>
+                    <a:bodyPr wrap="square"/>
+                    <a:lstStyle/>
+                    <a:p>
+                      <a:r>
+                        <a:rPr sz="969">
+                          <a:solidFill>
+                            <a:srgbClr val="142640"/>
+                          </a:solidFill>
+                        </a:rPr>
+                        <a:t>Implementado</a:t>
+                      </a:r>
+                    </a:p>
+                  </a:txBody>
+                  <a:tcPr anchor="ctr" marL="50800" marR="50800">
+                    <a:solidFill>
+                      <a:srgbClr val="F2F2F2"/>
+                    </a:solidFill>
+                  </a:tcPr>
+                </a:tc>
+              </a:tr>
+              <a:tr h="281940">
+                <a:tc>
+                  <a:txBody>
+                    <a:bodyPr wrap="square"/>
+                    <a:lstStyle/>
+                    <a:p>
+                      <a:r>
+                        <a:rPr sz="969">
+                          <a:solidFill>
+                            <a:srgbClr val="142640"/>
+                          </a:solidFill>
+                        </a:rPr>
+                        <a:t>Memory</a:t>
+                      </a:r>
+                    </a:p>
+                  </a:txBody>
+                  <a:tcPr anchor="ctr" marL="50800" marR="50800">
+                    <a:solidFill>
+                      <a:srgbClr val="FFFFFF"/>
+                    </a:solidFill>
+                  </a:tcPr>
+                </a:tc>
+                <a:tc>
+                  <a:txBody>
+                    <a:bodyPr wrap="square"/>
+                    <a:lstStyle/>
+                    <a:p>
+                      <a:r>
+                        <a:rPr sz="969">
+                          <a:solidFill>
+                            <a:srgbClr val="142640"/>
+                          </a:solidFill>
+                        </a:rPr>
+                        <a:t>Memoria conversacional en Cosmos DB, entre dominios</a:t>
+                      </a:r>
+                    </a:p>
+                  </a:txBody>
+                  <a:tcPr anchor="ctr" marL="50800" marR="50800">
+                    <a:solidFill>
+                      <a:srgbClr val="FFFFFF"/>
+                    </a:solidFill>
+                  </a:tcPr>
+                </a:tc>
+                <a:tc>
+                  <a:txBody>
+                    <a:bodyPr wrap="square"/>
+                    <a:lstStyle/>
+                    <a:p>
+                      <a:r>
+                        <a:rPr sz="969">
+                          <a:solidFill>
+                            <a:srgbClr val="142640"/>
+                          </a:solidFill>
+                        </a:rPr>
+                        <a:t>Implementado</a:t>
+                      </a:r>
+                    </a:p>
+                  </a:txBody>
+                  <a:tcPr anchor="ctr" marL="50800" marR="50800">
+                    <a:solidFill>
+                      <a:srgbClr val="FFFFFF"/>
+                    </a:solidFill>
+                  </a:tcPr>
+                </a:tc>
+              </a:tr>
+              <a:tr h="281940">
+                <a:tc>
+                  <a:txBody>
+                    <a:bodyPr wrap="square"/>
+                    <a:lstStyle/>
+                    <a:p>
+                      <a:r>
+                        <a:rPr sz="969">
+                          <a:solidFill>
+                            <a:srgbClr val="142640"/>
+                          </a:solidFill>
+                        </a:rPr>
+                        <a:t>Guardrails</a:t>
+                      </a:r>
+                    </a:p>
+                  </a:txBody>
+                  <a:tcPr anchor="ctr" marL="50800" marR="50800">
+                    <a:solidFill>
+                      <a:srgbClr val="F2F2F2"/>
+                    </a:solidFill>
+                  </a:tcPr>
+                </a:tc>
+                <a:tc>
+                  <a:txBody>
+                    <a:bodyPr wrap="square"/>
+                    <a:lstStyle/>
+                    <a:p>
+                      <a:r>
+                        <a:rPr sz="969">
+                          <a:solidFill>
+                            <a:srgbClr val="142640"/>
+                          </a:solidFill>
+                        </a:rPr>
+                        <a:t>Entra ID + JWT/JWKS + Tool Calling determinista</a:t>
+                      </a:r>
+                    </a:p>
+                  </a:txBody>
+                  <a:tcPr anchor="ctr" marL="50800" marR="50800">
+                    <a:solidFill>
+                      <a:srgbClr val="F2F2F2"/>
+                    </a:solidFill>
+                  </a:tcPr>
+                </a:tc>
+                <a:tc>
+                  <a:txBody>
+                    <a:bodyPr wrap="square"/>
+                    <a:lstStyle/>
+                    <a:p>
+                      <a:r>
+                        <a:rPr sz="969">
+                          <a:solidFill>
+                            <a:srgbClr val="142640"/>
+                          </a:solidFill>
+                        </a:rPr>
+                        <a:t>Implementado</a:t>
+                      </a:r>
+                    </a:p>
+                  </a:txBody>
+                  <a:tcPr anchor="ctr" marL="50800" marR="50800">
+                    <a:solidFill>
+                      <a:srgbClr val="F2F2F2"/>
+                    </a:solidFill>
+                  </a:tcPr>
+                </a:tc>
+              </a:tr>
+              <a:tr h="281940">
+                <a:tc>
+                  <a:txBody>
+                    <a:bodyPr wrap="square"/>
+                    <a:lstStyle/>
+                    <a:p>
+                      <a:r>
+                        <a:rPr sz="969">
+                          <a:solidFill>
+                            <a:srgbClr val="142640"/>
+                          </a:solidFill>
+                        </a:rPr>
+                        <a:t>RAG</a:t>
+                      </a:r>
+                    </a:p>
+                  </a:txBody>
+                  <a:tcPr anchor="ctr" marL="50800" marR="50800">
+                    <a:solidFill>
+                      <a:srgbClr val="FFFFFF"/>
+                    </a:solidFill>
+                  </a:tcPr>
+                </a:tc>
+                <a:tc>
+                  <a:txBody>
+                    <a:bodyPr wrap="square"/>
+                    <a:lstStyle/>
+                    <a:p>
+                      <a:r>
+                        <a:rPr sz="969">
+                          <a:solidFill>
+                            <a:srgbClr val="142640"/>
+                          </a:solidFill>
+                        </a:rPr>
+                        <a:t>Azure AI Search integrado; hoy con datos sintéticos</a:t>
+                      </a:r>
+                    </a:p>
+                  </a:txBody>
+                  <a:tcPr anchor="ctr" marL="50800" marR="50800">
+                    <a:solidFill>
+                      <a:srgbClr val="FFFFFF"/>
+                    </a:solidFill>
+                  </a:tcPr>
+                </a:tc>
+                <a:tc>
+                  <a:txBody>
+                    <a:bodyPr wrap="square"/>
+                    <a:lstStyle/>
+                    <a:p>
+                      <a:r>
+                        <a:rPr sz="969">
+                          <a:solidFill>
+                            <a:srgbClr val="142640"/>
+                          </a:solidFill>
+                        </a:rPr>
+                        <a:t>Arquitectura lista</a:t>
+                      </a:r>
+                    </a:p>
+                  </a:txBody>
+                  <a:tcPr anchor="ctr" marL="50800" marR="50800">
+                    <a:solidFill>
+                      <a:srgbClr val="FFFFFF"/>
+                    </a:solidFill>
+                  </a:tcPr>
+                </a:tc>
+              </a:tr>
+            </a:tbl>
+          </a:graphicData>
+        </a:graphic>
+      </p:graphicFrame>
+      <p:sp>
+        <p:nvSpPr>
+          <p:cNvPr id="19" name="Rounded Rectangle 18"/>
+          <p:cNvSpPr/>
+          <p:nvPr/>
+        </p:nvSpPr>
+        <p:spPr>
+          <a:xfrm>
+            <a:off x="502920" y="5623560"/>
+            <a:ext cx="5532120" cy="822960"/>
+          </a:xfrm>
+          <a:prstGeom prst="roundRect">
+            <a:avLst>
+              <a:gd name="adj" fmla="val 6000"/>
+            </a:avLst>
+          </a:prstGeom>
+          <a:solidFill>
+            <a:srgbClr val="F2F2F2"/>
+          </a:solidFill>
+          <a:ln w="13970">
+            <a:solidFill>
+              <a:srgbClr val="B87A00"/>
+            </a:solidFill>
+          </a:ln>
+          <a:effectLst/>
+        </p:spPr>
+        <p:style>
+          <a:lnRef idx="1">
+            <a:schemeClr val="accent1"/>
+          </a:lnRef>
+          <a:fillRef idx="3">
+            <a:schemeClr val="accent1"/>
+          </a:fillRef>
+          <a:effectRef idx="2">
+            <a:schemeClr val="accent1"/>
+          </a:effectRef>
+          <a:fontRef idx="minor">
+            <a:schemeClr val="lt1"/>
+          </a:fontRef>
+        </p:style>
+        <p:txBody>
+          <a:bodyPr rtlCol="0" anchor="ctr"/>
+          <a:lstStyle/>
+          <a:p>
+            <a:pPr algn="ctr"/>
+          </a:p>
+        </p:txBody>
+      </p:sp>
+      <p:sp>
+        <p:nvSpPr>
+          <p:cNvPr id="20" name="TextBox 19"/>
+          <p:cNvSpPr txBox="1"/>
+          <p:nvPr/>
+        </p:nvSpPr>
+        <p:spPr>
+          <a:xfrm>
+            <a:off x="685800" y="5687568"/>
+            <a:ext cx="5166360" cy="256032"/>
+          </a:xfrm>
+          <a:prstGeom prst="rect">
+            <a:avLst/>
+          </a:prstGeom>
+          <a:noFill/>
+        </p:spPr>
+        <p:txBody>
+          <a:bodyPr wrap="square" anchor="t" lIns="50800" rIns="50800" tIns="25400" bIns="25400">
+            <a:spAutoFit/>
+          </a:bodyPr>
+          <a:lstStyle/>
+          <a:p>
+            <a:pPr algn="l">
+              <a:lnSpc>
+                <a:spcPct val="100000"/>
+              </a:lnSpc>
+            </a:pPr>
+            <a:r>
+              <a:rPr sz="1050" b="1" i="0">
+                <a:solidFill>
+                  <a:srgbClr val="B87A00"/>
+                </a:solidFill>
+                <a:latin typeface="Calibri"/>
+              </a:rPr>
+              <a:t>EVOLUCIÓN FUTURA (no implementada)</a:t>
+            </a:r>
+          </a:p>
+        </p:txBody>
+      </p:sp>
+      <p:sp>
+        <p:nvSpPr>
+          <p:cNvPr id="21" name="TextBox 20"/>
+          <p:cNvSpPr txBox="1"/>
+          <p:nvPr/>
+        </p:nvSpPr>
+        <p:spPr>
+          <a:xfrm>
+            <a:off x="685800" y="5943600"/>
+            <a:ext cx="5166360" cy="457200"/>
+          </a:xfrm>
+          <a:prstGeom prst="rect">
+            <a:avLst/>
+          </a:prstGeom>
+          <a:noFill/>
+        </p:spPr>
+        <p:txBody>
+          <a:bodyPr wrap="square" anchor="t" lIns="50800" rIns="50800" tIns="25400" bIns="25400">
+            <a:spAutoFit/>
+          </a:bodyPr>
+          <a:lstStyle/>
+          <a:p>
+            <a:pPr algn="l">
+              <a:lnSpc>
+                <a:spcPct val="100000"/>
+              </a:lnSpc>
+            </a:pPr>
+            <a:r>
+              <a:rPr sz="1000" b="0" i="0">
+                <a:solidFill>
+                  <a:srgbClr val="142640"/>
+                </a:solidFill>
+                <a:latin typeface="Calibri"/>
+              </a:rPr>
+              <a:t>LLM-as-a-Judge · Self-Reflection — evaluarían o corregirían el razonamiento del propio agente; ReAct ya no está en esta lista: es el patrón primario implementado.</a:t>
+            </a:r>
+          </a:p>
+        </p:txBody>
+      </p:sp>
+      <p:sp>
+        <p:nvSpPr>
+          <p:cNvPr id="22" name="Rounded Rectangle 21"/>
+          <p:cNvSpPr/>
+          <p:nvPr/>
+        </p:nvSpPr>
+        <p:spPr>
+          <a:xfrm>
+            <a:off x="6172200" y="5623560"/>
+            <a:ext cx="5532120" cy="822960"/>
+          </a:xfrm>
+          <a:prstGeom prst="roundRect">
+            <a:avLst>
+              <a:gd name="adj" fmla="val 6000"/>
+            </a:avLst>
+          </a:prstGeom>
+          <a:solidFill>
+            <a:srgbClr val="1F3A5F"/>
+          </a:solidFill>
+          <a:ln>
+            <a:noFill/>
+          </a:ln>
+          <a:effectLst/>
+        </p:spPr>
+        <p:style>
+          <a:lnRef idx="1">
+            <a:schemeClr val="accent1"/>
+          </a:lnRef>
+          <a:fillRef idx="3">
+            <a:schemeClr val="accent1"/>
+          </a:fillRef>
+          <a:effectRef idx="2">
+            <a:schemeClr val="accent1"/>
+          </a:effectRef>
+          <a:fontRef idx="minor">
+            <a:schemeClr val="lt1"/>
+          </a:fontRef>
+        </p:style>
+        <p:txBody>
+          <a:bodyPr rtlCol="0" anchor="ctr"/>
+          <a:lstStyle/>
+          <a:p>
+            <a:pPr algn="ctr"/>
+          </a:p>
+        </p:txBody>
+      </p:sp>
+      <p:sp>
+        <p:nvSpPr>
+          <p:cNvPr id="23" name="TextBox 22"/>
+          <p:cNvSpPr txBox="1"/>
+          <p:nvPr/>
+        </p:nvSpPr>
+        <p:spPr>
+          <a:xfrm>
+            <a:off x="6355080" y="5687568"/>
+            <a:ext cx="5166360" cy="256032"/>
+          </a:xfrm>
+          <a:prstGeom prst="rect">
+            <a:avLst/>
+          </a:prstGeom>
+          <a:noFill/>
+        </p:spPr>
+        <p:txBody>
+          <a:bodyPr wrap="square" anchor="t" lIns="50800" rIns="50800" tIns="25400" bIns="25400">
+            <a:spAutoFit/>
+          </a:bodyPr>
+          <a:lstStyle/>
+          <a:p>
+            <a:pPr algn="l">
+              <a:lnSpc>
+                <a:spcPct val="100000"/>
+              </a:lnSpc>
+            </a:pPr>
+            <a:r>
+              <a:rPr sz="1050" b="1" i="0">
+                <a:solidFill>
+                  <a:srgbClr val="9FC1E0"/>
+                </a:solidFill>
+                <a:latin typeface="Calibri"/>
+              </a:rPr>
+              <a:t>REGLA DE ORO</a:t>
+            </a:r>
+          </a:p>
+        </p:txBody>
+      </p:sp>
+      <p:sp>
+        <p:nvSpPr>
+          <p:cNvPr id="24" name="TextBox 23"/>
+          <p:cNvSpPr txBox="1"/>
+          <p:nvPr/>
+        </p:nvSpPr>
+        <p:spPr>
+          <a:xfrm>
+            <a:off x="6355080" y="5943600"/>
+            <a:ext cx="5166360" cy="457200"/>
+          </a:xfrm>
+          <a:prstGeom prst="rect">
+            <a:avLst/>
+          </a:prstGeom>
+          <a:noFill/>
+        </p:spPr>
+        <p:txBody>
+          <a:bodyPr wrap="square" anchor="t" lIns="50800" rIns="50800" tIns="25400" bIns="25400">
+            <a:spAutoFit/>
+          </a:bodyPr>
+          <a:lstStyle/>
+          <a:p>
+            <a:pPr algn="l">
+              <a:lnSpc>
+                <a:spcPct val="100000"/>
+              </a:lnSpc>
+            </a:pPr>
+            <a:r>
+              <a:rPr sz="1000" b="0" i="0">
+                <a:solidFill>
+                  <a:srgbClr val="FFFFFF"/>
+                </a:solidFill>
+                <a:latin typeface="Calibri"/>
+              </a:rPr>
+              <a:t>El razonamiento interno del bucle ReAct nunca se expone ni se persiste — solo la respuesta final llega al usuario o al historial (CLAUDE.md §10).</a:t>
+            </a:r>
+          </a:p>
+        </p:txBody>
+      </p:sp>
+    </p:spTree>
+  </p:cSld>
+  <p:clrMapOvr>
+    <a:masterClrMapping/>
+  </p:clrMapOvr>
+</p:sld>
+</file>
+
+<file path=ppt/slides/slide6.xml><?xml version="1.0" encoding="utf-8"?>
 <p:sld xmlns:a="http://schemas.openxmlformats.org/drawingml/2006/main" xmlns:r="http://schemas.openxmlformats.org/officeDocument/2006/relationships" xmlns:p="http://schemas.openxmlformats.org/presentationml/2006/main">
   <p:cSld>
     <p:bg>
@@ -19956,7 +20022,7 @@
 </p:sld>
 </file>
 
-<file path=ppt/slides/slide6.xml><?xml version="1.0" encoding="utf-8"?>
+<file path=ppt/slides/slide7.xml><?xml version="1.0" encoding="utf-8"?>
 <p:sld xmlns:a="http://schemas.openxmlformats.org/drawingml/2006/main" xmlns:r="http://schemas.openxmlformats.org/officeDocument/2006/relationships" xmlns:p="http://schemas.openxmlformats.org/presentationml/2006/main">
   <p:cSld>
     <p:bg>
@@ -20808,7 +20874,7 @@
 </p:sld>
 </file>
 
-<file path=ppt/slides/slide7.xml><?xml version="1.0" encoding="utf-8"?>
+<file path=ppt/slides/slide8.xml><?xml version="1.0" encoding="utf-8"?>
 <p:sld xmlns:a="http://schemas.openxmlformats.org/drawingml/2006/main" xmlns:r="http://schemas.openxmlformats.org/officeDocument/2006/relationships" xmlns:p="http://schemas.openxmlformats.org/presentationml/2006/main">
   <p:cSld>
     <p:bg>
@@ -21720,7 +21786,7 @@
 </p:sld>
 </file>
 
-<file path=ppt/slides/slide8.xml><?xml version="1.0" encoding="utf-8"?>
+<file path=ppt/slides/slide9.xml><?xml version="1.0" encoding="utf-8"?>
 <p:sld xmlns:a="http://schemas.openxmlformats.org/drawingml/2006/main" xmlns:r="http://schemas.openxmlformats.org/officeDocument/2006/relationships" xmlns:p="http://schemas.openxmlformats.org/presentationml/2006/main" show="0">
   <p:cSld>
     <p:bg>
@@ -22317,1071 +22383,6 @@
                 <a:latin typeface="Calibri"/>
               </a:rPr>
               <a:t>▪  Documentación corporativa y normativa vigente, con control de acceso propio.</a:t>
-            </a:r>
-          </a:p>
-        </p:txBody>
-      </p:sp>
-    </p:spTree>
-  </p:cSld>
-  <p:clrMapOvr>
-    <a:masterClrMapping/>
-  </p:clrMapOvr>
-</p:sld>
-</file>
-
-<file path=ppt/slides/slide9.xml><?xml version="1.0" encoding="utf-8"?>
-<p:sld xmlns:a="http://schemas.openxmlformats.org/drawingml/2006/main" xmlns:r="http://schemas.openxmlformats.org/officeDocument/2006/relationships" xmlns:p="http://schemas.openxmlformats.org/presentationml/2006/main">
-  <p:cSld>
-    <p:bg>
-      <p:bgPr>
-        <a:solidFill>
-          <a:srgbClr val="FFFFFF"/>
-        </a:solidFill>
-        <a:effectLst/>
-      </p:bgPr>
-    </p:bg>
-    <p:spTree>
-      <p:nvGrpSpPr>
-        <p:cNvPr id="1" name=""/>
-        <p:cNvGrpSpPr/>
-        <p:nvPr/>
-      </p:nvGrpSpPr>
-      <p:grpSpPr>
-        <a:xfrm>
-          <a:off x="0" y="0"/>
-          <a:ext cx="0" cy="0"/>
-          <a:chOff x="0" y="0"/>
-          <a:chExt cx="0" cy="0"/>
-        </a:xfrm>
-      </p:grpSpPr>
-      <p:sp>
-        <p:nvSpPr>
-          <p:cNvPr id="2" name="Rounded Rectangle 1"/>
-          <p:cNvSpPr/>
-          <p:nvPr/>
-        </p:nvSpPr>
-        <p:spPr>
-          <a:xfrm>
-            <a:off x="0" y="0"/>
-            <a:ext cx="12191695" cy="960120"/>
-          </a:xfrm>
-          <a:prstGeom prst="roundRect">
-            <a:avLst>
-              <a:gd name="adj" fmla="val 6000"/>
-            </a:avLst>
-          </a:prstGeom>
-          <a:solidFill>
-            <a:srgbClr val="1F3A5F"/>
-          </a:solidFill>
-          <a:ln>
-            <a:noFill/>
-          </a:ln>
-          <a:effectLst/>
-        </p:spPr>
-        <p:style>
-          <a:lnRef idx="1">
-            <a:schemeClr val="accent1"/>
-          </a:lnRef>
-          <a:fillRef idx="3">
-            <a:schemeClr val="accent1"/>
-          </a:fillRef>
-          <a:effectRef idx="2">
-            <a:schemeClr val="accent1"/>
-          </a:effectRef>
-          <a:fontRef idx="minor">
-            <a:schemeClr val="lt1"/>
-          </a:fontRef>
-        </p:style>
-        <p:txBody>
-          <a:bodyPr rtlCol="0" anchor="ctr"/>
-          <a:lstStyle/>
-          <a:p>
-            <a:pPr algn="ctr"/>
-            <a:endParaRPr/>
-          </a:p>
-        </p:txBody>
-      </p:sp>
-      <p:sp>
-        <p:nvSpPr>
-          <p:cNvPr id="3" name="TextBox 2"/>
-          <p:cNvSpPr txBox="1"/>
-          <p:nvPr/>
-        </p:nvSpPr>
-        <p:spPr>
-          <a:xfrm>
-            <a:off x="502920" y="91440"/>
-            <a:ext cx="8686800" cy="274320"/>
-          </a:xfrm>
-          <a:prstGeom prst="rect">
-            <a:avLst/>
-          </a:prstGeom>
-          <a:noFill/>
-        </p:spPr>
-        <p:txBody>
-          <a:bodyPr wrap="square" lIns="50800" tIns="25400" rIns="50800" bIns="25400" anchor="t">
-            <a:spAutoFit/>
-          </a:bodyPr>
-          <a:lstStyle/>
-          <a:p>
-            <a:pPr algn="l">
-              <a:lnSpc>
-                <a:spcPct val="100000"/>
-              </a:lnSpc>
-            </a:pPr>
-            <a:r>
-              <a:rPr sz="1200" b="1" i="0">
-                <a:solidFill>
-                  <a:srgbClr val="B9CCE0"/>
-                </a:solidFill>
-                <a:latin typeface="Calibri"/>
-              </a:rPr>
-              <a:t>CÓMO SE CONSTRUYE, VALIDA Y DESPLIEGA</a:t>
-            </a:r>
-          </a:p>
-        </p:txBody>
-      </p:sp>
-      <p:sp>
-        <p:nvSpPr>
-          <p:cNvPr id="4" name="TextBox 3"/>
-          <p:cNvSpPr txBox="1"/>
-          <p:nvPr/>
-        </p:nvSpPr>
-        <p:spPr>
-          <a:xfrm>
-            <a:off x="502920" y="329184"/>
-            <a:ext cx="9875520" cy="548640"/>
-          </a:xfrm>
-          <a:prstGeom prst="rect">
-            <a:avLst/>
-          </a:prstGeom>
-          <a:noFill/>
-        </p:spPr>
-        <p:txBody>
-          <a:bodyPr wrap="square" lIns="50800" tIns="25400" rIns="50800" bIns="25400" anchor="t">
-            <a:spAutoFit/>
-          </a:bodyPr>
-          <a:lstStyle/>
-          <a:p>
-            <a:pPr algn="l">
-              <a:lnSpc>
-                <a:spcPct val="100000"/>
-              </a:lnSpc>
-            </a:pPr>
-            <a:r>
-              <a:rPr sz="2500" b="1" i="0">
-                <a:solidFill>
-                  <a:srgbClr val="FFFFFF"/>
-                </a:solidFill>
-                <a:latin typeface="Calibri"/>
-              </a:rPr>
-              <a:t>DevOps</a:t>
-            </a:r>
-          </a:p>
-        </p:txBody>
-      </p:sp>
-      <p:sp>
-        <p:nvSpPr>
-          <p:cNvPr id="5" name="TextBox 4"/>
-          <p:cNvSpPr txBox="1"/>
-          <p:nvPr/>
-        </p:nvSpPr>
-        <p:spPr>
-          <a:xfrm>
-            <a:off x="11155680" y="292608"/>
-            <a:ext cx="822960" cy="365760"/>
-          </a:xfrm>
-          <a:prstGeom prst="rect">
-            <a:avLst/>
-          </a:prstGeom>
-          <a:noFill/>
-        </p:spPr>
-        <p:txBody>
-          <a:bodyPr wrap="square" lIns="50800" tIns="25400" rIns="50800" bIns="25400" anchor="t">
-            <a:spAutoFit/>
-          </a:bodyPr>
-          <a:lstStyle/>
-          <a:p>
-            <a:pPr algn="r">
-              <a:lnSpc>
-                <a:spcPct val="100000"/>
-              </a:lnSpc>
-            </a:pPr>
-            <a:r>
-              <a:rPr sz="1300" b="1" i="0">
-                <a:solidFill>
-                  <a:srgbClr val="B9CCE0"/>
-                </a:solidFill>
-                <a:latin typeface="Calibri"/>
-              </a:rPr>
-              <a:t>10 / 14</a:t>
-            </a:r>
-          </a:p>
-        </p:txBody>
-      </p:sp>
-      <p:sp>
-        <p:nvSpPr>
-          <p:cNvPr id="6" name="TextBox 5"/>
-          <p:cNvSpPr txBox="1"/>
-          <p:nvPr/>
-        </p:nvSpPr>
-        <p:spPr>
-          <a:xfrm>
-            <a:off x="502920" y="1143000"/>
-            <a:ext cx="5669280" cy="274320"/>
-          </a:xfrm>
-          <a:prstGeom prst="rect">
-            <a:avLst/>
-          </a:prstGeom>
-          <a:noFill/>
-        </p:spPr>
-        <p:txBody>
-          <a:bodyPr wrap="square" lIns="50800" tIns="25400" rIns="50800" bIns="25400" anchor="t">
-            <a:spAutoFit/>
-          </a:bodyPr>
-          <a:lstStyle/>
-          <a:p>
-            <a:pPr algn="l">
-              <a:lnSpc>
-                <a:spcPct val="100000"/>
-              </a:lnSpc>
-            </a:pPr>
-            <a:r>
-              <a:rPr sz="1400" b="1" i="0">
-                <a:solidFill>
-                  <a:srgbClr val="0E7C86"/>
-                </a:solidFill>
-                <a:latin typeface="Calibri"/>
-              </a:rPr>
-              <a:t>Pipeline de integración y entrega continua</a:t>
-            </a:r>
-          </a:p>
-        </p:txBody>
-      </p:sp>
-      <p:sp>
-        <p:nvSpPr>
-          <p:cNvPr id="7" name="Rounded Rectangle 6"/>
-          <p:cNvSpPr/>
-          <p:nvPr/>
-        </p:nvSpPr>
-        <p:spPr>
-          <a:xfrm>
-            <a:off x="738479" y="1508760"/>
-            <a:ext cx="1508760" cy="548640"/>
-          </a:xfrm>
-          <a:prstGeom prst="roundRect">
-            <a:avLst>
-              <a:gd name="adj" fmla="val 6000"/>
-            </a:avLst>
-          </a:prstGeom>
-          <a:solidFill>
-            <a:srgbClr val="FFFFFF"/>
-          </a:solidFill>
-          <a:ln w="17780">
-            <a:solidFill>
-              <a:srgbClr val="0E7C86"/>
-            </a:solidFill>
-          </a:ln>
-          <a:effectLst/>
-        </p:spPr>
-        <p:style>
-          <a:lnRef idx="1">
-            <a:schemeClr val="accent1"/>
-          </a:lnRef>
-          <a:fillRef idx="3">
-            <a:schemeClr val="accent1"/>
-          </a:fillRef>
-          <a:effectRef idx="2">
-            <a:schemeClr val="accent1"/>
-          </a:effectRef>
-          <a:fontRef idx="minor">
-            <a:schemeClr val="lt1"/>
-          </a:fontRef>
-        </p:style>
-        <p:txBody>
-          <a:bodyPr wrap="square" lIns="38100" rIns="38100" rtlCol="0" anchor="ctr"/>
-          <a:lstStyle/>
-          <a:p>
-            <a:pPr algn="ctr"/>
-            <a:r>
-              <a:rPr sz="1000" b="1">
-                <a:solidFill>
-                  <a:srgbClr val="0E7C86"/>
-                </a:solidFill>
-                <a:latin typeface="Calibri"/>
-              </a:rPr>
-              <a:t>CI — Calidad</a:t>
-            </a:r>
-          </a:p>
-        </p:txBody>
-      </p:sp>
-      <p:sp>
-        <p:nvSpPr>
-          <p:cNvPr id="8" name="Rounded Rectangle 7"/>
-          <p:cNvSpPr/>
-          <p:nvPr/>
-        </p:nvSpPr>
-        <p:spPr>
-          <a:xfrm>
-            <a:off x="2475839" y="1508760"/>
-            <a:ext cx="1508760" cy="548640"/>
-          </a:xfrm>
-          <a:prstGeom prst="roundRect">
-            <a:avLst>
-              <a:gd name="adj" fmla="val 6000"/>
-            </a:avLst>
-          </a:prstGeom>
-          <a:solidFill>
-            <a:srgbClr val="FFFFFF"/>
-          </a:solidFill>
-          <a:ln w="17780">
-            <a:solidFill>
-              <a:srgbClr val="0E7C86"/>
-            </a:solidFill>
-          </a:ln>
-          <a:effectLst/>
-        </p:spPr>
-        <p:style>
-          <a:lnRef idx="1">
-            <a:schemeClr val="accent1"/>
-          </a:lnRef>
-          <a:fillRef idx="3">
-            <a:schemeClr val="accent1"/>
-          </a:fillRef>
-          <a:effectRef idx="2">
-            <a:schemeClr val="accent1"/>
-          </a:effectRef>
-          <a:fontRef idx="minor">
-            <a:schemeClr val="lt1"/>
-          </a:fontRef>
-        </p:style>
-        <p:txBody>
-          <a:bodyPr wrap="square" lIns="38100" rIns="38100" rtlCol="0" anchor="ctr"/>
-          <a:lstStyle/>
-          <a:p>
-            <a:pPr algn="ctr"/>
-            <a:r>
-              <a:rPr sz="1000" b="1" dirty="0">
-                <a:solidFill>
-                  <a:srgbClr val="0E7C86"/>
-                </a:solidFill>
-                <a:latin typeface="Calibri"/>
-              </a:rPr>
-              <a:t>Quality
-Gates</a:t>
-            </a:r>
-          </a:p>
-        </p:txBody>
-      </p:sp>
-      <p:cxnSp>
-        <p:nvCxnSpPr>
-          <p:cNvPr id="9" name="Connector 8"/>
-          <p:cNvCxnSpPr>
-            <a:cxnSpLocks/>
-            <a:stCxn id="7" idx="3"/>
-          </p:cNvCxnSpPr>
-          <p:nvPr/>
-        </p:nvCxnSpPr>
-        <p:spPr>
-          <a:xfrm>
-            <a:off x="2247239" y="1783080"/>
-            <a:ext cx="224028" cy="0"/>
-          </a:xfrm>
-          <a:prstGeom prst="line">
-            <a:avLst/>
-          </a:prstGeom>
-          <a:ln w="22225">
-            <a:solidFill>
-              <a:srgbClr val="0E7C86"/>
-            </a:solidFill>
-          </a:ln>
-        </p:spPr>
-        <p:style>
-          <a:lnRef idx="2">
-            <a:schemeClr val="accent1"/>
-          </a:lnRef>
-          <a:fillRef idx="0">
-            <a:schemeClr val="accent1"/>
-          </a:fillRef>
-          <a:effectRef idx="1">
-            <a:schemeClr val="accent1"/>
-          </a:effectRef>
-          <a:fontRef idx="minor">
-            <a:schemeClr val="tx1"/>
-          </a:fontRef>
-        </p:style>
-      </p:cxnSp>
-      <p:sp>
-        <p:nvSpPr>
-          <p:cNvPr id="10" name="Rounded Rectangle 9"/>
-          <p:cNvSpPr/>
-          <p:nvPr/>
-        </p:nvSpPr>
-        <p:spPr>
-          <a:xfrm>
-            <a:off x="4213199" y="1508760"/>
-            <a:ext cx="1508760" cy="548640"/>
-          </a:xfrm>
-          <a:prstGeom prst="roundRect">
-            <a:avLst>
-              <a:gd name="adj" fmla="val 6000"/>
-            </a:avLst>
-          </a:prstGeom>
-          <a:solidFill>
-            <a:srgbClr val="FFFFFF"/>
-          </a:solidFill>
-          <a:ln w="17780">
-            <a:solidFill>
-              <a:srgbClr val="0E7C86"/>
-            </a:solidFill>
-          </a:ln>
-          <a:effectLst/>
-        </p:spPr>
-        <p:style>
-          <a:lnRef idx="1">
-            <a:schemeClr val="accent1"/>
-          </a:lnRef>
-          <a:fillRef idx="3">
-            <a:schemeClr val="accent1"/>
-          </a:fillRef>
-          <a:effectRef idx="2">
-            <a:schemeClr val="accent1"/>
-          </a:effectRef>
-          <a:fontRef idx="minor">
-            <a:schemeClr val="lt1"/>
-          </a:fontRef>
-        </p:style>
-        <p:txBody>
-          <a:bodyPr wrap="square" lIns="38100" rIns="38100" rtlCol="0" anchor="ctr"/>
-          <a:lstStyle/>
-          <a:p>
-            <a:pPr algn="ctr"/>
-            <a:r>
-              <a:rPr sz="1000" b="1">
-                <a:solidFill>
-                  <a:srgbClr val="0E7C86"/>
-                </a:solidFill>
-                <a:latin typeface="Calibri"/>
-              </a:rPr>
-              <a:t>Docker
-Build</a:t>
-            </a:r>
-          </a:p>
-        </p:txBody>
-      </p:sp>
-      <p:cxnSp>
-        <p:nvCxnSpPr>
-          <p:cNvPr id="11" name="Connector 10"/>
-          <p:cNvCxnSpPr>
-            <a:cxnSpLocks/>
-            <a:stCxn id="8" idx="3"/>
-          </p:cNvCxnSpPr>
-          <p:nvPr/>
-        </p:nvCxnSpPr>
-        <p:spPr>
-          <a:xfrm>
-            <a:off x="3984599" y="1783080"/>
-            <a:ext cx="224028" cy="0"/>
-          </a:xfrm>
-          <a:prstGeom prst="line">
-            <a:avLst/>
-          </a:prstGeom>
-          <a:ln w="22225">
-            <a:solidFill>
-              <a:srgbClr val="0E7C86"/>
-            </a:solidFill>
-          </a:ln>
-        </p:spPr>
-        <p:style>
-          <a:lnRef idx="2">
-            <a:schemeClr val="accent1"/>
-          </a:lnRef>
-          <a:fillRef idx="0">
-            <a:schemeClr val="accent1"/>
-          </a:fillRef>
-          <a:effectRef idx="1">
-            <a:schemeClr val="accent1"/>
-          </a:effectRef>
-          <a:fontRef idx="minor">
-            <a:schemeClr val="tx1"/>
-          </a:fontRef>
-        </p:style>
-      </p:cxnSp>
-      <p:sp>
-        <p:nvSpPr>
-          <p:cNvPr id="12" name="Rounded Rectangle 11"/>
-          <p:cNvSpPr/>
-          <p:nvPr/>
-        </p:nvSpPr>
-        <p:spPr>
-          <a:xfrm>
-            <a:off x="5950559" y="1508760"/>
-            <a:ext cx="1508760" cy="548640"/>
-          </a:xfrm>
-          <a:prstGeom prst="roundRect">
-            <a:avLst>
-              <a:gd name="adj" fmla="val 6000"/>
-            </a:avLst>
-          </a:prstGeom>
-          <a:solidFill>
-            <a:srgbClr val="FFFFFF"/>
-          </a:solidFill>
-          <a:ln w="17780">
-            <a:solidFill>
-              <a:srgbClr val="0E7C86"/>
-            </a:solidFill>
-          </a:ln>
-          <a:effectLst/>
-        </p:spPr>
-        <p:style>
-          <a:lnRef idx="1">
-            <a:schemeClr val="accent1"/>
-          </a:lnRef>
-          <a:fillRef idx="3">
-            <a:schemeClr val="accent1"/>
-          </a:fillRef>
-          <a:effectRef idx="2">
-            <a:schemeClr val="accent1"/>
-          </a:effectRef>
-          <a:fontRef idx="minor">
-            <a:schemeClr val="lt1"/>
-          </a:fontRef>
-        </p:style>
-        <p:txBody>
-          <a:bodyPr wrap="square" lIns="38100" rIns="38100" rtlCol="0" anchor="ctr"/>
-          <a:lstStyle/>
-          <a:p>
-            <a:pPr algn="ctr"/>
-            <a:r>
-              <a:rPr sz="1000" b="1">
-                <a:solidFill>
-                  <a:srgbClr val="0E7C86"/>
-                </a:solidFill>
-                <a:latin typeface="Calibri"/>
-              </a:rPr>
-              <a:t>IaC
-(Bicep)</a:t>
-            </a:r>
-          </a:p>
-        </p:txBody>
-      </p:sp>
-      <p:cxnSp>
-        <p:nvCxnSpPr>
-          <p:cNvPr id="13" name="Connector 12"/>
-          <p:cNvCxnSpPr>
-            <a:cxnSpLocks/>
-            <a:stCxn id="10" idx="3"/>
-          </p:cNvCxnSpPr>
-          <p:nvPr/>
-        </p:nvCxnSpPr>
-        <p:spPr>
-          <a:xfrm>
-            <a:off x="5721959" y="1783080"/>
-            <a:ext cx="224028" cy="0"/>
-          </a:xfrm>
-          <a:prstGeom prst="line">
-            <a:avLst/>
-          </a:prstGeom>
-          <a:ln w="22225">
-            <a:solidFill>
-              <a:srgbClr val="0E7C86"/>
-            </a:solidFill>
-          </a:ln>
-        </p:spPr>
-        <p:style>
-          <a:lnRef idx="2">
-            <a:schemeClr val="accent1"/>
-          </a:lnRef>
-          <a:fillRef idx="0">
-            <a:schemeClr val="accent1"/>
-          </a:fillRef>
-          <a:effectRef idx="1">
-            <a:schemeClr val="accent1"/>
-          </a:effectRef>
-          <a:fontRef idx="minor">
-            <a:schemeClr val="tx1"/>
-          </a:fontRef>
-        </p:style>
-      </p:cxnSp>
-      <p:sp>
-        <p:nvSpPr>
-          <p:cNvPr id="14" name="Rounded Rectangle 13"/>
-          <p:cNvSpPr/>
-          <p:nvPr/>
-        </p:nvSpPr>
-        <p:spPr>
-          <a:xfrm>
-            <a:off x="7687919" y="1508760"/>
-            <a:ext cx="1508760" cy="548640"/>
-          </a:xfrm>
-          <a:prstGeom prst="roundRect">
-            <a:avLst>
-              <a:gd name="adj" fmla="val 6000"/>
-            </a:avLst>
-          </a:prstGeom>
-          <a:solidFill>
-            <a:srgbClr val="FFFFFF"/>
-          </a:solidFill>
-          <a:ln w="17780">
-            <a:solidFill>
-              <a:srgbClr val="0E7C86"/>
-            </a:solidFill>
-          </a:ln>
-          <a:effectLst/>
-        </p:spPr>
-        <p:style>
-          <a:lnRef idx="1">
-            <a:schemeClr val="accent1"/>
-          </a:lnRef>
-          <a:fillRef idx="3">
-            <a:schemeClr val="accent1"/>
-          </a:fillRef>
-          <a:effectRef idx="2">
-            <a:schemeClr val="accent1"/>
-          </a:effectRef>
-          <a:fontRef idx="minor">
-            <a:schemeClr val="lt1"/>
-          </a:fontRef>
-        </p:style>
-        <p:txBody>
-          <a:bodyPr wrap="square" lIns="38100" rIns="38100" rtlCol="0" anchor="ctr"/>
-          <a:lstStyle/>
-          <a:p>
-            <a:pPr algn="ctr"/>
-            <a:r>
-              <a:rPr sz="1000" b="1">
-                <a:solidFill>
-                  <a:srgbClr val="0E7C86"/>
-                </a:solidFill>
-                <a:latin typeface="Calibri"/>
-              </a:rPr>
-              <a:t>Despliegue
-DEV</a:t>
-            </a:r>
-          </a:p>
-        </p:txBody>
-      </p:sp>
-      <p:cxnSp>
-        <p:nvCxnSpPr>
-          <p:cNvPr id="15" name="Connector 14"/>
-          <p:cNvCxnSpPr>
-            <a:cxnSpLocks/>
-            <a:stCxn id="12" idx="3"/>
-          </p:cNvCxnSpPr>
-          <p:nvPr/>
-        </p:nvCxnSpPr>
-        <p:spPr>
-          <a:xfrm>
-            <a:off x="7459319" y="1783080"/>
-            <a:ext cx="224028" cy="0"/>
-          </a:xfrm>
-          <a:prstGeom prst="line">
-            <a:avLst/>
-          </a:prstGeom>
-          <a:ln w="22225">
-            <a:solidFill>
-              <a:srgbClr val="0E7C86"/>
-            </a:solidFill>
-          </a:ln>
-        </p:spPr>
-        <p:style>
-          <a:lnRef idx="2">
-            <a:schemeClr val="accent1"/>
-          </a:lnRef>
-          <a:fillRef idx="0">
-            <a:schemeClr val="accent1"/>
-          </a:fillRef>
-          <a:effectRef idx="1">
-            <a:schemeClr val="accent1"/>
-          </a:effectRef>
-          <a:fontRef idx="minor">
-            <a:schemeClr val="tx1"/>
-          </a:fontRef>
-        </p:style>
-      </p:cxnSp>
-      <p:sp>
-        <p:nvSpPr>
-          <p:cNvPr id="16" name="Rounded Rectangle 15"/>
-          <p:cNvSpPr/>
-          <p:nvPr/>
-        </p:nvSpPr>
-        <p:spPr>
-          <a:xfrm>
-            <a:off x="9425279" y="1508760"/>
-            <a:ext cx="1508760" cy="548640"/>
-          </a:xfrm>
-          <a:prstGeom prst="roundRect">
-            <a:avLst>
-              <a:gd name="adj" fmla="val 6000"/>
-            </a:avLst>
-          </a:prstGeom>
-          <a:solidFill>
-            <a:srgbClr val="FFFFFF"/>
-          </a:solidFill>
-          <a:ln w="17780">
-            <a:solidFill>
-              <a:srgbClr val="0E7C86"/>
-            </a:solidFill>
-          </a:ln>
-          <a:effectLst/>
-        </p:spPr>
-        <p:style>
-          <a:lnRef idx="1">
-            <a:schemeClr val="accent1"/>
-          </a:lnRef>
-          <a:fillRef idx="3">
-            <a:schemeClr val="accent1"/>
-          </a:fillRef>
-          <a:effectRef idx="2">
-            <a:schemeClr val="accent1"/>
-          </a:effectRef>
-          <a:fontRef idx="minor">
-            <a:schemeClr val="lt1"/>
-          </a:fontRef>
-        </p:style>
-        <p:txBody>
-          <a:bodyPr wrap="square" lIns="38100" rIns="38100" rtlCol="0" anchor="ctr"/>
-          <a:lstStyle/>
-          <a:p>
-            <a:pPr algn="ctr"/>
-            <a:r>
-              <a:rPr sz="1000" b="1">
-                <a:solidFill>
-                  <a:srgbClr val="0E7C86"/>
-                </a:solidFill>
-                <a:latin typeface="Calibri"/>
-              </a:rPr>
-              <a:t>Smoke
-Tests</a:t>
-            </a:r>
-          </a:p>
-        </p:txBody>
-      </p:sp>
-      <p:cxnSp>
-        <p:nvCxnSpPr>
-          <p:cNvPr id="17" name="Connector 16"/>
-          <p:cNvCxnSpPr>
-            <a:cxnSpLocks/>
-            <a:stCxn id="14" idx="3"/>
-          </p:cNvCxnSpPr>
-          <p:nvPr/>
-        </p:nvCxnSpPr>
-        <p:spPr>
-          <a:xfrm>
-            <a:off x="9196679" y="1783080"/>
-            <a:ext cx="224028" cy="0"/>
-          </a:xfrm>
-          <a:prstGeom prst="line">
-            <a:avLst/>
-          </a:prstGeom>
-          <a:ln w="22225">
-            <a:solidFill>
-              <a:srgbClr val="0E7C86"/>
-            </a:solidFill>
-          </a:ln>
-        </p:spPr>
-        <p:style>
-          <a:lnRef idx="2">
-            <a:schemeClr val="accent1"/>
-          </a:lnRef>
-          <a:fillRef idx="0">
-            <a:schemeClr val="accent1"/>
-          </a:fillRef>
-          <a:effectRef idx="1">
-            <a:schemeClr val="accent1"/>
-          </a:effectRef>
-          <a:fontRef idx="minor">
-            <a:schemeClr val="tx1"/>
-          </a:fontRef>
-        </p:style>
-      </p:cxnSp>
-      <p:sp>
-        <p:nvSpPr>
-          <p:cNvPr id="18" name="TextBox 17"/>
-          <p:cNvSpPr txBox="1"/>
-          <p:nvPr/>
-        </p:nvSpPr>
-        <p:spPr>
-          <a:xfrm>
-            <a:off x="502920" y="2286000"/>
-            <a:ext cx="11155680" cy="914400"/>
-          </a:xfrm>
-          <a:prstGeom prst="rect">
-            <a:avLst/>
-          </a:prstGeom>
-          <a:noFill/>
-        </p:spPr>
-        <p:txBody>
-          <a:bodyPr wrap="square">
-            <a:spAutoFit/>
-          </a:bodyPr>
-          <a:lstStyle/>
-          <a:p>
-            <a:pPr>
-              <a:spcAft>
-                <a:spcPts val="800"/>
-              </a:spcAft>
-            </a:pPr>
-            <a:r>
-              <a:rPr sz="1250">
-                <a:solidFill>
-                  <a:srgbClr val="142640"/>
-                </a:solidFill>
-                <a:latin typeface="Calibri"/>
-              </a:rPr>
-              <a:t>▪  Cada etapa bloquea a la siguiente — nada avanza a producción si la calidad o la seguridad fallan.</a:t>
-            </a:r>
-          </a:p>
-          <a:p>
-            <a:pPr>
-              <a:spcAft>
-                <a:spcPts val="800"/>
-              </a:spcAft>
-            </a:pPr>
-            <a:r>
-              <a:rPr sz="1250">
-                <a:solidFill>
-                  <a:srgbClr val="142640"/>
-                </a:solidFill>
-                <a:latin typeface="Calibri"/>
-              </a:rPr>
-              <a:t>▪  El despliegue ocurre solo desde la rama principal; cada imagen queda trazable a un commit.</a:t>
-            </a:r>
-          </a:p>
-        </p:txBody>
-      </p:sp>
-      <p:sp>
-        <p:nvSpPr>
-          <p:cNvPr id="19" name="Rounded Rectangle 18"/>
-          <p:cNvSpPr/>
-          <p:nvPr/>
-        </p:nvSpPr>
-        <p:spPr>
-          <a:xfrm>
-            <a:off x="502920" y="3383280"/>
-            <a:ext cx="11201400" cy="2468880"/>
-          </a:xfrm>
-          <a:prstGeom prst="roundRect">
-            <a:avLst>
-              <a:gd name="adj" fmla="val 6000"/>
-            </a:avLst>
-          </a:prstGeom>
-          <a:solidFill>
-            <a:srgbClr val="F2F2F2"/>
-          </a:solidFill>
-          <a:ln w="15875">
-            <a:solidFill>
-              <a:srgbClr val="B87A00"/>
-            </a:solidFill>
-          </a:ln>
-          <a:effectLst/>
-        </p:spPr>
-        <p:style>
-          <a:lnRef idx="1">
-            <a:schemeClr val="accent1"/>
-          </a:lnRef>
-          <a:fillRef idx="3">
-            <a:schemeClr val="accent1"/>
-          </a:fillRef>
-          <a:effectRef idx="2">
-            <a:schemeClr val="accent1"/>
-          </a:effectRef>
-          <a:fontRef idx="minor">
-            <a:schemeClr val="lt1"/>
-          </a:fontRef>
-        </p:style>
-        <p:txBody>
-          <a:bodyPr rtlCol="0" anchor="ctr"/>
-          <a:lstStyle/>
-          <a:p>
-            <a:pPr algn="ctr"/>
-            <a:endParaRPr/>
-          </a:p>
-        </p:txBody>
-      </p:sp>
-      <p:sp>
-        <p:nvSpPr>
-          <p:cNvPr id="20" name="TextBox 19"/>
-          <p:cNvSpPr txBox="1"/>
-          <p:nvPr/>
-        </p:nvSpPr>
-        <p:spPr>
-          <a:xfrm>
-            <a:off x="731520" y="3547872"/>
-            <a:ext cx="10607040" cy="259045"/>
-          </a:xfrm>
-          <a:prstGeom prst="rect">
-            <a:avLst/>
-          </a:prstGeom>
-          <a:noFill/>
-        </p:spPr>
-        <p:txBody>
-          <a:bodyPr wrap="square" lIns="50800" tIns="25400" rIns="50800" bIns="25400" anchor="t">
-            <a:spAutoFit/>
-          </a:bodyPr>
-          <a:lstStyle/>
-          <a:p>
-            <a:pPr algn="l">
-              <a:lnSpc>
-                <a:spcPct val="100000"/>
-              </a:lnSpc>
-            </a:pPr>
-            <a:r>
-              <a:rPr sz="1350" b="1" i="0" dirty="0">
-                <a:solidFill>
-                  <a:srgbClr val="B87A00"/>
-                </a:solidFill>
-                <a:latin typeface="Calibri"/>
-              </a:rPr>
-              <a:t>¿Por </a:t>
-            </a:r>
-            <a:r>
-              <a:rPr sz="1350" b="1" i="0" dirty="0" err="1">
-                <a:solidFill>
-                  <a:srgbClr val="B87A00"/>
-                </a:solidFill>
-                <a:latin typeface="Calibri"/>
-              </a:rPr>
-              <a:t>qué</a:t>
-            </a:r>
-            <a:r>
-              <a:rPr sz="1350" b="1" i="0" dirty="0">
-                <a:solidFill>
-                  <a:srgbClr val="B87A00"/>
-                </a:solidFill>
-                <a:latin typeface="Calibri"/>
-              </a:rPr>
-              <a:t> Azure Functions no </a:t>
-            </a:r>
-            <a:r>
-              <a:rPr sz="1350" b="1" i="0" dirty="0" err="1">
-                <a:solidFill>
-                  <a:srgbClr val="B87A00"/>
-                </a:solidFill>
-                <a:latin typeface="Calibri"/>
-              </a:rPr>
-              <a:t>está</a:t>
-            </a:r>
-            <a:r>
-              <a:rPr sz="1350" b="1" i="0" dirty="0">
-                <a:solidFill>
-                  <a:srgbClr val="B87A00"/>
-                </a:solidFill>
-                <a:latin typeface="Calibri"/>
-              </a:rPr>
-              <a:t> </a:t>
-            </a:r>
-            <a:r>
-              <a:rPr sz="1350" b="1" i="0" dirty="0" err="1">
-                <a:solidFill>
-                  <a:srgbClr val="B87A00"/>
-                </a:solidFill>
-                <a:latin typeface="Calibri"/>
-              </a:rPr>
-              <a:t>desplegado</a:t>
-            </a:r>
-            <a:r>
-              <a:rPr sz="1350" b="1" i="0" dirty="0">
-                <a:solidFill>
-                  <a:srgbClr val="B87A00"/>
-                </a:solidFill>
-                <a:latin typeface="Calibri"/>
-              </a:rPr>
-              <a:t>? — </a:t>
-            </a:r>
-            <a:r>
-              <a:rPr lang="es-MX" sz="1350" b="1" dirty="0">
-                <a:solidFill>
-                  <a:srgbClr val="B87A00"/>
-                </a:solidFill>
-                <a:latin typeface="Calibri"/>
-              </a:rPr>
-              <a:t>E</a:t>
-            </a:r>
-            <a:r>
-              <a:rPr sz="1350" b="1" i="0" dirty="0" err="1">
-                <a:solidFill>
-                  <a:srgbClr val="B87A00"/>
-                </a:solidFill>
-                <a:latin typeface="Calibri"/>
-              </a:rPr>
-              <a:t>xplicación</a:t>
-            </a:r>
-            <a:endParaRPr sz="1350" b="1" i="0" dirty="0">
-              <a:solidFill>
-                <a:srgbClr val="B87A00"/>
-              </a:solidFill>
-              <a:latin typeface="Calibri"/>
-            </a:endParaRPr>
-          </a:p>
-        </p:txBody>
-      </p:sp>
-      <p:sp>
-        <p:nvSpPr>
-          <p:cNvPr id="21" name="TextBox 20"/>
-          <p:cNvSpPr txBox="1"/>
-          <p:nvPr/>
-        </p:nvSpPr>
-        <p:spPr>
-          <a:xfrm>
-            <a:off x="731520" y="3931920"/>
-            <a:ext cx="10607040" cy="1828800"/>
-          </a:xfrm>
-          <a:prstGeom prst="rect">
-            <a:avLst/>
-          </a:prstGeom>
-          <a:noFill/>
-        </p:spPr>
-        <p:txBody>
-          <a:bodyPr wrap="square">
-            <a:spAutoFit/>
-          </a:bodyPr>
-          <a:lstStyle/>
-          <a:p>
-            <a:pPr>
-              <a:spcAft>
-                <a:spcPts val="1000"/>
-              </a:spcAft>
-            </a:pPr>
-            <a:r>
-              <a:rPr sz="1250">
-                <a:solidFill>
-                  <a:srgbClr val="B87A00"/>
-                </a:solidFill>
-                <a:latin typeface="Calibri"/>
-              </a:rPr>
-              <a:t>▪  La suscripción de Azure usada en DEV tiene cuota cero para Microsoft.Web / App Service — confirmado con múltiples intentos reales de despliegue, en distintos SKU, todos rechazados por la misma razón de cuota.</a:t>
-            </a:r>
-          </a:p>
-          <a:p>
-            <a:pPr>
-              <a:spcAft>
-                <a:spcPts val="1000"/>
-              </a:spcAft>
-            </a:pPr>
-            <a:r>
-              <a:rPr sz="1250">
-                <a:solidFill>
-                  <a:srgbClr val="B87A00"/>
-                </a:solidFill>
-                <a:latin typeface="Calibri"/>
-              </a:rPr>
-              <a:t>▪  Es una restricción externa de la suscripción, no una limitación de diseño ni un defecto de arquitectura — el código, las pruebas y la infraestructura de Azure Functions ya existen.</a:t>
-            </a:r>
-          </a:p>
-          <a:p>
-            <a:pPr>
-              <a:spcAft>
-                <a:spcPts val="1000"/>
-              </a:spcAft>
-            </a:pPr>
-            <a:r>
-              <a:rPr sz="1250">
-                <a:solidFill>
-                  <a:srgbClr val="B87A00"/>
-                </a:solidFill>
-                <a:latin typeface="Calibri"/>
-              </a:rPr>
-              <a:t>▪  Por eso el runtime actual es "Tool Provider en proceso": exactamente la misma arquitectura de herramientas, ejecutando en un runtime distinto al objetivo. Cambiar de runtime es un cambio de configuración, no una reescritura de código.</a:t>
             </a:r>
           </a:p>
         </p:txBody>

--- a/docs/Presentation/Final_Project_Presentation.pptx
+++ b/docs/Presentation/Final_Project_Presentation.pptx
@@ -867,126 +867,90 @@
           <a:lstStyle/>
           <a:p>
             <a:r>
-              <a:t>Esta diapositiva cambió de fondo desde la versión anterior de esta defensa, y quiero</a:t>
-            </a:r>
-          </a:p>
-          <a:p>
-            <a:r>
-              <a:t>explicar exactamente qué cambió y por qué.</a:t>
+              <a:t>El patrón primario que exige el curso —ReAct más Tool Calling— está implementado, y</a:t>
+            </a:r>
+          </a:p>
+          <a:p>
+            <a:r>
+              <a:t>quiero ser explícito en esta diapositiva sobre qué significa eso exactamente: no en un solo</a:t>
+            </a:r>
+          </a:p>
+          <a:p>
+            <a:r>
+              <a:t>agente, no parcialmente — en los tres agentes especialistas: Claims, Broker Services y Commercial</a:t>
+            </a:r>
+          </a:p>
+          <a:p>
+            <a:r>
+              <a:t>Intake, todos comparten la misma instancia de ToolCallingOrchestrator.</a:t>
             </a:r>
           </a:p>
           <a:p/>
           <a:p>
             <a:r>
-              <a:t>Anteriormente presentaba ReAct como una evolución futura. Un análisis dedicado de brechas contra</a:t>
-            </a:r>
-          </a:p>
-          <a:p>
-            <a:r>
-              <a:t>el requisito del curso —ReAct más Tool Calling como patrón primario— encontró que el mecanismo ya</a:t>
-            </a:r>
-          </a:p>
-          <a:p>
-            <a:r>
-              <a:t>existía: ToolCallingOrchestrator ya implementaba un bucle acotado de Razonar, Actuar, Observar,</a:t>
-            </a:r>
-          </a:p>
-          <a:p>
-            <a:r>
-              <a:t>Razonar de nuevo, con quince pruebas que ya lo confirmaban. Lo que faltaba no era construir algo</a:t>
-            </a:r>
-          </a:p>
-          <a:p>
-            <a:r>
-              <a:t>nuevo: faltaba generalizarlo —estaba conectado solo al agente de Siniestros— y nombrarlo</a:t>
-            </a:r>
-          </a:p>
-          <a:p>
-            <a:r>
-              <a:t>explícitamente como lo que es.</a:t>
+              <a:t>El diagrama de la derecha muestra el ciclo real: el modelo razona sobre qué necesita, decide si</a:t>
+            </a:r>
+          </a:p>
+          <a:p>
+            <a:r>
+              <a:t>hace falta una herramienta, la invoca, observa el resultado, y razona de nuevo con esa</a:t>
+            </a:r>
+          </a:p>
+          <a:p>
+            <a:r>
+              <a:t>información —repitiendo el ciclo solo cuando es necesario— antes de producir su respuesta final.</a:t>
+            </a:r>
+          </a:p>
+          <a:p>
+            <a:r>
+              <a:t>Ese bucle está acotado por tres mecanismos, no solo uno: un número máximo de iteraciones,</a:t>
+            </a:r>
+          </a:p>
+          <a:p>
+            <a:r>
+              <a:t>detección de llamadas duplicadas a la misma herramienta, y un tiempo límite por llamada.</a:t>
             </a:r>
           </a:p>
           <a:p/>
           <a:p>
             <a:r>
-              <a:t>Por eso hoy ReAct más Tool Calling es el patrón primario, implementado en los tres agentes</a:t>
-            </a:r>
-          </a:p>
-          <a:p>
-            <a:r>
-              <a:t>especialistas: Claims, Broker Services y Commercial Intake. Cada uno razona internamente antes de</a:t>
-            </a:r>
-          </a:p>
-          <a:p>
-            <a:r>
-              <a:t>responder, decide si necesita una herramienta, la invoca, observa el resultado, y repite ese ciclo</a:t>
-            </a:r>
-          </a:p>
-          <a:p>
-            <a:r>
-              <a:t>solo lo necesario antes de dar su respuesta final. El Supervisor, en cambio, permanece</a:t>
-            </a:r>
-          </a:p>
-          <a:p>
-            <a:r>
-              <a:t>completamente fuera de ese bucle: sigue enrutando de forma determinista, por palabras clave, sin</a:t>
-            </a:r>
-          </a:p>
-          <a:p>
-            <a:r>
-              <a:t>ningún modelo de lenguaje involucrado — esa separación es intencional y está documentada en el</a:t>
-            </a:r>
-          </a:p>
-          <a:p>
-            <a:r>
-              <a:t>ADR-0011: el enrutamiento es una decisión de gobierno que debe ser reproducible; el razonamiento</a:t>
-            </a:r>
-          </a:p>
-          <a:p>
-            <a:r>
-              <a:t>sobre qué herramienta usar es responsabilidad de cada agente especialista.</a:t>
+              <a:t>Los patrones complementarios —Multi-Agent, Planner-Executor, Memory, Guardrails— siguen</a:t>
+            </a:r>
+          </a:p>
+          <a:p>
+            <a:r>
+              <a:t>implementados sin cambios; ReAct los complementa. Sobre RAG quiero ser honesto: la arquitectura de</a:t>
+            </a:r>
+          </a:p>
+          <a:p>
+            <a:r>
+              <a:t>Azure AI Search está disponible y lista, pero el uso actual sigue siendo con datos sintéticos —no</a:t>
+            </a:r>
+          </a:p>
+          <a:p>
+            <a:r>
+              <a:t>quiero exagerar ese punto. Y la lista de evolución futura ya no incluye ReAct: lo que queda</a:t>
+            </a:r>
+          </a:p>
+          <a:p>
+            <a:r>
+              <a:t>genúlmente sin construir es LLM-as-a-Judge y Self-Reflection.</a:t>
             </a:r>
           </a:p>
           <a:p/>
           <a:p>
             <a:r>
-              <a:t>Los patrones complementarios que ya estaban implementados —Multi-Agent, Planner-Executor, Memory,</a:t>
-            </a:r>
-          </a:p>
-          <a:p>
-            <a:r>
-              <a:t>Guardrails— siguen ahí, sin cambios; ReAct los complementa, no los reemplaza. Lo que sí cambió es</a:t>
-            </a:r>
-          </a:p>
-          <a:p>
-            <a:r>
-              <a:t>la lista de evolución futura: ya no incluye ReAct, porque dejó de ser futuro. Lo que queda son dos</a:t>
-            </a:r>
-          </a:p>
-          <a:p>
-            <a:r>
-              <a:t>patrones genuinamente no implementados — LLM-as-a-Judge y Self-Reflection — que evaluarían o</a:t>
-            </a:r>
-          </a:p>
-          <a:p>
-            <a:r>
-              <a:t>corregirían el propio razonamiento del agente, algo que este sistema no hace hoy.</a:t>
-            </a:r>
-          </a:p>
-          <a:p/>
-          <a:p>
-            <a:r>
-              <a:t>Y quiero cerrar con la regla que no cambió en absoluto: el razonamiento interno de ese bucle nunca</a:t>
-            </a:r>
-          </a:p>
-          <a:p>
-            <a:r>
-              <a:t>se expone al usuario ni se guarda en el historial de conversación — solo la respuesta final. Eso</a:t>
-            </a:r>
-          </a:p>
-          <a:p>
-            <a:r>
-              <a:t>está comprobado con pruebas dedicadas, no solo diseñado.</a:t>
+              <a:t>Cierro con la regla que gobierna todo esto: el razonamiento interno de ese bucle —cada Reason,</a:t>
+            </a:r>
+          </a:p>
+          <a:p>
+            <a:r>
+              <a:t>cada Observation— nunca se expone al usuario ni se guarda en el historial. Solo la respuesta</a:t>
+            </a:r>
+          </a:p>
+          <a:p>
+            <a:r>
+              <a:t>final. Eso está comprobado con pruebas dedicadas, no solo diseñado.</a:t>
             </a:r>
           </a:p>
         </p:txBody>
@@ -1334,1507 +1298,79 @@
           <a:lstStyle/>
           <a:p>
             <a:r>
-              <a:rPr dirty="0"/>
-              <a:t>Esta es la </a:t>
-            </a:r>
-            <a:r>
-              <a:rPr dirty="0" err="1"/>
-              <a:t>diapositiva</a:t>
-            </a:r>
-            <a:r>
-              <a:rPr dirty="0"/>
-              <a:t> central de </a:t>
-            </a:r>
-            <a:r>
-              <a:rPr dirty="0" err="1"/>
-              <a:t>toda</a:t>
-            </a:r>
-            <a:r>
-              <a:rPr dirty="0"/>
-              <a:t> la defensa, </a:t>
-            </a:r>
-            <a:r>
-              <a:rPr dirty="0" err="1"/>
-              <a:t>así</a:t>
-            </a:r>
-            <a:r>
-              <a:rPr dirty="0"/>
-              <a:t> </a:t>
-            </a:r>
-            <a:r>
-              <a:rPr dirty="0" err="1"/>
-              <a:t>que</a:t>
-            </a:r>
-            <a:r>
-              <a:rPr dirty="0"/>
-              <a:t> </a:t>
-            </a:r>
-            <a:r>
-              <a:rPr dirty="0" err="1"/>
-              <a:t>voy</a:t>
-            </a:r>
-            <a:r>
-              <a:rPr dirty="0"/>
-              <a:t> a </a:t>
-            </a:r>
-            <a:r>
-              <a:rPr dirty="0" err="1"/>
-              <a:t>recorrerla</a:t>
-            </a:r>
-            <a:r>
-              <a:rPr dirty="0"/>
-              <a:t> de </a:t>
-            </a:r>
-            <a:r>
-              <a:rPr dirty="0" err="1"/>
-              <a:t>arriba</a:t>
-            </a:r>
-            <a:r>
-              <a:rPr dirty="0"/>
-              <a:t> </a:t>
-            </a:r>
-            <a:r>
-              <a:rPr dirty="0" err="1"/>
-              <a:t>hacia</a:t>
-            </a:r>
-            <a:r>
-              <a:rPr dirty="0"/>
-              <a:t> </a:t>
-            </a:r>
-            <a:r>
-              <a:rPr dirty="0" err="1"/>
-              <a:t>abajo</a:t>
-            </a:r>
-            <a:endParaRPr dirty="0"/>
-          </a:p>
-          <a:p>
-            <a:r>
-              <a:rPr dirty="0" err="1"/>
-              <a:t>explicando</a:t>
-            </a:r>
-            <a:r>
-              <a:rPr dirty="0"/>
-              <a:t> el </a:t>
-            </a:r>
-            <a:r>
-              <a:rPr dirty="0" err="1"/>
-              <a:t>porqué</a:t>
-            </a:r>
-            <a:r>
-              <a:rPr dirty="0"/>
-              <a:t> de </a:t>
-            </a:r>
-            <a:r>
-              <a:rPr dirty="0" err="1"/>
-              <a:t>cada</a:t>
-            </a:r>
-            <a:r>
-              <a:rPr dirty="0"/>
-              <a:t> </a:t>
-            </a:r>
-            <a:r>
-              <a:rPr dirty="0" err="1"/>
-              <a:t>capa</a:t>
-            </a:r>
-            <a:r>
-              <a:rPr dirty="0"/>
-              <a:t>, no solo </a:t>
-            </a:r>
-            <a:r>
-              <a:rPr dirty="0" err="1"/>
-              <a:t>qué</a:t>
-            </a:r>
-            <a:r>
-              <a:rPr dirty="0"/>
-              <a:t> </a:t>
-            </a:r>
-            <a:r>
-              <a:rPr dirty="0" err="1"/>
-              <a:t>hace</a:t>
-            </a:r>
-            <a:r>
-              <a:rPr dirty="0"/>
-              <a:t>.</a:t>
-            </a:r>
-          </a:p>
-          <a:p>
-            <a:r>
-              <a:rPr dirty="0"/>
-              <a:t>El </a:t>
-            </a:r>
-            <a:r>
-              <a:rPr dirty="0" err="1"/>
-              <a:t>flujo</a:t>
-            </a:r>
-            <a:r>
-              <a:rPr dirty="0"/>
-              <a:t> </a:t>
-            </a:r>
-            <a:r>
-              <a:rPr dirty="0" err="1"/>
-              <a:t>empieza</a:t>
-            </a:r>
-            <a:r>
-              <a:rPr dirty="0"/>
-              <a:t> con el </a:t>
-            </a:r>
-            <a:r>
-              <a:rPr dirty="0" err="1"/>
-              <a:t>usuario</a:t>
-            </a:r>
-            <a:r>
-              <a:rPr dirty="0"/>
-              <a:t> </a:t>
-            </a:r>
-            <a:r>
-              <a:rPr dirty="0" err="1"/>
-              <a:t>autenticándose</a:t>
-            </a:r>
-            <a:r>
-              <a:rPr dirty="0"/>
-              <a:t> contra Microsoft Entra ID </a:t>
-            </a:r>
-            <a:r>
-              <a:rPr dirty="0" err="1"/>
-              <a:t>mediante</a:t>
-            </a:r>
-            <a:r>
-              <a:rPr dirty="0"/>
-              <a:t> OAuth2</a:t>
-            </a:r>
-          </a:p>
-          <a:p>
-            <a:r>
-              <a:rPr dirty="0"/>
-              <a:t>Authorization Code con PKCE — el </a:t>
-            </a:r>
-            <a:r>
-              <a:rPr dirty="0" err="1"/>
-              <a:t>flujo</a:t>
-            </a:r>
-            <a:r>
-              <a:rPr dirty="0"/>
-              <a:t> </a:t>
-            </a:r>
-            <a:r>
-              <a:rPr dirty="0" err="1"/>
-              <a:t>recomendado</a:t>
-            </a:r>
-            <a:r>
-              <a:rPr dirty="0"/>
-              <a:t> para </a:t>
-            </a:r>
-            <a:r>
-              <a:rPr dirty="0" err="1"/>
-              <a:t>una</a:t>
-            </a:r>
-            <a:r>
-              <a:rPr dirty="0"/>
-              <a:t> </a:t>
-            </a:r>
-            <a:r>
-              <a:rPr dirty="0" err="1"/>
-              <a:t>aplicación</a:t>
-            </a:r>
-            <a:r>
-              <a:rPr dirty="0"/>
-              <a:t> </a:t>
-            </a:r>
-            <a:r>
-              <a:rPr dirty="0" err="1"/>
-              <a:t>pública</a:t>
-            </a:r>
-            <a:r>
-              <a:rPr dirty="0"/>
-              <a:t> </a:t>
-            </a:r>
-            <a:r>
-              <a:rPr dirty="0" err="1"/>
-              <a:t>como</a:t>
-            </a:r>
-            <a:r>
-              <a:rPr dirty="0"/>
-              <a:t> </a:t>
-            </a:r>
-            <a:r>
-              <a:rPr dirty="0" err="1"/>
-              <a:t>esta</a:t>
-            </a:r>
-            <a:r>
-              <a:rPr dirty="0"/>
-              <a:t> SPA, </a:t>
-            </a:r>
-            <a:r>
-              <a:rPr dirty="0" err="1"/>
-              <a:t>que</a:t>
-            </a:r>
-            <a:endParaRPr dirty="0"/>
-          </a:p>
-          <a:p>
-            <a:r>
-              <a:rPr dirty="0"/>
-              <a:t>no </a:t>
-            </a:r>
-            <a:r>
-              <a:rPr dirty="0" err="1"/>
-              <a:t>puede</a:t>
-            </a:r>
-            <a:r>
-              <a:rPr dirty="0"/>
-              <a:t> </a:t>
-            </a:r>
-            <a:r>
-              <a:rPr dirty="0" err="1"/>
-              <a:t>guardar</a:t>
-            </a:r>
-            <a:r>
-              <a:rPr dirty="0"/>
-              <a:t> un </a:t>
-            </a:r>
-            <a:r>
-              <a:rPr dirty="0" err="1"/>
-              <a:t>secreto</a:t>
-            </a:r>
-            <a:r>
-              <a:rPr dirty="0"/>
-              <a:t> de </a:t>
-            </a:r>
-            <a:r>
-              <a:rPr dirty="0" err="1"/>
-              <a:t>cliente</a:t>
-            </a:r>
-            <a:r>
-              <a:rPr dirty="0"/>
-              <a:t> de forma </a:t>
-            </a:r>
-            <a:r>
-              <a:rPr dirty="0" err="1"/>
-              <a:t>segura</a:t>
-            </a:r>
-            <a:r>
-              <a:rPr dirty="0"/>
-              <a:t>. Cada </a:t>
-            </a:r>
-            <a:r>
-              <a:rPr dirty="0" err="1"/>
-              <a:t>solicitud</a:t>
-            </a:r>
-            <a:r>
-              <a:rPr dirty="0"/>
-              <a:t> </a:t>
-            </a:r>
-            <a:r>
-              <a:rPr dirty="0" err="1"/>
-              <a:t>subsiguiente</a:t>
-            </a:r>
-            <a:r>
-              <a:rPr dirty="0"/>
-              <a:t> </a:t>
-            </a:r>
-            <a:r>
-              <a:rPr dirty="0" err="1"/>
-              <a:t>llega</a:t>
-            </a:r>
-            <a:r>
-              <a:rPr dirty="0"/>
-              <a:t> a </a:t>
-            </a:r>
-            <a:r>
-              <a:rPr dirty="0" err="1"/>
-              <a:t>FastAPI</a:t>
-            </a:r>
-            <a:endParaRPr dirty="0"/>
-          </a:p>
-          <a:p>
-            <a:r>
-              <a:rPr dirty="0"/>
-              <a:t>con un token, y </a:t>
-            </a:r>
-            <a:r>
-              <a:rPr dirty="0" err="1"/>
-              <a:t>FastAPI</a:t>
-            </a:r>
-            <a:r>
-              <a:rPr dirty="0"/>
-              <a:t> lo </a:t>
-            </a:r>
-            <a:r>
-              <a:rPr dirty="0" err="1"/>
-              <a:t>valida</a:t>
-            </a:r>
-            <a:r>
-              <a:rPr dirty="0"/>
-              <a:t> </a:t>
-            </a:r>
-            <a:r>
-              <a:rPr dirty="0" err="1"/>
-              <a:t>completo</a:t>
-            </a:r>
-            <a:r>
-              <a:rPr dirty="0"/>
-              <a:t> — </a:t>
-            </a:r>
-            <a:r>
-              <a:rPr dirty="0" err="1"/>
-              <a:t>firma</a:t>
-            </a:r>
-            <a:r>
-              <a:rPr dirty="0"/>
-              <a:t>, </a:t>
-            </a:r>
-            <a:r>
-              <a:rPr dirty="0" err="1"/>
-              <a:t>expiración</a:t>
-            </a:r>
-            <a:r>
-              <a:rPr dirty="0"/>
-              <a:t>, audiencia y </a:t>
-            </a:r>
-            <a:r>
-              <a:rPr dirty="0" err="1"/>
-              <a:t>emisor</a:t>
-            </a:r>
-            <a:r>
-              <a:rPr dirty="0"/>
-              <a:t> — contra las</a:t>
-            </a:r>
-          </a:p>
-          <a:p>
-            <a:r>
-              <a:rPr dirty="0"/>
-              <a:t>claves </a:t>
-            </a:r>
-            <a:r>
-              <a:rPr dirty="0" err="1"/>
-              <a:t>públicas</a:t>
-            </a:r>
-            <a:r>
-              <a:rPr dirty="0"/>
-              <a:t> </a:t>
-            </a:r>
-            <a:r>
-              <a:rPr dirty="0" err="1"/>
-              <a:t>publicadas</a:t>
-            </a:r>
-            <a:r>
-              <a:rPr dirty="0"/>
-              <a:t> </a:t>
-            </a:r>
-            <a:r>
-              <a:rPr dirty="0" err="1"/>
-              <a:t>por</a:t>
-            </a:r>
-            <a:r>
-              <a:rPr dirty="0"/>
-              <a:t> Entra ID (JWKS). </a:t>
-            </a:r>
-            <a:r>
-              <a:rPr dirty="0" err="1"/>
-              <a:t>Ningún</a:t>
-            </a:r>
-            <a:r>
-              <a:rPr dirty="0"/>
-              <a:t> </a:t>
-            </a:r>
-            <a:r>
-              <a:rPr dirty="0" err="1"/>
-              <a:t>componente</a:t>
-            </a:r>
-            <a:r>
-              <a:rPr dirty="0"/>
-              <a:t> posterior </a:t>
-            </a:r>
-            <a:r>
-              <a:rPr dirty="0" err="1"/>
-              <a:t>vuelve</a:t>
-            </a:r>
-            <a:r>
-              <a:rPr dirty="0"/>
-              <a:t> a </a:t>
-            </a:r>
-            <a:r>
-              <a:rPr dirty="0" err="1"/>
-              <a:t>preguntar</a:t>
-            </a:r>
-            <a:endParaRPr dirty="0"/>
-          </a:p>
-          <a:p>
-            <a:r>
-              <a:rPr dirty="0" err="1"/>
-              <a:t>quién</a:t>
-            </a:r>
-            <a:r>
-              <a:rPr dirty="0"/>
-              <a:t> es el </a:t>
-            </a:r>
-            <a:r>
-              <a:rPr dirty="0" err="1"/>
-              <a:t>usuario</a:t>
-            </a:r>
-            <a:r>
-              <a:rPr dirty="0"/>
-              <a:t>: </a:t>
-            </a:r>
-            <a:r>
-              <a:rPr dirty="0" err="1"/>
-              <a:t>esa</a:t>
-            </a:r>
-            <a:r>
-              <a:rPr dirty="0"/>
-              <a:t> es la </a:t>
-            </a:r>
-            <a:r>
-              <a:rPr dirty="0" err="1"/>
-              <a:t>esencia</a:t>
-            </a:r>
-            <a:r>
-              <a:rPr dirty="0"/>
-              <a:t> de </a:t>
-            </a:r>
-            <a:r>
-              <a:rPr dirty="0" err="1"/>
-              <a:t>seguridad</a:t>
-            </a:r>
-            <a:r>
-              <a:rPr dirty="0"/>
-              <a:t> </a:t>
-            </a:r>
-            <a:r>
-              <a:rPr dirty="0" err="1"/>
-              <a:t>por</a:t>
-            </a:r>
-            <a:r>
-              <a:rPr dirty="0"/>
-              <a:t> </a:t>
-            </a:r>
-            <a:r>
-              <a:rPr dirty="0" err="1"/>
-              <a:t>diseño</a:t>
-            </a:r>
-            <a:r>
-              <a:rPr dirty="0"/>
-              <a:t> </a:t>
-            </a:r>
-            <a:r>
-              <a:rPr dirty="0" err="1"/>
-              <a:t>que</a:t>
-            </a:r>
-            <a:r>
-              <a:rPr dirty="0"/>
-              <a:t> </a:t>
-            </a:r>
-            <a:r>
-              <a:rPr dirty="0" err="1"/>
-              <a:t>mencioné</a:t>
-            </a:r>
-            <a:r>
-              <a:rPr dirty="0"/>
-              <a:t> </a:t>
-            </a:r>
-            <a:r>
-              <a:rPr dirty="0" err="1"/>
-              <a:t>en</a:t>
-            </a:r>
-            <a:r>
-              <a:rPr dirty="0"/>
-              <a:t> la </a:t>
-            </a:r>
-            <a:r>
-              <a:rPr dirty="0" err="1"/>
-              <a:t>diapositiva</a:t>
-            </a:r>
-            <a:endParaRPr dirty="0"/>
-          </a:p>
-          <a:p>
-            <a:r>
-              <a:rPr dirty="0"/>
-              <a:t>anterior.</a:t>
-            </a:r>
-          </a:p>
-          <a:p>
-            <a:r>
-              <a:rPr dirty="0"/>
-              <a:t>El Supervisor Agent </a:t>
-            </a:r>
-            <a:r>
-              <a:rPr dirty="0" err="1"/>
-              <a:t>enruta</a:t>
-            </a:r>
-            <a:r>
-              <a:rPr dirty="0"/>
-              <a:t> de forma </a:t>
-            </a:r>
-            <a:r>
-              <a:rPr dirty="0" err="1"/>
-              <a:t>determinista</a:t>
-            </a:r>
-            <a:r>
-              <a:rPr dirty="0"/>
-              <a:t> —no </a:t>
-            </a:r>
-            <a:r>
-              <a:rPr dirty="0" err="1"/>
-              <a:t>probabilística</a:t>
-            </a:r>
-            <a:r>
-              <a:rPr dirty="0"/>
-              <a:t>— </a:t>
-            </a:r>
-            <a:r>
-              <a:rPr dirty="0" err="1"/>
-              <a:t>hacia</a:t>
-            </a:r>
-            <a:r>
-              <a:rPr dirty="0"/>
-              <a:t> uno de </a:t>
-            </a:r>
-            <a:r>
-              <a:rPr dirty="0" err="1"/>
-              <a:t>los</a:t>
-            </a:r>
-            <a:r>
-              <a:rPr dirty="0"/>
-              <a:t> </a:t>
-            </a:r>
-            <a:r>
-              <a:rPr dirty="0" err="1"/>
-              <a:t>tres</a:t>
-            </a:r>
-            <a:r>
-              <a:rPr dirty="0"/>
-              <a:t> </a:t>
-            </a:r>
-            <a:r>
-              <a:rPr dirty="0" err="1"/>
-              <a:t>agentes</a:t>
-            </a:r>
-            <a:endParaRPr dirty="0"/>
-          </a:p>
-          <a:p>
-            <a:r>
-              <a:rPr dirty="0"/>
-              <a:t>de </a:t>
-            </a:r>
-            <a:r>
-              <a:rPr dirty="0" err="1"/>
-              <a:t>dominio</a:t>
-            </a:r>
-            <a:r>
-              <a:rPr dirty="0"/>
-              <a:t>, y </a:t>
-            </a:r>
-            <a:r>
-              <a:rPr dirty="0" err="1"/>
-              <a:t>cada</a:t>
-            </a:r>
-            <a:r>
-              <a:rPr dirty="0"/>
-              <a:t> </a:t>
-            </a:r>
-            <a:r>
-              <a:rPr dirty="0" err="1"/>
-              <a:t>agente</a:t>
-            </a:r>
-            <a:r>
-              <a:rPr dirty="0"/>
-              <a:t> accede a la </a:t>
-            </a:r>
-            <a:r>
-              <a:rPr dirty="0" err="1"/>
-              <a:t>lógica</a:t>
-            </a:r>
-            <a:r>
-              <a:rPr dirty="0"/>
-              <a:t> de </a:t>
-            </a:r>
-            <a:r>
-              <a:rPr dirty="0" err="1"/>
-              <a:t>negocio</a:t>
-            </a:r>
-            <a:r>
-              <a:rPr dirty="0"/>
-              <a:t> </a:t>
-            </a:r>
-            <a:r>
-              <a:rPr dirty="0" err="1"/>
-              <a:t>exclusivamente</a:t>
-            </a:r>
-            <a:r>
-              <a:rPr dirty="0"/>
-              <a:t> a </a:t>
-            </a:r>
-            <a:r>
-              <a:rPr dirty="0" err="1"/>
-              <a:t>través</a:t>
-            </a:r>
-            <a:r>
-              <a:rPr dirty="0"/>
-              <a:t> de la </a:t>
-            </a:r>
-            <a:r>
-              <a:rPr dirty="0" err="1"/>
-              <a:t>capa</a:t>
-            </a:r>
-            <a:r>
-              <a:rPr dirty="0"/>
-              <a:t> de</a:t>
-            </a:r>
-          </a:p>
-          <a:p>
-            <a:r>
-              <a:rPr dirty="0" err="1"/>
-              <a:t>herramientas</a:t>
-            </a:r>
-            <a:r>
-              <a:rPr dirty="0"/>
-              <a:t> </a:t>
-            </a:r>
-            <a:r>
-              <a:rPr dirty="0" err="1"/>
-              <a:t>determinista</a:t>
-            </a:r>
-            <a:r>
-              <a:rPr dirty="0"/>
-              <a:t>, </a:t>
-            </a:r>
-            <a:r>
-              <a:rPr dirty="0" err="1"/>
-              <a:t>nunca</a:t>
-            </a:r>
-            <a:r>
-              <a:rPr dirty="0"/>
-              <a:t> </a:t>
-            </a:r>
-            <a:r>
-              <a:rPr dirty="0" err="1"/>
-              <a:t>directamente</a:t>
-            </a:r>
-            <a:r>
-              <a:rPr dirty="0"/>
-              <a:t>. </a:t>
-            </a:r>
-            <a:r>
-              <a:rPr dirty="0" err="1"/>
-              <a:t>Aquí</a:t>
-            </a:r>
-            <a:r>
-              <a:rPr dirty="0"/>
-              <a:t> </a:t>
-            </a:r>
-            <a:r>
-              <a:rPr dirty="0" err="1"/>
-              <a:t>quiero</a:t>
-            </a:r>
-            <a:r>
-              <a:rPr dirty="0"/>
-              <a:t> ser </a:t>
-            </a:r>
-            <a:r>
-              <a:rPr dirty="0" err="1"/>
-              <a:t>explícito</a:t>
-            </a:r>
-            <a:r>
-              <a:rPr dirty="0"/>
-              <a:t> con algo </a:t>
-            </a:r>
-            <a:r>
-              <a:rPr dirty="0" err="1"/>
-              <a:t>importante</a:t>
-            </a:r>
-            <a:r>
-              <a:rPr dirty="0"/>
-              <a:t>: el</a:t>
-            </a:r>
-          </a:p>
-          <a:p>
-            <a:r>
-              <a:rPr dirty="0" err="1"/>
-              <a:t>recuadro</a:t>
-            </a:r>
-            <a:r>
-              <a:rPr dirty="0"/>
-              <a:t> de Azure Functions y Durable Functions </a:t>
-            </a:r>
-            <a:r>
-              <a:rPr dirty="0" err="1"/>
-              <a:t>tiene</a:t>
-            </a:r>
-            <a:r>
-              <a:rPr dirty="0"/>
-              <a:t> </a:t>
-            </a:r>
-            <a:r>
-              <a:rPr dirty="0" err="1"/>
-              <a:t>borde</a:t>
-            </a:r>
-            <a:r>
-              <a:rPr dirty="0"/>
-              <a:t> </a:t>
-            </a:r>
-            <a:r>
-              <a:rPr dirty="0" err="1"/>
-              <a:t>punteado</a:t>
-            </a:r>
-            <a:r>
-              <a:rPr dirty="0"/>
-              <a:t> y dice "</a:t>
-            </a:r>
-            <a:r>
-              <a:rPr dirty="0" err="1"/>
-              <a:t>arquitectura</a:t>
-            </a:r>
-            <a:endParaRPr dirty="0"/>
-          </a:p>
-          <a:p>
-            <a:r>
-              <a:rPr dirty="0" err="1"/>
-              <a:t>objetivo</a:t>
-            </a:r>
-            <a:r>
-              <a:rPr dirty="0"/>
-              <a:t>" </a:t>
-            </a:r>
-            <a:r>
-              <a:rPr dirty="0" err="1"/>
-              <a:t>porque</a:t>
-            </a:r>
-            <a:r>
-              <a:rPr dirty="0"/>
-              <a:t> no </a:t>
-            </a:r>
-            <a:r>
-              <a:rPr dirty="0" err="1"/>
-              <a:t>está</a:t>
-            </a:r>
-            <a:r>
-              <a:rPr dirty="0"/>
-              <a:t> </a:t>
-            </a:r>
-            <a:r>
-              <a:rPr dirty="0" err="1"/>
-              <a:t>desplegado</a:t>
-            </a:r>
-            <a:r>
-              <a:rPr dirty="0"/>
-              <a:t> hoy. La </a:t>
-            </a:r>
-            <a:r>
-              <a:rPr dirty="0" err="1"/>
-              <a:t>capa</a:t>
-            </a:r>
-            <a:r>
-              <a:rPr dirty="0"/>
-              <a:t> de </a:t>
-            </a:r>
-            <a:r>
-              <a:rPr dirty="0" err="1"/>
-              <a:t>herramientas</a:t>
-            </a:r>
-            <a:r>
-              <a:rPr dirty="0"/>
-              <a:t> </a:t>
-            </a:r>
-            <a:r>
-              <a:rPr dirty="0" err="1"/>
-              <a:t>sí</a:t>
-            </a:r>
-            <a:r>
-              <a:rPr dirty="0"/>
-              <a:t> </a:t>
-            </a:r>
-            <a:r>
-              <a:rPr dirty="0" err="1"/>
-              <a:t>está</a:t>
-            </a:r>
-            <a:r>
-              <a:rPr dirty="0"/>
-              <a:t> </a:t>
-            </a:r>
-            <a:r>
-              <a:rPr dirty="0" err="1"/>
-              <a:t>completamente</a:t>
-            </a:r>
-            <a:endParaRPr dirty="0"/>
-          </a:p>
-          <a:p>
-            <a:r>
-              <a:rPr dirty="0" err="1"/>
-              <a:t>diseñada</a:t>
-            </a:r>
-            <a:r>
-              <a:rPr dirty="0"/>
-              <a:t>, </a:t>
-            </a:r>
-            <a:r>
-              <a:rPr dirty="0" err="1"/>
-              <a:t>codificada</a:t>
-            </a:r>
-            <a:r>
-              <a:rPr dirty="0"/>
-              <a:t> y </a:t>
-            </a:r>
-            <a:r>
-              <a:rPr dirty="0" err="1"/>
-              <a:t>probada</a:t>
-            </a:r>
-            <a:r>
-              <a:rPr dirty="0"/>
-              <a:t> para </a:t>
-            </a:r>
-            <a:r>
-              <a:rPr dirty="0" err="1"/>
-              <a:t>ejecutarse</a:t>
-            </a:r>
-            <a:r>
-              <a:rPr dirty="0"/>
-              <a:t> ahí — </a:t>
-            </a:r>
-            <a:r>
-              <a:rPr dirty="0" err="1"/>
-              <a:t>pero</a:t>
-            </a:r>
-            <a:r>
-              <a:rPr dirty="0"/>
-              <a:t> el runtime actual, </a:t>
-            </a:r>
-            <a:r>
-              <a:rPr dirty="0" err="1"/>
-              <a:t>marcado</a:t>
-            </a:r>
-            <a:r>
-              <a:rPr dirty="0"/>
-              <a:t> </a:t>
-            </a:r>
-            <a:r>
-              <a:rPr dirty="0" err="1"/>
-              <a:t>en</a:t>
-            </a:r>
-            <a:r>
-              <a:rPr dirty="0"/>
-              <a:t> </a:t>
-            </a:r>
-            <a:r>
-              <a:rPr dirty="0" err="1"/>
-              <a:t>verde</a:t>
-            </a:r>
-            <a:r>
-              <a:rPr dirty="0"/>
-              <a:t> </a:t>
-            </a:r>
-            <a:r>
-              <a:rPr dirty="0" err="1"/>
-              <a:t>sólido</a:t>
-            </a:r>
-            <a:r>
-              <a:rPr dirty="0"/>
-              <a:t>,</a:t>
-            </a:r>
-          </a:p>
-          <a:p>
-            <a:r>
-              <a:rPr dirty="0"/>
-              <a:t>es "Tool Provider </a:t>
-            </a:r>
-            <a:r>
-              <a:rPr dirty="0" err="1"/>
-              <a:t>en</a:t>
-            </a:r>
-            <a:r>
-              <a:rPr dirty="0"/>
-              <a:t> </a:t>
-            </a:r>
-            <a:r>
-              <a:rPr dirty="0" err="1"/>
-              <a:t>proceso</a:t>
-            </a:r>
-            <a:r>
-              <a:rPr dirty="0"/>
-              <a:t>": las </a:t>
-            </a:r>
-            <a:r>
-              <a:rPr dirty="0" err="1"/>
-              <a:t>mismas</a:t>
-            </a:r>
-            <a:r>
-              <a:rPr dirty="0"/>
-              <a:t> </a:t>
-            </a:r>
-            <a:r>
-              <a:rPr dirty="0" err="1"/>
-              <a:t>herramientas</a:t>
-            </a:r>
-            <a:r>
-              <a:rPr dirty="0"/>
-              <a:t>, la </a:t>
-            </a:r>
-            <a:r>
-              <a:rPr dirty="0" err="1"/>
-              <a:t>misma</a:t>
-            </a:r>
-            <a:r>
-              <a:rPr dirty="0"/>
-              <a:t> </a:t>
-            </a:r>
-            <a:r>
-              <a:rPr dirty="0" err="1"/>
-              <a:t>lógica</a:t>
-            </a:r>
-            <a:r>
-              <a:rPr dirty="0"/>
-              <a:t> de </a:t>
-            </a:r>
-            <a:r>
-              <a:rPr dirty="0" err="1"/>
-              <a:t>negocio</a:t>
-            </a:r>
-            <a:r>
-              <a:rPr dirty="0"/>
-              <a:t>, </a:t>
-            </a:r>
-            <a:r>
-              <a:rPr dirty="0" err="1"/>
-              <a:t>ejecutando</a:t>
-            </a:r>
-            <a:endParaRPr dirty="0"/>
-          </a:p>
-          <a:p>
-            <a:r>
-              <a:rPr dirty="0" err="1"/>
-              <a:t>dentro</a:t>
-            </a:r>
-            <a:r>
-              <a:rPr dirty="0"/>
-              <a:t> del </a:t>
-            </a:r>
-            <a:r>
-              <a:rPr dirty="0" err="1"/>
-              <a:t>propio</a:t>
-            </a:r>
-            <a:r>
-              <a:rPr dirty="0"/>
-              <a:t> </a:t>
-            </a:r>
-            <a:r>
-              <a:rPr dirty="0" err="1"/>
-              <a:t>proceso</a:t>
-            </a:r>
-            <a:r>
-              <a:rPr dirty="0"/>
-              <a:t> de la API </a:t>
-            </a:r>
-            <a:r>
-              <a:rPr dirty="0" err="1"/>
-              <a:t>en</a:t>
-            </a:r>
-            <a:r>
-              <a:rPr dirty="0"/>
-              <a:t> </a:t>
-            </a:r>
-            <a:r>
-              <a:rPr dirty="0" err="1"/>
-              <a:t>lugar</a:t>
-            </a:r>
-            <a:r>
-              <a:rPr dirty="0"/>
-              <a:t> de </a:t>
-            </a:r>
-            <a:r>
-              <a:rPr dirty="0" err="1"/>
-              <a:t>en</a:t>
-            </a:r>
-            <a:r>
-              <a:rPr dirty="0"/>
-              <a:t> un endpoint serverless </a:t>
-            </a:r>
-            <a:r>
-              <a:rPr dirty="0" err="1"/>
-              <a:t>separado</a:t>
-            </a:r>
-            <a:r>
-              <a:rPr dirty="0"/>
-              <a:t>. Más </a:t>
-            </a:r>
-            <a:r>
-              <a:rPr dirty="0" err="1"/>
-              <a:t>adelante</a:t>
-            </a:r>
-            <a:endParaRPr dirty="0"/>
-          </a:p>
-          <a:p>
-            <a:r>
-              <a:rPr dirty="0" err="1"/>
-              <a:t>explico</a:t>
-            </a:r>
-            <a:r>
-              <a:rPr dirty="0"/>
-              <a:t> </a:t>
-            </a:r>
-            <a:r>
-              <a:rPr dirty="0" err="1"/>
-              <a:t>por</a:t>
-            </a:r>
-            <a:r>
-              <a:rPr dirty="0"/>
-              <a:t> </a:t>
-            </a:r>
-            <a:r>
-              <a:rPr dirty="0" err="1"/>
-              <a:t>qué</a:t>
-            </a:r>
-            <a:r>
-              <a:rPr dirty="0"/>
-              <a:t> </a:t>
-            </a:r>
-            <a:r>
-              <a:rPr dirty="0" err="1"/>
-              <a:t>exactamente</a:t>
-            </a:r>
-            <a:r>
-              <a:rPr dirty="0"/>
-              <a:t>.</a:t>
-            </a:r>
-          </a:p>
-          <a:p>
-            <a:r>
-              <a:rPr dirty="0"/>
-              <a:t>A la </a:t>
-            </a:r>
-            <a:r>
-              <a:rPr dirty="0" err="1"/>
-              <a:t>derecha</a:t>
-            </a:r>
-            <a:r>
-              <a:rPr dirty="0"/>
-              <a:t> </a:t>
-            </a:r>
-            <a:r>
-              <a:rPr dirty="0" err="1"/>
-              <a:t>están</a:t>
-            </a:r>
-            <a:r>
-              <a:rPr dirty="0"/>
-              <a:t> </a:t>
-            </a:r>
-            <a:r>
-              <a:rPr dirty="0" err="1"/>
-              <a:t>los</a:t>
-            </a:r>
-            <a:r>
-              <a:rPr dirty="0"/>
-              <a:t> </a:t>
-            </a:r>
-            <a:r>
-              <a:rPr dirty="0" err="1"/>
-              <a:t>servicios</a:t>
-            </a:r>
-            <a:r>
-              <a:rPr dirty="0"/>
-              <a:t> de IA y </a:t>
-            </a:r>
-            <a:r>
-              <a:rPr dirty="0" err="1"/>
-              <a:t>datos</a:t>
-            </a:r>
-            <a:r>
-              <a:rPr dirty="0"/>
-              <a:t>: Azure OpenAI para el </a:t>
-            </a:r>
-            <a:r>
-              <a:rPr dirty="0" err="1"/>
-              <a:t>razonamiento</a:t>
-            </a:r>
-            <a:r>
-              <a:rPr dirty="0"/>
-              <a:t> del </a:t>
-            </a:r>
-            <a:r>
-              <a:rPr dirty="0" err="1"/>
-              <a:t>modelo</a:t>
-            </a:r>
-            <a:r>
-              <a:rPr dirty="0"/>
-              <a:t>,</a:t>
-            </a:r>
-          </a:p>
-          <a:p>
-            <a:r>
-              <a:rPr dirty="0"/>
-              <a:t>Cosmos DB para el </a:t>
-            </a:r>
-            <a:r>
-              <a:rPr dirty="0" err="1"/>
-              <a:t>historial</a:t>
-            </a:r>
-            <a:r>
-              <a:rPr dirty="0"/>
-              <a:t> de </a:t>
-            </a:r>
-            <a:r>
-              <a:rPr dirty="0" err="1"/>
-              <a:t>conversación</a:t>
-            </a:r>
-            <a:r>
-              <a:rPr dirty="0"/>
-              <a:t>, y Azure AI Search —</a:t>
-            </a:r>
-            <a:r>
-              <a:rPr dirty="0" err="1"/>
-              <a:t>marcado</a:t>
-            </a:r>
-            <a:r>
-              <a:rPr dirty="0"/>
-              <a:t> </a:t>
-            </a:r>
-            <a:r>
-              <a:rPr dirty="0" err="1"/>
-              <a:t>en</a:t>
-            </a:r>
-            <a:r>
-              <a:rPr dirty="0"/>
-              <a:t> </a:t>
-            </a:r>
-            <a:r>
-              <a:rPr dirty="0" err="1"/>
-              <a:t>ámbar</a:t>
-            </a:r>
-            <a:r>
-              <a:rPr dirty="0"/>
-              <a:t> </a:t>
-            </a:r>
-            <a:r>
-              <a:rPr dirty="0" err="1"/>
-              <a:t>porque</a:t>
-            </a:r>
-            <a:r>
-              <a:rPr dirty="0"/>
-              <a:t> </a:t>
-            </a:r>
-            <a:r>
-              <a:rPr dirty="0" err="1"/>
-              <a:t>está</a:t>
-            </a:r>
-            <a:endParaRPr dirty="0"/>
-          </a:p>
-          <a:p>
-            <a:r>
-              <a:rPr dirty="0" err="1"/>
-              <a:t>provisionado</a:t>
-            </a:r>
-            <a:r>
-              <a:rPr dirty="0"/>
-              <a:t> </a:t>
-            </a:r>
-            <a:r>
-              <a:rPr dirty="0" err="1"/>
-              <a:t>pero</a:t>
-            </a:r>
-            <a:r>
-              <a:rPr dirty="0"/>
-              <a:t> </a:t>
-            </a:r>
-            <a:r>
-              <a:rPr dirty="0" err="1"/>
-              <a:t>su</a:t>
-            </a:r>
-            <a:r>
-              <a:rPr dirty="0"/>
-              <a:t> </a:t>
-            </a:r>
-            <a:r>
-              <a:rPr dirty="0" err="1"/>
-              <a:t>índice</a:t>
-            </a:r>
-            <a:r>
-              <a:rPr dirty="0"/>
-              <a:t> </a:t>
-            </a:r>
-            <a:r>
-              <a:rPr dirty="0" err="1"/>
-              <a:t>aún</a:t>
-            </a:r>
-            <a:r>
-              <a:rPr dirty="0"/>
-              <a:t> no </a:t>
-            </a:r>
-            <a:r>
-              <a:rPr dirty="0" err="1"/>
-              <a:t>está</a:t>
-            </a:r>
-            <a:r>
-              <a:rPr dirty="0"/>
-              <a:t> </a:t>
-            </a:r>
-            <a:r>
-              <a:rPr dirty="0" err="1"/>
-              <a:t>poblado</a:t>
-            </a:r>
-            <a:r>
-              <a:rPr dirty="0"/>
-              <a:t>, </a:t>
-            </a:r>
-            <a:r>
-              <a:rPr dirty="0" err="1"/>
-              <a:t>tema</a:t>
-            </a:r>
-            <a:r>
-              <a:rPr dirty="0"/>
-              <a:t> </a:t>
-            </a:r>
-            <a:r>
-              <a:rPr dirty="0" err="1"/>
-              <a:t>que</a:t>
-            </a:r>
-            <a:r>
-              <a:rPr dirty="0"/>
-              <a:t> </a:t>
-            </a:r>
-            <a:r>
-              <a:rPr dirty="0" err="1"/>
-              <a:t>profundizo</a:t>
-            </a:r>
-            <a:r>
-              <a:rPr dirty="0"/>
-              <a:t> </a:t>
-            </a:r>
-            <a:r>
-              <a:rPr dirty="0" err="1"/>
-              <a:t>en</a:t>
-            </a:r>
-            <a:r>
-              <a:rPr dirty="0"/>
-              <a:t> la </a:t>
-            </a:r>
-            <a:r>
-              <a:rPr dirty="0" err="1"/>
-              <a:t>diapositiva</a:t>
-            </a:r>
-            <a:r>
-              <a:rPr dirty="0"/>
-              <a:t> de</a:t>
-            </a:r>
-          </a:p>
-          <a:p>
-            <a:r>
-              <a:rPr dirty="0" err="1"/>
-              <a:t>arquitectura</a:t>
-            </a:r>
-            <a:r>
-              <a:rPr dirty="0"/>
-              <a:t> del </a:t>
-            </a:r>
-            <a:r>
-              <a:rPr dirty="0" err="1"/>
-              <a:t>conocimiento</a:t>
-            </a:r>
-            <a:r>
-              <a:rPr dirty="0"/>
-              <a:t>. Abajo, </a:t>
-            </a:r>
-            <a:r>
-              <a:rPr dirty="0" err="1"/>
-              <a:t>en</a:t>
-            </a:r>
-            <a:r>
-              <a:rPr dirty="0"/>
-              <a:t> la </a:t>
-            </a:r>
-            <a:r>
-              <a:rPr dirty="0" err="1"/>
-              <a:t>franja</a:t>
-            </a:r>
-            <a:r>
-              <a:rPr dirty="0"/>
-              <a:t> transversal, </a:t>
-            </a:r>
-            <a:r>
-              <a:rPr dirty="0" err="1"/>
-              <a:t>están</a:t>
-            </a:r>
-            <a:r>
-              <a:rPr dirty="0"/>
-              <a:t> </a:t>
-            </a:r>
-            <a:r>
-              <a:rPr dirty="0" err="1"/>
-              <a:t>los</a:t>
-            </a:r>
-            <a:r>
-              <a:rPr dirty="0"/>
-              <a:t> </a:t>
-            </a:r>
-            <a:r>
-              <a:rPr dirty="0" err="1"/>
-              <a:t>servicios</a:t>
-            </a:r>
-            <a:r>
-              <a:rPr dirty="0"/>
-              <a:t> de </a:t>
-            </a:r>
-            <a:r>
-              <a:rPr dirty="0" err="1"/>
-              <a:t>plataforma</a:t>
-            </a:r>
-            <a:endParaRPr dirty="0"/>
-          </a:p>
-          <a:p>
-            <a:r>
-              <a:rPr dirty="0" err="1"/>
-              <a:t>que</a:t>
-            </a:r>
-            <a:r>
-              <a:rPr dirty="0"/>
-              <a:t> no </a:t>
-            </a:r>
-            <a:r>
-              <a:rPr dirty="0" err="1"/>
-              <a:t>pertenecen</a:t>
-            </a:r>
-            <a:r>
-              <a:rPr dirty="0"/>
-              <a:t> a un paso </a:t>
-            </a:r>
-            <a:r>
-              <a:rPr dirty="0" err="1"/>
-              <a:t>específico</a:t>
-            </a:r>
-            <a:r>
-              <a:rPr dirty="0"/>
-              <a:t> del </a:t>
-            </a:r>
-            <a:r>
-              <a:rPr dirty="0" err="1"/>
-              <a:t>flujo</a:t>
-            </a:r>
-            <a:r>
-              <a:rPr dirty="0"/>
-              <a:t> </a:t>
-            </a:r>
-            <a:r>
-              <a:rPr dirty="0" err="1"/>
-              <a:t>sino</a:t>
-            </a:r>
-            <a:r>
-              <a:rPr dirty="0"/>
-              <a:t> </a:t>
-            </a:r>
-            <a:r>
-              <a:rPr dirty="0" err="1"/>
-              <a:t>que</a:t>
-            </a:r>
-            <a:r>
-              <a:rPr dirty="0"/>
-              <a:t> </a:t>
-            </a:r>
-            <a:r>
-              <a:rPr dirty="0" err="1"/>
-              <a:t>sostienen</a:t>
-            </a:r>
-            <a:r>
-              <a:rPr dirty="0"/>
-              <a:t> a </a:t>
-            </a:r>
-            <a:r>
-              <a:rPr dirty="0" err="1"/>
-              <a:t>todos</a:t>
-            </a:r>
-            <a:r>
-              <a:rPr dirty="0"/>
-              <a:t>: Container Apps y</a:t>
-            </a:r>
-          </a:p>
-          <a:p>
-            <a:r>
-              <a:rPr dirty="0"/>
-              <a:t>Container Registry para el </a:t>
-            </a:r>
-            <a:r>
-              <a:rPr dirty="0" err="1"/>
-              <a:t>despliegue</a:t>
-            </a:r>
-            <a:r>
-              <a:rPr dirty="0"/>
-              <a:t>, Key Vault y Managed Identity para la </a:t>
-            </a:r>
-            <a:r>
-              <a:rPr dirty="0" err="1"/>
-              <a:t>gestión</a:t>
-            </a:r>
-            <a:r>
-              <a:rPr dirty="0"/>
-              <a:t> de </a:t>
-            </a:r>
-            <a:r>
-              <a:rPr dirty="0" err="1"/>
-              <a:t>secretos</a:t>
-            </a:r>
-            <a:r>
-              <a:rPr dirty="0"/>
-              <a:t> e</a:t>
-            </a:r>
-          </a:p>
-          <a:p>
-            <a:r>
-              <a:rPr dirty="0" err="1"/>
-              <a:t>identidad</a:t>
-            </a:r>
-            <a:r>
-              <a:rPr dirty="0"/>
-              <a:t> de </a:t>
-            </a:r>
-            <a:r>
-              <a:rPr dirty="0" err="1"/>
-              <a:t>servicio</a:t>
-            </a:r>
-            <a:r>
-              <a:rPr dirty="0"/>
-              <a:t>, y Application Insights junto con Azure Monitor para </a:t>
-            </a:r>
-            <a:r>
-              <a:rPr dirty="0" err="1"/>
-              <a:t>observabilidad</a:t>
-            </a:r>
-            <a:r>
-              <a:rPr dirty="0"/>
-              <a:t> — </a:t>
-            </a:r>
-            <a:r>
-              <a:rPr dirty="0" err="1"/>
-              <a:t>los</a:t>
-            </a:r>
-            <a:endParaRPr dirty="0"/>
-          </a:p>
-          <a:p>
-            <a:r>
-              <a:rPr dirty="0" err="1"/>
-              <a:t>detallo</a:t>
-            </a:r>
-            <a:r>
-              <a:rPr dirty="0"/>
-              <a:t> </a:t>
-            </a:r>
-            <a:r>
-              <a:rPr dirty="0" err="1"/>
-              <a:t>en</a:t>
-            </a:r>
-            <a:r>
-              <a:rPr dirty="0"/>
-              <a:t> las </a:t>
-            </a:r>
-            <a:r>
-              <a:rPr dirty="0" err="1"/>
-              <a:t>siguientes</a:t>
-            </a:r>
-            <a:r>
-              <a:rPr dirty="0"/>
-              <a:t> </a:t>
-            </a:r>
-            <a:r>
-              <a:rPr dirty="0" err="1"/>
-              <a:t>diapositivas</a:t>
-            </a:r>
-            <a:r>
-              <a:rPr dirty="0"/>
-              <a:t>.</a:t>
+              <a:t>Esta arquitectura no cambió de forma, pero sí cambió lo que ocurre dentro de cada</a:t>
+            </a:r>
+          </a:p>
+          <a:p>
+            <a:r>
+              <a:t>agente especialista, y quiero señalarlo explícitamente en el diagrama.</a:t>
+            </a:r>
+          </a:p>
+          <a:p/>
+          <a:p>
+            <a:r>
+              <a:t>El flujo de autenticación —Entra ID, PKCE, validación JWT— es exactamente el mismo que expliqué</a:t>
+            </a:r>
+          </a:p>
+          <a:p>
+            <a:r>
+              <a:t>antes. Lo que cambió es lo que pasa después del Supervisor: el Supervisor sigue siendo</a:t>
+            </a:r>
+          </a:p>
+          <a:p>
+            <a:r>
+              <a:t>puramente determinista —enrutamiento por palabras clave, sin razonamiento de modelo alguno—, y</a:t>
+            </a:r>
+          </a:p>
+          <a:p>
+            <a:r>
+              <a:t>por eso su recuadro ahora dice explícitamente "sin ReAct". Cada uno de los tres agentes</a:t>
+            </a:r>
+          </a:p>
+          <a:p>
+            <a:r>
+              <a:t>especialistas, en cambio, ahora ejecuta un bucle ReAct acotado antes de responder —Claims, Broker</a:t>
+            </a:r>
+          </a:p>
+          <a:p>
+            <a:r>
+              <a:t>Services y Commercial Intake, los tres etiquetados "ReAct + Tool Calling" en el diagrama.</a:t>
+            </a:r>
+          </a:p>
+          <a:p/>
+          <a:p>
+            <a:r>
+              <a:t>La capa de herramientas sigue siendo la misma pieza determinista de siempre: es la única fuente</a:t>
+            </a:r>
+          </a:p>
+          <a:p>
+            <a:r>
+              <a:t>de verdad para cualquier operación de negocio, y el modelo de lenguaje nunca la ejecuta</a:t>
+            </a:r>
+          </a:p>
+          <a:p>
+            <a:r>
+              <a:t>directamente — solo puede solicitarla. Notén también que ahora nombro explícitamente el modelo,</a:t>
+            </a:r>
+          </a:p>
+          <a:p>
+            <a:r>
+              <a:t>gpt-5-mini, en el recuadro de Azure OpenAI. Y Azure Functions junto con Durable Functions siguen</a:t>
+            </a:r>
+          </a:p>
+          <a:p>
+            <a:r>
+              <a:t>marcados con borde punteado como arquitectura objetivo: el runtime actual sigue siendo Tool</a:t>
+            </a:r>
+          </a:p>
+          <a:p>
+            <a:r>
+              <a:t>Provider en proceso, exactamente como expliqué antes — eso no cambió con la generalización de</a:t>
+            </a:r>
+          </a:p>
+          <a:p>
+            <a:r>
+              <a:t>ReAct, son decisiones independientes.</a:t>
             </a:r>
           </a:p>
         </p:txBody>
@@ -15755,7 +14291,7 @@
         <p:spPr>
           <a:xfrm>
             <a:off x="1828800" y="2537460"/>
-            <a:ext cx="2011680" cy="411480"/>
+            <a:ext cx="2011680" cy="530352"/>
           </a:xfrm>
           <a:prstGeom prst="roundRect">
             <a:avLst>
@@ -15792,13 +14328,25 @@
           <a:p>
             <a:pPr algn="ctr"/>
             <a:r>
-              <a:rPr sz="1100" b="1">
+              <a:rPr sz="1050" b="1">
                 <a:solidFill>
                   <a:srgbClr val="142640"/>
                 </a:solidFill>
                 <a:latin typeface="Calibri"/>
               </a:rPr>
               <a:t>Supervisor Agent</a:t>
+            </a:r>
+          </a:p>
+          <a:p>
+            <a:pPr algn="ctr"/>
+            <a:r>
+              <a:rPr sz="750" b="0" i="1">
+                <a:solidFill>
+                  <a:srgbClr val="555555"/>
+                </a:solidFill>
+                <a:latin typeface="Calibri"/>
+              </a:rPr>
+              <a:t>Enrutamiento determinista — sin ReAct</a:t>
             </a:r>
           </a:p>
         </p:txBody>
@@ -15847,7 +14395,7 @@
         <p:spPr>
           <a:xfrm>
             <a:off x="662940" y="3131820"/>
-            <a:ext cx="1325880" cy="502920"/>
+            <a:ext cx="1325880" cy="640080"/>
           </a:xfrm>
           <a:prstGeom prst="roundRect">
             <a:avLst>
@@ -15884,14 +14432,25 @@
           <a:p>
             <a:pPr algn="ctr"/>
             <a:r>
-              <a:rPr sz="969" b="1">
+              <a:rPr sz="950" b="1">
                 <a:solidFill>
                   <a:srgbClr val="142640"/>
                 </a:solidFill>
                 <a:latin typeface="Calibri"/>
               </a:rPr>
-              <a:t>Claims
-Agent</a:t>
+              <a:t>Claims Agent</a:t>
+            </a:r>
+          </a:p>
+          <a:p>
+            <a:pPr algn="ctr"/>
+            <a:r>
+              <a:rPr sz="700" b="1" i="1">
+                <a:solidFill>
+                  <a:srgbClr val="0E7C86"/>
+                </a:solidFill>
+                <a:latin typeface="Calibri"/>
+              </a:rPr>
+              <a:t>ReAct + Tool Calling</a:t>
             </a:r>
           </a:p>
         </p:txBody>
@@ -15940,7 +14499,7 @@
         <p:spPr>
           <a:xfrm>
             <a:off x="2171700" y="3131820"/>
-            <a:ext cx="1325880" cy="502920"/>
+            <a:ext cx="1325880" cy="640080"/>
           </a:xfrm>
           <a:prstGeom prst="roundRect">
             <a:avLst>
@@ -15977,14 +14536,25 @@
           <a:p>
             <a:pPr algn="ctr"/>
             <a:r>
-              <a:rPr sz="969" b="1">
+              <a:rPr sz="950" b="1">
                 <a:solidFill>
                   <a:srgbClr val="142640"/>
                 </a:solidFill>
                 <a:latin typeface="Calibri"/>
               </a:rPr>
-              <a:t>Broker
-Agent</a:t>
+              <a:t>Broker Agent</a:t>
+            </a:r>
+          </a:p>
+          <a:p>
+            <a:pPr algn="ctr"/>
+            <a:r>
+              <a:rPr sz="700" b="1" i="1">
+                <a:solidFill>
+                  <a:srgbClr val="0E7C86"/>
+                </a:solidFill>
+                <a:latin typeface="Calibri"/>
+              </a:rPr>
+              <a:t>ReAct + Tool Calling</a:t>
             </a:r>
           </a:p>
         </p:txBody>
@@ -16033,7 +14603,7 @@
         <p:spPr>
           <a:xfrm>
             <a:off x="3680460" y="3131820"/>
-            <a:ext cx="1325880" cy="502920"/>
+            <a:ext cx="1325880" cy="640080"/>
           </a:xfrm>
           <a:prstGeom prst="roundRect">
             <a:avLst>
@@ -16070,7 +14640,7 @@
           <a:p>
             <a:pPr algn="ctr"/>
             <a:r>
-              <a:rPr sz="969" b="1">
+              <a:rPr sz="830" b="1">
                 <a:solidFill>
                   <a:srgbClr val="142640"/>
                 </a:solidFill>
@@ -16078,6 +14648,18 @@
               </a:rPr>
               <a:t>Commercial
 Intake Agent</a:t>
+            </a:r>
+          </a:p>
+          <a:p>
+            <a:pPr algn="ctr"/>
+            <a:r>
+              <a:rPr sz="700" b="1" i="1">
+                <a:solidFill>
+                  <a:srgbClr val="0E7C86"/>
+                </a:solidFill>
+                <a:latin typeface="Calibri"/>
+              </a:rPr>
+              <a:t>ReAct + Tool Calling</a:t>
             </a:r>
           </a:p>
         </p:txBody>
@@ -16126,7 +14708,7 @@
         <p:spPr>
           <a:xfrm>
             <a:off x="1463040" y="3863340"/>
-            <a:ext cx="2743200" cy="411480"/>
+            <a:ext cx="2743200" cy="530352"/>
           </a:xfrm>
           <a:prstGeom prst="roundRect">
             <a:avLst>
@@ -16163,24 +14745,37 @@
           <a:p>
             <a:pPr algn="ctr"/>
             <a:r>
-              <a:rPr sz="1080" b="1">
+              <a:rPr sz="1050" b="1">
                 <a:solidFill>
                   <a:srgbClr val="142640"/>
                 </a:solidFill>
                 <a:latin typeface="Calibri"/>
               </a:rPr>
-              <a:t>Tool Layer (determinista)</a:t>
+              <a:t>Tool Layer — determinista</a:t>
             </a:r>
           </a:p>
           <a:p>
             <a:pPr algn="ctr"/>
             <a:r>
-              <a:rPr sz="730" i="1">
+              <a:rPr sz="660" i="1">
                 <a:solidFill>
                   <a:srgbClr val="555555"/>
                 </a:solidFill>
-              </a:rPr>
-              <a:t>Runtime actual — Tool Provider = inprocess</a:t>
+                <a:latin typeface="Calibri"/>
+              </a:rPr>
+              <a:t>Fuente de verdad de negocio — el LLM nunca ejecuta la transacción</a:t>
+            </a:r>
+          </a:p>
+          <a:p>
+            <a:pPr algn="ctr"/>
+            <a:r>
+              <a:rPr sz="660" i="1">
+                <a:solidFill>
+                  <a:srgbClr val="555555"/>
+                </a:solidFill>
+                <a:latin typeface="Calibri"/>
+              </a:rPr>
+              <a:t>Runtime actual: TOOL_PROVIDER=inprocess, CLAIMS_WORKFLOW_PROVIDER=inprocess</a:t>
             </a:r>
           </a:p>
         </p:txBody>
@@ -16527,22 +15122,23 @@
           <a:p>
             <a:pPr algn="ctr"/>
             <a:r>
-              <a:rPr sz="969" b="1">
-                <a:solidFill>
-                  <a:srgbClr val="1E8A4C"/>
-                </a:solidFill>
-                <a:latin typeface="Calibri"/>
-              </a:rPr>
-              <a:t>Azure OpenAI</a:t>
+              <a:rPr sz="900" b="1">
+                <a:solidFill>
+                  <a:srgbClr val="142640"/>
+                </a:solidFill>
+                <a:latin typeface="Calibri"/>
+              </a:rPr>
+              <a:t>Azure OpenAI (gpt-5-mini)</a:t>
             </a:r>
           </a:p>
           <a:p>
             <a:pPr algn="ctr"/>
             <a:r>
-              <a:rPr sz="650" i="1">
+              <a:rPr sz="650" b="0" i="1">
                 <a:solidFill>
                   <a:srgbClr val="555555"/>
                 </a:solidFill>
+                <a:latin typeface="Calibri"/>
               </a:rPr>
               <a:t>razonamiento / tool calling</a:t>
             </a:r>
@@ -17464,7 +16060,7 @@
                 </a:solidFill>
                 <a:latin typeface="Calibri"/>
               </a:rPr>
-              <a:t>Por qué esta arquitectura, en el lenguaje de patrones del curso</a:t>
+              <a:t>El patrón primario del curso, tal como quedó implementado</a:t>
             </a:r>
           </a:p>
         </p:txBody>
@@ -17614,13 +16210,13 @@
               </a:lnSpc>
             </a:pPr>
             <a:r>
-              <a:rPr sz="830" b="0" i="1">
+              <a:rPr sz="780" b="0" i="1">
                 <a:solidFill>
                   <a:srgbClr val="555555"/>
                 </a:solidFill>
                 <a:latin typeface="Calibri"/>
               </a:rPr>
-              <a:t>Fuente: ADR-0011, src/core/tool_calling/orchestrator.py, review/06 §9</a:t>
+              <a:t>Fuente: ADR-0011, src/core/tool_calling/orchestrator.py, docs/sprint_12/validation.md</a:t>
             </a:r>
           </a:p>
         </p:txBody>
@@ -17633,8 +16229,8 @@
         </p:nvSpPr>
         <p:spPr>
           <a:xfrm>
-            <a:off x="502920" y="1051560"/>
-            <a:ext cx="11201400" cy="777240"/>
+            <a:off x="502920" y="1024128"/>
+            <a:ext cx="6446520" cy="566928"/>
           </a:xfrm>
           <a:prstGeom prst="roundRect">
             <a:avLst>
@@ -17679,8 +16275,8 @@
         </p:nvSpPr>
         <p:spPr>
           <a:xfrm>
-            <a:off x="731520" y="1133856"/>
-            <a:ext cx="10744200" cy="274320"/>
+            <a:off x="685800" y="1069848"/>
+            <a:ext cx="6080760" cy="219456"/>
           </a:xfrm>
           <a:prstGeom prst="rect">
             <a:avLst/>
@@ -17699,13 +16295,13 @@
               </a:lnSpc>
             </a:pPr>
             <a:r>
-              <a:rPr sz="1100" b="1" i="0">
+              <a:rPr sz="1000" b="1" i="0">
                 <a:solidFill>
                   <a:srgbClr val="9FC1E0"/>
                 </a:solidFill>
                 <a:latin typeface="Calibri"/>
               </a:rPr>
-              <a:t>PATRÓN PRIMARIO</a:t>
+              <a:t>PATRÓN PRINCIPAL — Status: IMPLEMENTADO</a:t>
             </a:r>
           </a:p>
         </p:txBody>
@@ -17718,8 +16314,8 @@
         </p:nvSpPr>
         <p:spPr>
           <a:xfrm>
-            <a:off x="731520" y="1371600"/>
-            <a:ext cx="10744200" cy="411480"/>
+            <a:off x="685800" y="1298448"/>
+            <a:ext cx="6080760" cy="274320"/>
           </a:xfrm>
           <a:prstGeom prst="rect">
             <a:avLst/>
@@ -17738,27 +16334,169 @@
               </a:lnSpc>
             </a:pPr>
             <a:r>
-              <a:rPr sz="1700" b="1" i="0">
+              <a:rPr sz="1450" b="1" i="0">
                 <a:solidFill>
                   <a:srgbClr val="FFFFFF"/>
                 </a:solidFill>
                 <a:latin typeface="Calibri"/>
               </a:rPr>
-              <a:t>ReAct + Tool Calling — implementado en Claims, Broker Services y Commercial Intake</a:t>
-            </a:r>
-          </a:p>
-        </p:txBody>
-      </p:sp>
-      <p:sp>
-        <p:nvSpPr>
-          <p:cNvPr id="11" name="Rounded Rectangle 10"/>
+              <a:t>✓ ReAct (Reason + Act) + Tool Calling</a:t>
+            </a:r>
+          </a:p>
+        </p:txBody>
+      </p:sp>
+      <p:sp>
+        <p:nvSpPr>
+          <p:cNvPr id="11" name="TextBox 10"/>
+          <p:cNvSpPr txBox="1"/>
+          <p:nvPr/>
+        </p:nvSpPr>
+        <p:spPr>
+          <a:xfrm>
+            <a:off x="502920" y="1691640"/>
+            <a:ext cx="6446520" cy="201168"/>
+          </a:xfrm>
+          <a:prstGeom prst="rect">
+            <a:avLst/>
+          </a:prstGeom>
+          <a:noFill/>
+        </p:spPr>
+        <p:txBody>
+          <a:bodyPr wrap="square" anchor="t" lIns="50800" rIns="50800" tIns="25400" bIns="25400">
+            <a:spAutoFit/>
+          </a:bodyPr>
+          <a:lstStyle/>
+          <a:p>
+            <a:pPr algn="l">
+              <a:lnSpc>
+                <a:spcPct val="100000"/>
+              </a:lnSpc>
+            </a:pPr>
+            <a:r>
+              <a:rPr sz="950" b="1" i="0">
+                <a:solidFill>
+                  <a:srgbClr val="0E7C86"/>
+                </a:solidFill>
+                <a:latin typeface="Calibri"/>
+              </a:rPr>
+              <a:t>IMPLEMENTACIÓN</a:t>
+            </a:r>
+          </a:p>
+        </p:txBody>
+      </p:sp>
+      <p:sp>
+        <p:nvSpPr>
+          <p:cNvPr id="12" name="TextBox 11"/>
+          <p:cNvSpPr txBox="1"/>
+          <p:nvPr/>
+        </p:nvSpPr>
+        <p:spPr>
+          <a:xfrm>
+            <a:off x="502920" y="1901952"/>
+            <a:ext cx="6446520" cy="1600200"/>
+          </a:xfrm>
+          <a:prstGeom prst="rect">
+            <a:avLst/>
+          </a:prstGeom>
+          <a:noFill/>
+        </p:spPr>
+        <p:txBody>
+          <a:bodyPr wrap="square">
+            <a:spAutoFit/>
+          </a:bodyPr>
+          <a:lstStyle/>
+          <a:p>
+            <a:pPr>
+              <a:spcAft>
+                <a:spcPts val="500"/>
+              </a:spcAft>
+            </a:pPr>
+            <a:r>
+              <a:rPr sz="969">
+                <a:solidFill>
+                  <a:srgbClr val="142640"/>
+                </a:solidFill>
+                <a:latin typeface="Calibri"/>
+              </a:rPr>
+              <a:t>▪  ToolCallingOrchestrator compartido por los tres agentes.</a:t>
+            </a:r>
+          </a:p>
+          <a:p>
+            <a:pPr>
+              <a:spcAft>
+                <a:spcPts val="500"/>
+              </a:spcAft>
+            </a:pPr>
+            <a:r>
+              <a:rPr sz="969">
+                <a:solidFill>
+                  <a:srgbClr val="142640"/>
+                </a:solidFill>
+                <a:latin typeface="Calibri"/>
+              </a:rPr>
+              <a:t>▪  Claims Agent, Broker Services Agent, Commercial Intake Agent.</a:t>
+            </a:r>
+          </a:p>
+          <a:p>
+            <a:pPr>
+              <a:spcAft>
+                <a:spcPts val="500"/>
+              </a:spcAft>
+            </a:pPr>
+            <a:r>
+              <a:rPr sz="969">
+                <a:solidFill>
+                  <a:srgbClr val="142640"/>
+                </a:solidFill>
+                <a:latin typeface="Calibri"/>
+              </a:rPr>
+              <a:t>▪  Bucle iterativo acotado, con máximo de iteraciones.</a:t>
+            </a:r>
+          </a:p>
+          <a:p>
+            <a:pPr>
+              <a:spcAft>
+                <a:spcPts val="500"/>
+              </a:spcAft>
+            </a:pPr>
+            <a:r>
+              <a:rPr sz="969">
+                <a:solidFill>
+                  <a:srgbClr val="142640"/>
+                </a:solidFill>
+                <a:latin typeface="Calibri"/>
+              </a:rPr>
+              <a:t>▪  Detección de llamadas duplicadas a herramientas.</a:t>
+            </a:r>
+          </a:p>
+          <a:p>
+            <a:pPr>
+              <a:spcAft>
+                <a:spcPts val="500"/>
+              </a:spcAft>
+            </a:pPr>
+            <a:r>
+              <a:rPr sz="969">
+                <a:solidFill>
+                  <a:srgbClr val="142640"/>
+                </a:solidFill>
+                <a:latin typeface="Calibri"/>
+              </a:rPr>
+              <a:t>▪  Protección por tiempo límite (timeout) por llamada.</a:t>
+            </a:r>
+          </a:p>
+        </p:txBody>
+      </p:sp>
+      <p:sp>
+        <p:nvSpPr>
+          <p:cNvPr id="13" name="Rounded Rectangle 12"/>
           <p:cNvSpPr/>
           <p:nvPr/>
         </p:nvSpPr>
         <p:spPr>
           <a:xfrm>
-            <a:off x="502920" y="1965960"/>
-            <a:ext cx="5532120" cy="1417320"/>
+            <a:off x="8252460" y="1545336"/>
+            <a:ext cx="2331720" cy="292608"/>
           </a:xfrm>
           <a:prstGeom prst="roundRect">
             <a:avLst>
@@ -17766,9 +16504,9 @@
             </a:avLst>
           </a:prstGeom>
           <a:solidFill>
-            <a:srgbClr val="F2F2F2"/>
+            <a:srgbClr val="FFFFFF"/>
           </a:solidFill>
-          <a:ln w="13970">
+          <a:ln w="15240">
             <a:solidFill>
               <a:srgbClr val="0E7C86"/>
             </a:solidFill>
@@ -17790,23 +16528,495 @@
           </a:fontRef>
         </p:style>
         <p:txBody>
-          <a:bodyPr rtlCol="0" anchor="ctr"/>
+          <a:bodyPr rtlCol="0" anchor="ctr" wrap="square" lIns="25400" rIns="25400" tIns="12700" bIns="12700"/>
           <a:lstStyle/>
           <a:p>
             <a:pPr algn="ctr"/>
-          </a:p>
-        </p:txBody>
-      </p:sp>
-      <p:sp>
-        <p:nvSpPr>
-          <p:cNvPr id="12" name="TextBox 11"/>
+            <a:r>
+              <a:rPr sz="869" b="1">
+                <a:solidFill>
+                  <a:srgbClr val="142640"/>
+                </a:solidFill>
+                <a:latin typeface="Calibri"/>
+              </a:rPr>
+              <a:t>Reason</a:t>
+            </a:r>
+          </a:p>
+        </p:txBody>
+      </p:sp>
+      <p:sp>
+        <p:nvSpPr>
+          <p:cNvPr id="14" name="Rounded Rectangle 13"/>
+          <p:cNvSpPr/>
+          <p:nvPr/>
+        </p:nvSpPr>
+        <p:spPr>
+          <a:xfrm>
+            <a:off x="8252460" y="1911096"/>
+            <a:ext cx="2331720" cy="292608"/>
+          </a:xfrm>
+          <a:prstGeom prst="roundRect">
+            <a:avLst>
+              <a:gd name="adj" fmla="val 6000"/>
+            </a:avLst>
+          </a:prstGeom>
+          <a:solidFill>
+            <a:srgbClr val="FFFFFF"/>
+          </a:solidFill>
+          <a:ln w="15240">
+            <a:solidFill>
+              <a:srgbClr val="0E7C86"/>
+            </a:solidFill>
+          </a:ln>
+          <a:effectLst/>
+        </p:spPr>
+        <p:style>
+          <a:lnRef idx="1">
+            <a:schemeClr val="accent1"/>
+          </a:lnRef>
+          <a:fillRef idx="3">
+            <a:schemeClr val="accent1"/>
+          </a:fillRef>
+          <a:effectRef idx="2">
+            <a:schemeClr val="accent1"/>
+          </a:effectRef>
+          <a:fontRef idx="minor">
+            <a:schemeClr val="lt1"/>
+          </a:fontRef>
+        </p:style>
+        <p:txBody>
+          <a:bodyPr rtlCol="0" anchor="ctr" wrap="square" lIns="25400" rIns="25400" tIns="12700" bIns="12700"/>
+          <a:lstStyle/>
+          <a:p>
+            <a:pPr algn="ctr"/>
+            <a:r>
+              <a:rPr sz="869" b="1">
+                <a:solidFill>
+                  <a:srgbClr val="142640"/>
+                </a:solidFill>
+                <a:latin typeface="Calibri"/>
+              </a:rPr>
+              <a:t>Action / Tool Call</a:t>
+            </a:r>
+          </a:p>
+        </p:txBody>
+      </p:sp>
+      <p:cxnSp>
+        <p:nvCxnSpPr>
+          <p:cNvPr id="15" name="Connector 14"/>
+          <p:cNvCxnSpPr/>
+          <p:nvPr/>
+        </p:nvCxnSpPr>
+        <p:spPr>
+          <a:xfrm>
+            <a:off x="9418320" y="1837944.0"/>
+            <a:ext cx="0" cy="73152.0"/>
+          </a:xfrm>
+          <a:prstGeom prst="line">
+            <a:avLst/>
+          </a:prstGeom>
+          <a:ln w="16510">
+            <a:solidFill>
+              <a:srgbClr val="0E7C86"/>
+            </a:solidFill>
+          </a:ln>
+        </p:spPr>
+        <p:style>
+          <a:lnRef idx="2">
+            <a:schemeClr val="accent1"/>
+          </a:lnRef>
+          <a:fillRef idx="0">
+            <a:schemeClr val="accent1"/>
+          </a:fillRef>
+          <a:effectRef idx="1">
+            <a:schemeClr val="accent1"/>
+          </a:effectRef>
+          <a:fontRef idx="minor">
+            <a:schemeClr val="tx1"/>
+          </a:fontRef>
+        </p:style>
+      </p:cxnSp>
+      <p:sp>
+        <p:nvSpPr>
+          <p:cNvPr id="16" name="Rounded Rectangle 15"/>
+          <p:cNvSpPr/>
+          <p:nvPr/>
+        </p:nvSpPr>
+        <p:spPr>
+          <a:xfrm>
+            <a:off x="8252460" y="2276856"/>
+            <a:ext cx="2331720" cy="292608"/>
+          </a:xfrm>
+          <a:prstGeom prst="roundRect">
+            <a:avLst>
+              <a:gd name="adj" fmla="val 6000"/>
+            </a:avLst>
+          </a:prstGeom>
+          <a:solidFill>
+            <a:srgbClr val="FFFFFF"/>
+          </a:solidFill>
+          <a:ln w="15240">
+            <a:solidFill>
+              <a:srgbClr val="0E7C86"/>
+            </a:solidFill>
+          </a:ln>
+          <a:effectLst/>
+        </p:spPr>
+        <p:style>
+          <a:lnRef idx="1">
+            <a:schemeClr val="accent1"/>
+          </a:lnRef>
+          <a:fillRef idx="3">
+            <a:schemeClr val="accent1"/>
+          </a:fillRef>
+          <a:effectRef idx="2">
+            <a:schemeClr val="accent1"/>
+          </a:effectRef>
+          <a:fontRef idx="minor">
+            <a:schemeClr val="lt1"/>
+          </a:fontRef>
+        </p:style>
+        <p:txBody>
+          <a:bodyPr rtlCol="0" anchor="ctr" wrap="square" lIns="25400" rIns="25400" tIns="12700" bIns="12700"/>
+          <a:lstStyle/>
+          <a:p>
+            <a:pPr algn="ctr"/>
+            <a:r>
+              <a:rPr sz="869" b="1">
+                <a:solidFill>
+                  <a:srgbClr val="142640"/>
+                </a:solidFill>
+                <a:latin typeface="Calibri"/>
+              </a:rPr>
+              <a:t>Observation</a:t>
+            </a:r>
+          </a:p>
+        </p:txBody>
+      </p:sp>
+      <p:cxnSp>
+        <p:nvCxnSpPr>
+          <p:cNvPr id="17" name="Connector 16"/>
+          <p:cNvCxnSpPr/>
+          <p:nvPr/>
+        </p:nvCxnSpPr>
+        <p:spPr>
+          <a:xfrm>
+            <a:off x="9418320" y="2203704.0"/>
+            <a:ext cx="0" cy="73152.0"/>
+          </a:xfrm>
+          <a:prstGeom prst="line">
+            <a:avLst/>
+          </a:prstGeom>
+          <a:ln w="16510">
+            <a:solidFill>
+              <a:srgbClr val="0E7C86"/>
+            </a:solidFill>
+          </a:ln>
+        </p:spPr>
+        <p:style>
+          <a:lnRef idx="2">
+            <a:schemeClr val="accent1"/>
+          </a:lnRef>
+          <a:fillRef idx="0">
+            <a:schemeClr val="accent1"/>
+          </a:fillRef>
+          <a:effectRef idx="1">
+            <a:schemeClr val="accent1"/>
+          </a:effectRef>
+          <a:fontRef idx="minor">
+            <a:schemeClr val="tx1"/>
+          </a:fontRef>
+        </p:style>
+      </p:cxnSp>
+      <p:sp>
+        <p:nvSpPr>
+          <p:cNvPr id="18" name="Rounded Rectangle 17"/>
+          <p:cNvSpPr/>
+          <p:nvPr/>
+        </p:nvSpPr>
+        <p:spPr>
+          <a:xfrm>
+            <a:off x="8252460" y="2642616"/>
+            <a:ext cx="2331720" cy="292608"/>
+          </a:xfrm>
+          <a:prstGeom prst="roundRect">
+            <a:avLst>
+              <a:gd name="adj" fmla="val 6000"/>
+            </a:avLst>
+          </a:prstGeom>
+          <a:solidFill>
+            <a:srgbClr val="FFFFFF"/>
+          </a:solidFill>
+          <a:ln w="15240">
+            <a:solidFill>
+              <a:srgbClr val="0E7C86"/>
+            </a:solidFill>
+          </a:ln>
+          <a:effectLst/>
+        </p:spPr>
+        <p:style>
+          <a:lnRef idx="1">
+            <a:schemeClr val="accent1"/>
+          </a:lnRef>
+          <a:fillRef idx="3">
+            <a:schemeClr val="accent1"/>
+          </a:fillRef>
+          <a:effectRef idx="2">
+            <a:schemeClr val="accent1"/>
+          </a:effectRef>
+          <a:fontRef idx="minor">
+            <a:schemeClr val="lt1"/>
+          </a:fontRef>
+        </p:style>
+        <p:txBody>
+          <a:bodyPr rtlCol="0" anchor="ctr" wrap="square" lIns="25400" rIns="25400" tIns="12700" bIns="12700"/>
+          <a:lstStyle/>
+          <a:p>
+            <a:pPr algn="ctr"/>
+            <a:r>
+              <a:rPr sz="869" b="1">
+                <a:solidFill>
+                  <a:srgbClr val="142640"/>
+                </a:solidFill>
+                <a:latin typeface="Calibri"/>
+              </a:rPr>
+              <a:t>Reason</a:t>
+            </a:r>
+          </a:p>
+        </p:txBody>
+      </p:sp>
+      <p:cxnSp>
+        <p:nvCxnSpPr>
+          <p:cNvPr id="19" name="Connector 18"/>
+          <p:cNvCxnSpPr/>
+          <p:nvPr/>
+        </p:nvCxnSpPr>
+        <p:spPr>
+          <a:xfrm>
+            <a:off x="9418320" y="2569464.0"/>
+            <a:ext cx="0" cy="73152.0"/>
+          </a:xfrm>
+          <a:prstGeom prst="line">
+            <a:avLst/>
+          </a:prstGeom>
+          <a:ln w="16510">
+            <a:solidFill>
+              <a:srgbClr val="0E7C86"/>
+            </a:solidFill>
+          </a:ln>
+        </p:spPr>
+        <p:style>
+          <a:lnRef idx="2">
+            <a:schemeClr val="accent1"/>
+          </a:lnRef>
+          <a:fillRef idx="0">
+            <a:schemeClr val="accent1"/>
+          </a:fillRef>
+          <a:effectRef idx="1">
+            <a:schemeClr val="accent1"/>
+          </a:effectRef>
+          <a:fontRef idx="minor">
+            <a:schemeClr val="tx1"/>
+          </a:fontRef>
+        </p:style>
+      </p:cxnSp>
+      <p:sp>
+        <p:nvSpPr>
+          <p:cNvPr id="20" name="Rounded Rectangle 19"/>
+          <p:cNvSpPr/>
+          <p:nvPr/>
+        </p:nvSpPr>
+        <p:spPr>
+          <a:xfrm>
+            <a:off x="8252460" y="3008376"/>
+            <a:ext cx="2331720" cy="292608"/>
+          </a:xfrm>
+          <a:prstGeom prst="roundRect">
+            <a:avLst>
+              <a:gd name="adj" fmla="val 6000"/>
+            </a:avLst>
+          </a:prstGeom>
+          <a:solidFill>
+            <a:srgbClr val="FFFFFF"/>
+          </a:solidFill>
+          <a:ln w="15240">
+            <a:solidFill>
+              <a:srgbClr val="8A8A8A"/>
+            </a:solidFill>
+            <a:prstDash val="dash"/>
+          </a:ln>
+          <a:effectLst/>
+        </p:spPr>
+        <p:style>
+          <a:lnRef idx="1">
+            <a:schemeClr val="accent1"/>
+          </a:lnRef>
+          <a:fillRef idx="3">
+            <a:schemeClr val="accent1"/>
+          </a:fillRef>
+          <a:effectRef idx="2">
+            <a:schemeClr val="accent1"/>
+          </a:effectRef>
+          <a:fontRef idx="minor">
+            <a:schemeClr val="lt1"/>
+          </a:fontRef>
+        </p:style>
+        <p:txBody>
+          <a:bodyPr rtlCol="0" anchor="ctr" wrap="square" lIns="25400" rIns="25400" tIns="12700" bIns="12700"/>
+          <a:lstStyle/>
+          <a:p>
+            <a:pPr algn="ctr"/>
+            <a:r>
+              <a:rPr sz="869" b="1">
+                <a:solidFill>
+                  <a:srgbClr val="555555"/>
+                </a:solidFill>
+                <a:latin typeface="Calibri"/>
+              </a:rPr>
+              <a:t>(Optional next Tool)</a:t>
+            </a:r>
+          </a:p>
+        </p:txBody>
+      </p:sp>
+      <p:cxnSp>
+        <p:nvCxnSpPr>
+          <p:cNvPr id="21" name="Connector 20"/>
+          <p:cNvCxnSpPr/>
+          <p:nvPr/>
+        </p:nvCxnSpPr>
+        <p:spPr>
+          <a:xfrm>
+            <a:off x="9418320" y="2935224.0"/>
+            <a:ext cx="0" cy="73152.0"/>
+          </a:xfrm>
+          <a:prstGeom prst="line">
+            <a:avLst/>
+          </a:prstGeom>
+          <a:ln w="16510">
+            <a:solidFill>
+              <a:srgbClr val="8A8A8A"/>
+            </a:solidFill>
+            <a:prstDash val="dash"/>
+          </a:ln>
+        </p:spPr>
+        <p:style>
+          <a:lnRef idx="2">
+            <a:schemeClr val="accent1"/>
+          </a:lnRef>
+          <a:fillRef idx="0">
+            <a:schemeClr val="accent1"/>
+          </a:fillRef>
+          <a:effectRef idx="1">
+            <a:schemeClr val="accent1"/>
+          </a:effectRef>
+          <a:fontRef idx="minor">
+            <a:schemeClr val="tx1"/>
+          </a:fontRef>
+        </p:style>
+      </p:cxnSp>
+      <p:sp>
+        <p:nvSpPr>
+          <p:cNvPr id="22" name="Rounded Rectangle 21"/>
+          <p:cNvSpPr/>
+          <p:nvPr/>
+        </p:nvSpPr>
+        <p:spPr>
+          <a:xfrm>
+            <a:off x="8252460" y="3374136"/>
+            <a:ext cx="2331720" cy="292608"/>
+          </a:xfrm>
+          <a:prstGeom prst="roundRect">
+            <a:avLst>
+              <a:gd name="adj" fmla="val 6000"/>
+            </a:avLst>
+          </a:prstGeom>
+          <a:solidFill>
+            <a:srgbClr val="FFFFFF"/>
+          </a:solidFill>
+          <a:ln w="15240">
+            <a:solidFill>
+              <a:srgbClr val="0E7C86"/>
+            </a:solidFill>
+          </a:ln>
+          <a:effectLst/>
+        </p:spPr>
+        <p:style>
+          <a:lnRef idx="1">
+            <a:schemeClr val="accent1"/>
+          </a:lnRef>
+          <a:fillRef idx="3">
+            <a:schemeClr val="accent1"/>
+          </a:fillRef>
+          <a:effectRef idx="2">
+            <a:schemeClr val="accent1"/>
+          </a:effectRef>
+          <a:fontRef idx="minor">
+            <a:schemeClr val="lt1"/>
+          </a:fontRef>
+        </p:style>
+        <p:txBody>
+          <a:bodyPr rtlCol="0" anchor="ctr" wrap="square" lIns="25400" rIns="25400" tIns="12700" bIns="12700"/>
+          <a:lstStyle/>
+          <a:p>
+            <a:pPr algn="ctr"/>
+            <a:r>
+              <a:rPr sz="869" b="1">
+                <a:solidFill>
+                  <a:srgbClr val="142640"/>
+                </a:solidFill>
+                <a:latin typeface="Calibri"/>
+              </a:rPr>
+              <a:t>Final Answer</a:t>
+            </a:r>
+          </a:p>
+        </p:txBody>
+      </p:sp>
+      <p:cxnSp>
+        <p:nvCxnSpPr>
+          <p:cNvPr id="23" name="Connector 22"/>
+          <p:cNvCxnSpPr/>
+          <p:nvPr/>
+        </p:nvCxnSpPr>
+        <p:spPr>
+          <a:xfrm>
+            <a:off x="9418320" y="3300984.0"/>
+            <a:ext cx="0" cy="73152.0"/>
+          </a:xfrm>
+          <a:prstGeom prst="line">
+            <a:avLst/>
+          </a:prstGeom>
+          <a:ln w="16510">
+            <a:solidFill>
+              <a:srgbClr val="8A8A8A"/>
+            </a:solidFill>
+            <a:prstDash val="dash"/>
+          </a:ln>
+        </p:spPr>
+        <p:style>
+          <a:lnRef idx="2">
+            <a:schemeClr val="accent1"/>
+          </a:lnRef>
+          <a:fillRef idx="0">
+            <a:schemeClr val="accent1"/>
+          </a:fillRef>
+          <a:effectRef idx="1">
+            <a:schemeClr val="accent1"/>
+          </a:effectRef>
+          <a:fontRef idx="minor">
+            <a:schemeClr val="tx1"/>
+          </a:fontRef>
+        </p:style>
+      </p:cxnSp>
+      <p:sp>
+        <p:nvSpPr>
+          <p:cNvPr id="24" name="TextBox 23"/>
           <p:cNvSpPr txBox="1"/>
           <p:nvPr/>
         </p:nvSpPr>
         <p:spPr>
           <a:xfrm>
-            <a:off x="685800" y="2057400"/>
-            <a:ext cx="5166360" cy="274320"/>
+            <a:off x="502920" y="3657600"/>
+            <a:ext cx="11201400" cy="219456"/>
           </a:xfrm>
           <a:prstGeom prst="rect">
             <a:avLst/>
@@ -17825,82 +17035,27 @@
               </a:lnSpc>
             </a:pPr>
             <a:r>
-              <a:rPr sz="1250" b="1" i="0">
-                <a:solidFill>
-                  <a:srgbClr val="0E7C86"/>
-                </a:solidFill>
-                <a:latin typeface="Calibri"/>
-              </a:rPr>
-              <a:t>Supervisor Agent</a:t>
-            </a:r>
-          </a:p>
-        </p:txBody>
-      </p:sp>
-      <p:sp>
-        <p:nvSpPr>
-          <p:cNvPr id="13" name="TextBox 12"/>
-          <p:cNvSpPr txBox="1"/>
-          <p:nvPr/>
-        </p:nvSpPr>
-        <p:spPr>
-          <a:xfrm>
-            <a:off x="685800" y="2359152"/>
-            <a:ext cx="5166360" cy="960120"/>
-          </a:xfrm>
-          <a:prstGeom prst="rect">
-            <a:avLst/>
-          </a:prstGeom>
-          <a:noFill/>
-        </p:spPr>
-        <p:txBody>
-          <a:bodyPr wrap="square">
-            <a:spAutoFit/>
-          </a:bodyPr>
-          <a:lstStyle/>
-          <a:p>
-            <a:pPr>
-              <a:spcAft>
-                <a:spcPts val="600"/>
-              </a:spcAft>
-            </a:pPr>
-            <a:r>
-              <a:rPr sz="1100">
-                <a:solidFill>
-                  <a:srgbClr val="142640"/>
-                </a:solidFill>
-                <a:latin typeface="Calibri"/>
-              </a:rPr>
-              <a:t>▪  Orquestación determinista — enrutamiento por palabras clave, sin LLM.</a:t>
-            </a:r>
-          </a:p>
-          <a:p>
-            <a:pPr>
-              <a:spcAft>
-                <a:spcPts val="600"/>
-              </a:spcAft>
-            </a:pPr>
-            <a:r>
-              <a:rPr sz="1100">
-                <a:solidFill>
-                  <a:srgbClr val="142640"/>
-                </a:solidFill>
-                <a:latin typeface="Calibri"/>
-              </a:rPr>
-              <a:t>▪  Permanece fuera del bucle ReAct por diseño (ADR-0011).</a:t>
-            </a:r>
-          </a:p>
-        </p:txBody>
-      </p:sp>
-      <p:sp>
-        <p:nvSpPr>
-          <p:cNvPr id="14" name="Rounded Rectangle 13"/>
+              <a:rPr sz="1050" b="1" i="0">
+                <a:solidFill>
+                  <a:srgbClr val="1F3A5F"/>
+                </a:solidFill>
+                <a:latin typeface="Calibri"/>
+              </a:rPr>
+              <a:t>PATRONES COMPLEMENTARIOS</a:t>
+            </a:r>
+          </a:p>
+        </p:txBody>
+      </p:sp>
+      <p:sp>
+        <p:nvSpPr>
+          <p:cNvPr id="25" name="Rounded Rectangle 24"/>
           <p:cNvSpPr/>
           <p:nvPr/>
         </p:nvSpPr>
         <p:spPr>
           <a:xfrm>
-            <a:off x="6172200" y="1965960"/>
-            <a:ext cx="5532120" cy="1417320"/>
+            <a:off x="502920" y="3913632"/>
+            <a:ext cx="2743200" cy="749808"/>
           </a:xfrm>
           <a:prstGeom prst="roundRect">
             <a:avLst>
@@ -17910,9 +17065,9 @@
           <a:solidFill>
             <a:srgbClr val="F2F2F2"/>
           </a:solidFill>
-          <a:ln w="13970">
+          <a:ln w="12700">
             <a:solidFill>
-              <a:srgbClr val="0E7C86"/>
+              <a:srgbClr val="1E8A4C"/>
             </a:solidFill>
           </a:ln>
           <a:effectLst/>
@@ -17941,14 +17096,14 @@
       </p:sp>
       <p:sp>
         <p:nvSpPr>
-          <p:cNvPr id="15" name="TextBox 14"/>
+          <p:cNvPr id="26" name="TextBox 25"/>
           <p:cNvSpPr txBox="1"/>
           <p:nvPr/>
         </p:nvSpPr>
         <p:spPr>
           <a:xfrm>
-            <a:off x="6355080" y="2057400"/>
-            <a:ext cx="5166360" cy="274320"/>
+            <a:off x="612648" y="3959352"/>
+            <a:ext cx="2523744" cy="237744"/>
           </a:xfrm>
           <a:prstGeom prst="rect">
             <a:avLst/>
@@ -17967,82 +17122,27 @@
               </a:lnSpc>
             </a:pPr>
             <a:r>
-              <a:rPr sz="1250" b="1" i="0">
-                <a:solidFill>
-                  <a:srgbClr val="0E7C86"/>
-                </a:solidFill>
-                <a:latin typeface="Calibri"/>
-              </a:rPr>
-              <a:t>Agentes Especialistas</a:t>
-            </a:r>
-          </a:p>
-        </p:txBody>
-      </p:sp>
-      <p:sp>
-        <p:nvSpPr>
-          <p:cNvPr id="16" name="TextBox 15"/>
+              <a:rPr sz="1050" b="1" i="0">
+                <a:solidFill>
+                  <a:srgbClr val="1E8A4C"/>
+                </a:solidFill>
+                <a:latin typeface="Calibri"/>
+              </a:rPr>
+              <a:t>✓ Multi-Agent</a:t>
+            </a:r>
+          </a:p>
+        </p:txBody>
+      </p:sp>
+      <p:sp>
+        <p:nvSpPr>
+          <p:cNvPr id="27" name="TextBox 26"/>
           <p:cNvSpPr txBox="1"/>
           <p:nvPr/>
         </p:nvSpPr>
         <p:spPr>
           <a:xfrm>
-            <a:off x="6355080" y="2359152"/>
-            <a:ext cx="5166360" cy="960120"/>
-          </a:xfrm>
-          <a:prstGeom prst="rect">
-            <a:avLst/>
-          </a:prstGeom>
-          <a:noFill/>
-        </p:spPr>
-        <p:txBody>
-          <a:bodyPr wrap="square">
-            <a:spAutoFit/>
-          </a:bodyPr>
-          <a:lstStyle/>
-          <a:p>
-            <a:pPr>
-              <a:spcAft>
-                <a:spcPts val="600"/>
-              </a:spcAft>
-            </a:pPr>
-            <a:r>
-              <a:rPr sz="1100">
-                <a:solidFill>
-                  <a:srgbClr val="142640"/>
-                </a:solidFill>
-                <a:latin typeface="Calibri"/>
-              </a:rPr>
-              <a:t>▪  Claims, Broker Services y Commercial Intake ejecutan el bucle ReAct.</a:t>
-            </a:r>
-          </a:p>
-          <a:p>
-            <a:pPr>
-              <a:spcAft>
-                <a:spcPts val="600"/>
-              </a:spcAft>
-            </a:pPr>
-            <a:r>
-              <a:rPr sz="1100">
-                <a:solidFill>
-                  <a:srgbClr val="142640"/>
-                </a:solidFill>
-                <a:latin typeface="Calibri"/>
-              </a:rPr>
-              <a:t>▪  Reason → Action (Tool) → Observation → Reason → ... → Final Answer.</a:t>
-            </a:r>
-          </a:p>
-        </p:txBody>
-      </p:sp>
-      <p:sp>
-        <p:nvSpPr>
-          <p:cNvPr id="17" name="TextBox 16"/>
-          <p:cNvSpPr txBox="1"/>
-          <p:nvPr/>
-        </p:nvSpPr>
-        <p:spPr>
-          <a:xfrm>
-            <a:off x="502920" y="3520440"/>
-            <a:ext cx="5486400" cy="228600"/>
+            <a:off x="612648" y="4206240"/>
+            <a:ext cx="2523744" cy="420624"/>
           </a:xfrm>
           <a:prstGeom prst="rect">
             <a:avLst/>
@@ -18061,444 +17161,27 @@
               </a:lnSpc>
             </a:pPr>
             <a:r>
-              <a:rPr sz="1100" b="1" i="0">
-                <a:solidFill>
-                  <a:srgbClr val="1F3A5F"/>
-                </a:solidFill>
-                <a:latin typeface="Calibri"/>
-              </a:rPr>
-              <a:t>PATRONES COMPLEMENTARIOS YA IMPLEMENTADOS</a:t>
-            </a:r>
-          </a:p>
-        </p:txBody>
-      </p:sp>
-      <p:graphicFrame>
-        <p:nvGraphicFramePr>
-          <p:cNvPr id="18" name="Table 17"/>
-          <p:cNvGraphicFramePr>
-            <a:graphicFrameLocks noGrp="1"/>
-          </p:cNvGraphicFramePr>
-          <p:nvPr/>
-        </p:nvGraphicFramePr>
-        <p:xfrm>
-          <a:off x="502920" y="3794760"/>
-          <a:ext cx="11201400" cy="1691640"/>
-        </p:xfrm>
-        <a:graphic>
-          <a:graphicData uri="http://schemas.openxmlformats.org/drawingml/2006/table">
-            <a:tbl>
-              <a:tblPr firstRow="1" bandRow="1">
-                <a:tableStyleId>{5C22544A-7EE6-4342-B048-85BDC9FD1C3A}</a:tableStyleId>
-              </a:tblPr>
-              <a:tblGrid>
-                <a:gridCol w="2103120"/>
-                <a:gridCol w="7178040"/>
-                <a:gridCol w="1920240"/>
-              </a:tblGrid>
-              <a:tr h="281940">
-                <a:tc>
-                  <a:txBody>
-                    <a:bodyPr/>
-                    <a:lstStyle/>
-                    <a:p>
-                      <a:r>
-                        <a:rPr b="1" sz="1050">
-                          <a:solidFill>
-                            <a:srgbClr val="FFFFFF"/>
-                          </a:solidFill>
-                        </a:rPr>
-                        <a:t>Patrón</a:t>
-                      </a:r>
-                    </a:p>
-                  </a:txBody>
-                  <a:tcPr anchor="ctr" marL="50800" marR="50800">
-                    <a:solidFill>
-                      <a:srgbClr val="1F3A5F"/>
-                    </a:solidFill>
-                  </a:tcPr>
-                </a:tc>
-                <a:tc>
-                  <a:txBody>
-                    <a:bodyPr/>
-                    <a:lstStyle/>
-                    <a:p>
-                      <a:r>
-                        <a:rPr b="1" sz="1050">
-                          <a:solidFill>
-                            <a:srgbClr val="FFFFFF"/>
-                          </a:solidFill>
-                        </a:rPr>
-                        <a:t>Cómo se implementa</a:t>
-                      </a:r>
-                    </a:p>
-                  </a:txBody>
-                  <a:tcPr anchor="ctr" marL="50800" marR="50800">
-                    <a:solidFill>
-                      <a:srgbClr val="1F3A5F"/>
-                    </a:solidFill>
-                  </a:tcPr>
-                </a:tc>
-                <a:tc>
-                  <a:txBody>
-                    <a:bodyPr/>
-                    <a:lstStyle/>
-                    <a:p>
-                      <a:r>
-                        <a:rPr b="1" sz="1050">
-                          <a:solidFill>
-                            <a:srgbClr val="FFFFFF"/>
-                          </a:solidFill>
-                        </a:rPr>
-                        <a:t>Estado</a:t>
-                      </a:r>
-                    </a:p>
-                  </a:txBody>
-                  <a:tcPr anchor="ctr" marL="50800" marR="50800">
-                    <a:solidFill>
-                      <a:srgbClr val="1F3A5F"/>
-                    </a:solidFill>
-                  </a:tcPr>
-                </a:tc>
-              </a:tr>
-              <a:tr h="281940">
-                <a:tc>
-                  <a:txBody>
-                    <a:bodyPr wrap="square"/>
-                    <a:lstStyle/>
-                    <a:p>
-                      <a:r>
-                        <a:rPr sz="969">
-                          <a:solidFill>
-                            <a:srgbClr val="142640"/>
-                          </a:solidFill>
-                        </a:rPr>
-                        <a:t>Multi-Agent</a:t>
-                      </a:r>
-                    </a:p>
-                  </a:txBody>
-                  <a:tcPr anchor="ctr" marL="50800" marR="50800">
-                    <a:solidFill>
-                      <a:srgbClr val="FFFFFF"/>
-                    </a:solidFill>
-                  </a:tcPr>
-                </a:tc>
-                <a:tc>
-                  <a:txBody>
-                    <a:bodyPr wrap="square"/>
-                    <a:lstStyle/>
-                    <a:p>
-                      <a:r>
-                        <a:rPr sz="969">
-                          <a:solidFill>
-                            <a:srgbClr val="142640"/>
-                          </a:solidFill>
-                        </a:rPr>
-                        <a:t>Supervisor + Claims Agent + Broker Agent + Commercial Intake Agent</a:t>
-                      </a:r>
-                    </a:p>
-                  </a:txBody>
-                  <a:tcPr anchor="ctr" marL="50800" marR="50800">
-                    <a:solidFill>
-                      <a:srgbClr val="FFFFFF"/>
-                    </a:solidFill>
-                  </a:tcPr>
-                </a:tc>
-                <a:tc>
-                  <a:txBody>
-                    <a:bodyPr wrap="square"/>
-                    <a:lstStyle/>
-                    <a:p>
-                      <a:r>
-                        <a:rPr sz="969">
-                          <a:solidFill>
-                            <a:srgbClr val="142640"/>
-                          </a:solidFill>
-                        </a:rPr>
-                        <a:t>Implementado</a:t>
-                      </a:r>
-                    </a:p>
-                  </a:txBody>
-                  <a:tcPr anchor="ctr" marL="50800" marR="50800">
-                    <a:solidFill>
-                      <a:srgbClr val="FFFFFF"/>
-                    </a:solidFill>
-                  </a:tcPr>
-                </a:tc>
-              </a:tr>
-              <a:tr h="281940">
-                <a:tc>
-                  <a:txBody>
-                    <a:bodyPr wrap="square"/>
-                    <a:lstStyle/>
-                    <a:p>
-                      <a:r>
-                        <a:rPr sz="969">
-                          <a:solidFill>
-                            <a:srgbClr val="142640"/>
-                          </a:solidFill>
-                        </a:rPr>
-                        <a:t>Planner–Executor</a:t>
-                      </a:r>
-                    </a:p>
-                  </a:txBody>
-                  <a:tcPr anchor="ctr" marL="50800" marR="50800">
-                    <a:solidFill>
-                      <a:srgbClr val="F2F2F2"/>
-                    </a:solidFill>
-                  </a:tcPr>
-                </a:tc>
-                <a:tc>
-                  <a:txBody>
-                    <a:bodyPr wrap="square"/>
-                    <a:lstStyle/>
-                    <a:p>
-                      <a:r>
-                        <a:rPr sz="969">
-                          <a:solidFill>
-                            <a:srgbClr val="142640"/>
-                          </a:solidFill>
-                        </a:rPr>
-                        <a:t>El Supervisor enruta (planifica); cada agente especialista ejecuta</a:t>
-                      </a:r>
-                    </a:p>
-                  </a:txBody>
-                  <a:tcPr anchor="ctr" marL="50800" marR="50800">
-                    <a:solidFill>
-                      <a:srgbClr val="F2F2F2"/>
-                    </a:solidFill>
-                  </a:tcPr>
-                </a:tc>
-                <a:tc>
-                  <a:txBody>
-                    <a:bodyPr wrap="square"/>
-                    <a:lstStyle/>
-                    <a:p>
-                      <a:r>
-                        <a:rPr sz="969">
-                          <a:solidFill>
-                            <a:srgbClr val="142640"/>
-                          </a:solidFill>
-                        </a:rPr>
-                        <a:t>Implementado</a:t>
-                      </a:r>
-                    </a:p>
-                  </a:txBody>
-                  <a:tcPr anchor="ctr" marL="50800" marR="50800">
-                    <a:solidFill>
-                      <a:srgbClr val="F2F2F2"/>
-                    </a:solidFill>
-                  </a:tcPr>
-                </a:tc>
-              </a:tr>
-              <a:tr h="281940">
-                <a:tc>
-                  <a:txBody>
-                    <a:bodyPr wrap="square"/>
-                    <a:lstStyle/>
-                    <a:p>
-                      <a:r>
-                        <a:rPr sz="969">
-                          <a:solidFill>
-                            <a:srgbClr val="142640"/>
-                          </a:solidFill>
-                        </a:rPr>
-                        <a:t>Memory</a:t>
-                      </a:r>
-                    </a:p>
-                  </a:txBody>
-                  <a:tcPr anchor="ctr" marL="50800" marR="50800">
-                    <a:solidFill>
-                      <a:srgbClr val="FFFFFF"/>
-                    </a:solidFill>
-                  </a:tcPr>
-                </a:tc>
-                <a:tc>
-                  <a:txBody>
-                    <a:bodyPr wrap="square"/>
-                    <a:lstStyle/>
-                    <a:p>
-                      <a:r>
-                        <a:rPr sz="969">
-                          <a:solidFill>
-                            <a:srgbClr val="142640"/>
-                          </a:solidFill>
-                        </a:rPr>
-                        <a:t>Memoria conversacional en Cosmos DB, entre dominios</a:t>
-                      </a:r>
-                    </a:p>
-                  </a:txBody>
-                  <a:tcPr anchor="ctr" marL="50800" marR="50800">
-                    <a:solidFill>
-                      <a:srgbClr val="FFFFFF"/>
-                    </a:solidFill>
-                  </a:tcPr>
-                </a:tc>
-                <a:tc>
-                  <a:txBody>
-                    <a:bodyPr wrap="square"/>
-                    <a:lstStyle/>
-                    <a:p>
-                      <a:r>
-                        <a:rPr sz="969">
-                          <a:solidFill>
-                            <a:srgbClr val="142640"/>
-                          </a:solidFill>
-                        </a:rPr>
-                        <a:t>Implementado</a:t>
-                      </a:r>
-                    </a:p>
-                  </a:txBody>
-                  <a:tcPr anchor="ctr" marL="50800" marR="50800">
-                    <a:solidFill>
-                      <a:srgbClr val="FFFFFF"/>
-                    </a:solidFill>
-                  </a:tcPr>
-                </a:tc>
-              </a:tr>
-              <a:tr h="281940">
-                <a:tc>
-                  <a:txBody>
-                    <a:bodyPr wrap="square"/>
-                    <a:lstStyle/>
-                    <a:p>
-                      <a:r>
-                        <a:rPr sz="969">
-                          <a:solidFill>
-                            <a:srgbClr val="142640"/>
-                          </a:solidFill>
-                        </a:rPr>
-                        <a:t>Guardrails</a:t>
-                      </a:r>
-                    </a:p>
-                  </a:txBody>
-                  <a:tcPr anchor="ctr" marL="50800" marR="50800">
-                    <a:solidFill>
-                      <a:srgbClr val="F2F2F2"/>
-                    </a:solidFill>
-                  </a:tcPr>
-                </a:tc>
-                <a:tc>
-                  <a:txBody>
-                    <a:bodyPr wrap="square"/>
-                    <a:lstStyle/>
-                    <a:p>
-                      <a:r>
-                        <a:rPr sz="969">
-                          <a:solidFill>
-                            <a:srgbClr val="142640"/>
-                          </a:solidFill>
-                        </a:rPr>
-                        <a:t>Entra ID + JWT/JWKS + Tool Calling determinista</a:t>
-                      </a:r>
-                    </a:p>
-                  </a:txBody>
-                  <a:tcPr anchor="ctr" marL="50800" marR="50800">
-                    <a:solidFill>
-                      <a:srgbClr val="F2F2F2"/>
-                    </a:solidFill>
-                  </a:tcPr>
-                </a:tc>
-                <a:tc>
-                  <a:txBody>
-                    <a:bodyPr wrap="square"/>
-                    <a:lstStyle/>
-                    <a:p>
-                      <a:r>
-                        <a:rPr sz="969">
-                          <a:solidFill>
-                            <a:srgbClr val="142640"/>
-                          </a:solidFill>
-                        </a:rPr>
-                        <a:t>Implementado</a:t>
-                      </a:r>
-                    </a:p>
-                  </a:txBody>
-                  <a:tcPr anchor="ctr" marL="50800" marR="50800">
-                    <a:solidFill>
-                      <a:srgbClr val="F2F2F2"/>
-                    </a:solidFill>
-                  </a:tcPr>
-                </a:tc>
-              </a:tr>
-              <a:tr h="281940">
-                <a:tc>
-                  <a:txBody>
-                    <a:bodyPr wrap="square"/>
-                    <a:lstStyle/>
-                    <a:p>
-                      <a:r>
-                        <a:rPr sz="969">
-                          <a:solidFill>
-                            <a:srgbClr val="142640"/>
-                          </a:solidFill>
-                        </a:rPr>
-                        <a:t>RAG</a:t>
-                      </a:r>
-                    </a:p>
-                  </a:txBody>
-                  <a:tcPr anchor="ctr" marL="50800" marR="50800">
-                    <a:solidFill>
-                      <a:srgbClr val="FFFFFF"/>
-                    </a:solidFill>
-                  </a:tcPr>
-                </a:tc>
-                <a:tc>
-                  <a:txBody>
-                    <a:bodyPr wrap="square"/>
-                    <a:lstStyle/>
-                    <a:p>
-                      <a:r>
-                        <a:rPr sz="969">
-                          <a:solidFill>
-                            <a:srgbClr val="142640"/>
-                          </a:solidFill>
-                        </a:rPr>
-                        <a:t>Azure AI Search integrado; hoy con datos sintéticos</a:t>
-                      </a:r>
-                    </a:p>
-                  </a:txBody>
-                  <a:tcPr anchor="ctr" marL="50800" marR="50800">
-                    <a:solidFill>
-                      <a:srgbClr val="FFFFFF"/>
-                    </a:solidFill>
-                  </a:tcPr>
-                </a:tc>
-                <a:tc>
-                  <a:txBody>
-                    <a:bodyPr wrap="square"/>
-                    <a:lstStyle/>
-                    <a:p>
-                      <a:r>
-                        <a:rPr sz="969">
-                          <a:solidFill>
-                            <a:srgbClr val="142640"/>
-                          </a:solidFill>
-                        </a:rPr>
-                        <a:t>Arquitectura lista</a:t>
-                      </a:r>
-                    </a:p>
-                  </a:txBody>
-                  <a:tcPr anchor="ctr" marL="50800" marR="50800">
-                    <a:solidFill>
-                      <a:srgbClr val="FFFFFF"/>
-                    </a:solidFill>
-                  </a:tcPr>
-                </a:tc>
-              </a:tr>
-            </a:tbl>
-          </a:graphicData>
-        </a:graphic>
-      </p:graphicFrame>
-      <p:sp>
-        <p:nvSpPr>
-          <p:cNvPr id="19" name="Rounded Rectangle 18"/>
+              <a:rPr sz="869" b="0" i="0">
+                <a:solidFill>
+                  <a:srgbClr val="142640"/>
+                </a:solidFill>
+                <a:latin typeface="Calibri"/>
+              </a:rPr>
+              <a:t>Supervisor + agentes especialistas</a:t>
+            </a:r>
+          </a:p>
+        </p:txBody>
+      </p:sp>
+      <p:sp>
+        <p:nvSpPr>
+          <p:cNvPr id="28" name="Rounded Rectangle 27"/>
           <p:cNvSpPr/>
           <p:nvPr/>
         </p:nvSpPr>
         <p:spPr>
           <a:xfrm>
-            <a:off x="502920" y="5623560"/>
-            <a:ext cx="5532120" cy="822960"/>
+            <a:off x="3319272" y="3913632"/>
+            <a:ext cx="2743200" cy="749808"/>
           </a:xfrm>
           <a:prstGeom prst="roundRect">
             <a:avLst>
@@ -18508,7 +17191,385 @@
           <a:solidFill>
             <a:srgbClr val="F2F2F2"/>
           </a:solidFill>
-          <a:ln w="13970">
+          <a:ln w="12700">
+            <a:solidFill>
+              <a:srgbClr val="1E8A4C"/>
+            </a:solidFill>
+          </a:ln>
+          <a:effectLst/>
+        </p:spPr>
+        <p:style>
+          <a:lnRef idx="1">
+            <a:schemeClr val="accent1"/>
+          </a:lnRef>
+          <a:fillRef idx="3">
+            <a:schemeClr val="accent1"/>
+          </a:fillRef>
+          <a:effectRef idx="2">
+            <a:schemeClr val="accent1"/>
+          </a:effectRef>
+          <a:fontRef idx="minor">
+            <a:schemeClr val="lt1"/>
+          </a:fontRef>
+        </p:style>
+        <p:txBody>
+          <a:bodyPr rtlCol="0" anchor="ctr"/>
+          <a:lstStyle/>
+          <a:p>
+            <a:pPr algn="ctr"/>
+          </a:p>
+        </p:txBody>
+      </p:sp>
+      <p:sp>
+        <p:nvSpPr>
+          <p:cNvPr id="29" name="TextBox 28"/>
+          <p:cNvSpPr txBox="1"/>
+          <p:nvPr/>
+        </p:nvSpPr>
+        <p:spPr>
+          <a:xfrm>
+            <a:off x="3429000" y="3959352"/>
+            <a:ext cx="2523744" cy="237744"/>
+          </a:xfrm>
+          <a:prstGeom prst="rect">
+            <a:avLst/>
+          </a:prstGeom>
+          <a:noFill/>
+        </p:spPr>
+        <p:txBody>
+          <a:bodyPr wrap="square" anchor="t" lIns="50800" rIns="50800" tIns="25400" bIns="25400">
+            <a:spAutoFit/>
+          </a:bodyPr>
+          <a:lstStyle/>
+          <a:p>
+            <a:pPr algn="l">
+              <a:lnSpc>
+                <a:spcPct val="100000"/>
+              </a:lnSpc>
+            </a:pPr>
+            <a:r>
+              <a:rPr sz="1050" b="1" i="0">
+                <a:solidFill>
+                  <a:srgbClr val="1E8A4C"/>
+                </a:solidFill>
+                <a:latin typeface="Calibri"/>
+              </a:rPr>
+              <a:t>✓ Planner–Executor</a:t>
+            </a:r>
+          </a:p>
+        </p:txBody>
+      </p:sp>
+      <p:sp>
+        <p:nvSpPr>
+          <p:cNvPr id="30" name="TextBox 29"/>
+          <p:cNvSpPr txBox="1"/>
+          <p:nvPr/>
+        </p:nvSpPr>
+        <p:spPr>
+          <a:xfrm>
+            <a:off x="3429000" y="4206240"/>
+            <a:ext cx="2523744" cy="420624"/>
+          </a:xfrm>
+          <a:prstGeom prst="rect">
+            <a:avLst/>
+          </a:prstGeom>
+          <a:noFill/>
+        </p:spPr>
+        <p:txBody>
+          <a:bodyPr wrap="square" anchor="t" lIns="50800" rIns="50800" tIns="25400" bIns="25400">
+            <a:spAutoFit/>
+          </a:bodyPr>
+          <a:lstStyle/>
+          <a:p>
+            <a:pPr algn="l">
+              <a:lnSpc>
+                <a:spcPct val="100000"/>
+              </a:lnSpc>
+            </a:pPr>
+            <a:r>
+              <a:rPr sz="869" b="0" i="0">
+                <a:solidFill>
+                  <a:srgbClr val="142640"/>
+                </a:solidFill>
+                <a:latin typeface="Calibri"/>
+              </a:rPr>
+              <a:t>Supervisor enruta; cada agente ejecuta</a:t>
+            </a:r>
+          </a:p>
+        </p:txBody>
+      </p:sp>
+      <p:sp>
+        <p:nvSpPr>
+          <p:cNvPr id="31" name="Rounded Rectangle 30"/>
+          <p:cNvSpPr/>
+          <p:nvPr/>
+        </p:nvSpPr>
+        <p:spPr>
+          <a:xfrm>
+            <a:off x="6135624" y="3913632"/>
+            <a:ext cx="2743200" cy="749808"/>
+          </a:xfrm>
+          <a:prstGeom prst="roundRect">
+            <a:avLst>
+              <a:gd name="adj" fmla="val 6000"/>
+            </a:avLst>
+          </a:prstGeom>
+          <a:solidFill>
+            <a:srgbClr val="F2F2F2"/>
+          </a:solidFill>
+          <a:ln w="12700">
+            <a:solidFill>
+              <a:srgbClr val="1E8A4C"/>
+            </a:solidFill>
+          </a:ln>
+          <a:effectLst/>
+        </p:spPr>
+        <p:style>
+          <a:lnRef idx="1">
+            <a:schemeClr val="accent1"/>
+          </a:lnRef>
+          <a:fillRef idx="3">
+            <a:schemeClr val="accent1"/>
+          </a:fillRef>
+          <a:effectRef idx="2">
+            <a:schemeClr val="accent1"/>
+          </a:effectRef>
+          <a:fontRef idx="minor">
+            <a:schemeClr val="lt1"/>
+          </a:fontRef>
+        </p:style>
+        <p:txBody>
+          <a:bodyPr rtlCol="0" anchor="ctr"/>
+          <a:lstStyle/>
+          <a:p>
+            <a:pPr algn="ctr"/>
+          </a:p>
+        </p:txBody>
+      </p:sp>
+      <p:sp>
+        <p:nvSpPr>
+          <p:cNvPr id="32" name="TextBox 31"/>
+          <p:cNvSpPr txBox="1"/>
+          <p:nvPr/>
+        </p:nvSpPr>
+        <p:spPr>
+          <a:xfrm>
+            <a:off x="6245352" y="3959352"/>
+            <a:ext cx="2523744" cy="237744"/>
+          </a:xfrm>
+          <a:prstGeom prst="rect">
+            <a:avLst/>
+          </a:prstGeom>
+          <a:noFill/>
+        </p:spPr>
+        <p:txBody>
+          <a:bodyPr wrap="square" anchor="t" lIns="50800" rIns="50800" tIns="25400" bIns="25400">
+            <a:spAutoFit/>
+          </a:bodyPr>
+          <a:lstStyle/>
+          <a:p>
+            <a:pPr algn="l">
+              <a:lnSpc>
+                <a:spcPct val="100000"/>
+              </a:lnSpc>
+            </a:pPr>
+            <a:r>
+              <a:rPr sz="1050" b="1" i="0">
+                <a:solidFill>
+                  <a:srgbClr val="1E8A4C"/>
+                </a:solidFill>
+                <a:latin typeface="Calibri"/>
+              </a:rPr>
+              <a:t>✓ Memory</a:t>
+            </a:r>
+          </a:p>
+        </p:txBody>
+      </p:sp>
+      <p:sp>
+        <p:nvSpPr>
+          <p:cNvPr id="33" name="TextBox 32"/>
+          <p:cNvSpPr txBox="1"/>
+          <p:nvPr/>
+        </p:nvSpPr>
+        <p:spPr>
+          <a:xfrm>
+            <a:off x="6245352" y="4206240"/>
+            <a:ext cx="2523744" cy="420624"/>
+          </a:xfrm>
+          <a:prstGeom prst="rect">
+            <a:avLst/>
+          </a:prstGeom>
+          <a:noFill/>
+        </p:spPr>
+        <p:txBody>
+          <a:bodyPr wrap="square" anchor="t" lIns="50800" rIns="50800" tIns="25400" bIns="25400">
+            <a:spAutoFit/>
+          </a:bodyPr>
+          <a:lstStyle/>
+          <a:p>
+            <a:pPr algn="l">
+              <a:lnSpc>
+                <a:spcPct val="100000"/>
+              </a:lnSpc>
+            </a:pPr>
+            <a:r>
+              <a:rPr sz="869" b="0" i="0">
+                <a:solidFill>
+                  <a:srgbClr val="142640"/>
+                </a:solidFill>
+                <a:latin typeface="Calibri"/>
+              </a:rPr>
+              <a:t>Memoria conversacional / Cosmos DB</a:t>
+            </a:r>
+          </a:p>
+        </p:txBody>
+      </p:sp>
+      <p:sp>
+        <p:nvSpPr>
+          <p:cNvPr id="34" name="Rounded Rectangle 33"/>
+          <p:cNvSpPr/>
+          <p:nvPr/>
+        </p:nvSpPr>
+        <p:spPr>
+          <a:xfrm>
+            <a:off x="8951976" y="3913632"/>
+            <a:ext cx="2743200" cy="749808"/>
+          </a:xfrm>
+          <a:prstGeom prst="roundRect">
+            <a:avLst>
+              <a:gd name="adj" fmla="val 6000"/>
+            </a:avLst>
+          </a:prstGeom>
+          <a:solidFill>
+            <a:srgbClr val="F2F2F2"/>
+          </a:solidFill>
+          <a:ln w="12700">
+            <a:solidFill>
+              <a:srgbClr val="1E8A4C"/>
+            </a:solidFill>
+          </a:ln>
+          <a:effectLst/>
+        </p:spPr>
+        <p:style>
+          <a:lnRef idx="1">
+            <a:schemeClr val="accent1"/>
+          </a:lnRef>
+          <a:fillRef idx="3">
+            <a:schemeClr val="accent1"/>
+          </a:fillRef>
+          <a:effectRef idx="2">
+            <a:schemeClr val="accent1"/>
+          </a:effectRef>
+          <a:fontRef idx="minor">
+            <a:schemeClr val="lt1"/>
+          </a:fontRef>
+        </p:style>
+        <p:txBody>
+          <a:bodyPr rtlCol="0" anchor="ctr"/>
+          <a:lstStyle/>
+          <a:p>
+            <a:pPr algn="ctr"/>
+          </a:p>
+        </p:txBody>
+      </p:sp>
+      <p:sp>
+        <p:nvSpPr>
+          <p:cNvPr id="35" name="TextBox 34"/>
+          <p:cNvSpPr txBox="1"/>
+          <p:nvPr/>
+        </p:nvSpPr>
+        <p:spPr>
+          <a:xfrm>
+            <a:off x="9061704" y="3959352"/>
+            <a:ext cx="2523744" cy="237744"/>
+          </a:xfrm>
+          <a:prstGeom prst="rect">
+            <a:avLst/>
+          </a:prstGeom>
+          <a:noFill/>
+        </p:spPr>
+        <p:txBody>
+          <a:bodyPr wrap="square" anchor="t" lIns="50800" rIns="50800" tIns="25400" bIns="25400">
+            <a:spAutoFit/>
+          </a:bodyPr>
+          <a:lstStyle/>
+          <a:p>
+            <a:pPr algn="l">
+              <a:lnSpc>
+                <a:spcPct val="100000"/>
+              </a:lnSpc>
+            </a:pPr>
+            <a:r>
+              <a:rPr sz="1050" b="1" i="0">
+                <a:solidFill>
+                  <a:srgbClr val="1E8A4C"/>
+                </a:solidFill>
+                <a:latin typeface="Calibri"/>
+              </a:rPr>
+              <a:t>✓ Guardrails</a:t>
+            </a:r>
+          </a:p>
+        </p:txBody>
+      </p:sp>
+      <p:sp>
+        <p:nvSpPr>
+          <p:cNvPr id="36" name="TextBox 35"/>
+          <p:cNvSpPr txBox="1"/>
+          <p:nvPr/>
+        </p:nvSpPr>
+        <p:spPr>
+          <a:xfrm>
+            <a:off x="9061704" y="4206240"/>
+            <a:ext cx="2523744" cy="420624"/>
+          </a:xfrm>
+          <a:prstGeom prst="rect">
+            <a:avLst/>
+          </a:prstGeom>
+          <a:noFill/>
+        </p:spPr>
+        <p:txBody>
+          <a:bodyPr wrap="square" anchor="t" lIns="50800" rIns="50800" tIns="25400" bIns="25400">
+            <a:spAutoFit/>
+          </a:bodyPr>
+          <a:lstStyle/>
+          <a:p>
+            <a:pPr algn="l">
+              <a:lnSpc>
+                <a:spcPct val="100000"/>
+              </a:lnSpc>
+            </a:pPr>
+            <a:r>
+              <a:rPr sz="869" b="0" i="0">
+                <a:solidFill>
+                  <a:srgbClr val="142640"/>
+                </a:solidFill>
+                <a:latin typeface="Calibri"/>
+              </a:rPr>
+              <a:t>Entra ID + JWT/JWKS + Tools deterministas</a:t>
+            </a:r>
+          </a:p>
+        </p:txBody>
+      </p:sp>
+      <p:sp>
+        <p:nvSpPr>
+          <p:cNvPr id="37" name="Rounded Rectangle 36"/>
+          <p:cNvSpPr/>
+          <p:nvPr/>
+        </p:nvSpPr>
+        <p:spPr>
+          <a:xfrm>
+            <a:off x="502920" y="4773168"/>
+            <a:ext cx="11201400" cy="566928"/>
+          </a:xfrm>
+          <a:prstGeom prst="roundRect">
+            <a:avLst>
+              <a:gd name="adj" fmla="val 6000"/>
+            </a:avLst>
+          </a:prstGeom>
+          <a:solidFill>
+            <a:srgbClr val="F2F2F2"/>
+          </a:solidFill>
+          <a:ln w="12700">
             <a:solidFill>
               <a:srgbClr val="B87A00"/>
             </a:solidFill>
@@ -18539,14 +17600,14 @@
       </p:sp>
       <p:sp>
         <p:nvSpPr>
-          <p:cNvPr id="20" name="TextBox 19"/>
+          <p:cNvPr id="38" name="TextBox 37"/>
           <p:cNvSpPr txBox="1"/>
           <p:nvPr/>
         </p:nvSpPr>
         <p:spPr>
           <a:xfrm>
-            <a:off x="685800" y="5687568"/>
-            <a:ext cx="5166360" cy="256032"/>
+            <a:off x="685800" y="4818888"/>
+            <a:ext cx="1828800" cy="219456"/>
           </a:xfrm>
           <a:prstGeom prst="rect">
             <a:avLst/>
@@ -18571,21 +17632,21 @@
                 </a:solidFill>
                 <a:latin typeface="Calibri"/>
               </a:rPr>
-              <a:t>EVOLUCIÓN FUTURA (no implementada)</a:t>
-            </a:r>
-          </a:p>
-        </p:txBody>
-      </p:sp>
-      <p:sp>
-        <p:nvSpPr>
-          <p:cNvPr id="21" name="TextBox 20"/>
+              <a:t>RAG</a:t>
+            </a:r>
+          </a:p>
+        </p:txBody>
+      </p:sp>
+      <p:sp>
+        <p:nvSpPr>
+          <p:cNvPr id="39" name="TextBox 38"/>
           <p:cNvSpPr txBox="1"/>
           <p:nvPr/>
         </p:nvSpPr>
         <p:spPr>
           <a:xfrm>
-            <a:off x="685800" y="5943600"/>
-            <a:ext cx="5166360" cy="457200"/>
+            <a:off x="2194560" y="4818888"/>
+            <a:ext cx="9326880" cy="457200"/>
           </a:xfrm>
           <a:prstGeom prst="rect">
             <a:avLst/>
@@ -18604,27 +17665,154 @@
               </a:lnSpc>
             </a:pPr>
             <a:r>
-              <a:rPr sz="1000" b="0" i="0">
+              <a:rPr sz="930" b="0" i="0">
                 <a:solidFill>
                   <a:srgbClr val="142640"/>
                 </a:solidFill>
                 <a:latin typeface="Calibri"/>
               </a:rPr>
-              <a:t>LLM-as-a-Judge · Self-Reflection — evaluarían o corregirían el razonamiento del propio agente; ReAct ya no está en esta lista: es el patrón primario implementado.</a:t>
-            </a:r>
-          </a:p>
-        </p:txBody>
-      </p:sp>
-      <p:sp>
-        <p:nvSpPr>
-          <p:cNvPr id="22" name="Rounded Rectangle 21"/>
+              <a:t>Azure AI Search: arquitectura disponible para fundamentar respuestas en documentación empresarial. Uso actual limitado a datos sintéticos — sin exagerar el alcance.</a:t>
+            </a:r>
+          </a:p>
+        </p:txBody>
+      </p:sp>
+      <p:sp>
+        <p:nvSpPr>
+          <p:cNvPr id="40" name="Rounded Rectangle 39"/>
           <p:cNvSpPr/>
           <p:nvPr/>
         </p:nvSpPr>
         <p:spPr>
           <a:xfrm>
-            <a:off x="6172200" y="5623560"/>
-            <a:ext cx="5532120" cy="822960"/>
+            <a:off x="502920" y="5468112"/>
+            <a:ext cx="5532120" cy="960120"/>
+          </a:xfrm>
+          <a:prstGeom prst="roundRect">
+            <a:avLst>
+              <a:gd name="adj" fmla="val 6000"/>
+            </a:avLst>
+          </a:prstGeom>
+          <a:solidFill>
+            <a:srgbClr val="F2F2F2"/>
+          </a:solidFill>
+          <a:ln w="12700">
+            <a:solidFill>
+              <a:srgbClr val="8A8A8A"/>
+            </a:solidFill>
+            <a:prstDash val="dash"/>
+          </a:ln>
+          <a:effectLst/>
+        </p:spPr>
+        <p:style>
+          <a:lnRef idx="1">
+            <a:schemeClr val="accent1"/>
+          </a:lnRef>
+          <a:fillRef idx="3">
+            <a:schemeClr val="accent1"/>
+          </a:fillRef>
+          <a:effectRef idx="2">
+            <a:schemeClr val="accent1"/>
+          </a:effectRef>
+          <a:fontRef idx="minor">
+            <a:schemeClr val="lt1"/>
+          </a:fontRef>
+        </p:style>
+        <p:txBody>
+          <a:bodyPr rtlCol="0" anchor="ctr"/>
+          <a:lstStyle/>
+          <a:p>
+            <a:pPr algn="ctr"/>
+          </a:p>
+        </p:txBody>
+      </p:sp>
+      <p:sp>
+        <p:nvSpPr>
+          <p:cNvPr id="41" name="TextBox 40"/>
+          <p:cNvSpPr txBox="1"/>
+          <p:nvPr/>
+        </p:nvSpPr>
+        <p:spPr>
+          <a:xfrm>
+            <a:off x="685800" y="5532120"/>
+            <a:ext cx="5166360" cy="237744"/>
+          </a:xfrm>
+          <a:prstGeom prst="rect">
+            <a:avLst/>
+          </a:prstGeom>
+          <a:noFill/>
+        </p:spPr>
+        <p:txBody>
+          <a:bodyPr wrap="square" anchor="t" lIns="50800" rIns="50800" tIns="25400" bIns="25400">
+            <a:spAutoFit/>
+          </a:bodyPr>
+          <a:lstStyle/>
+          <a:p>
+            <a:pPr algn="l">
+              <a:lnSpc>
+                <a:spcPct val="100000"/>
+              </a:lnSpc>
+            </a:pPr>
+            <a:r>
+              <a:rPr sz="1000" b="1" i="0">
+                <a:solidFill>
+                  <a:srgbClr val="555555"/>
+                </a:solidFill>
+                <a:latin typeface="Calibri"/>
+              </a:rPr>
+              <a:t>EVOLUCIÓN FUTURA (no implementada)</a:t>
+            </a:r>
+          </a:p>
+        </p:txBody>
+      </p:sp>
+      <p:sp>
+        <p:nvSpPr>
+          <p:cNvPr id="42" name="TextBox 41"/>
+          <p:cNvSpPr txBox="1"/>
+          <p:nvPr/>
+        </p:nvSpPr>
+        <p:spPr>
+          <a:xfrm>
+            <a:off x="685800" y="5788152"/>
+            <a:ext cx="5166360" cy="594360"/>
+          </a:xfrm>
+          <a:prstGeom prst="rect">
+            <a:avLst/>
+          </a:prstGeom>
+          <a:noFill/>
+        </p:spPr>
+        <p:txBody>
+          <a:bodyPr wrap="square" anchor="t" lIns="50800" rIns="50800" tIns="25400" bIns="25400">
+            <a:spAutoFit/>
+          </a:bodyPr>
+          <a:lstStyle/>
+          <a:p>
+            <a:pPr algn="l">
+              <a:lnSpc>
+                <a:spcPct val="100000"/>
+              </a:lnSpc>
+            </a:pPr>
+            <a:r>
+              <a:rPr sz="930" b="0" i="0">
+                <a:solidFill>
+                  <a:srgbClr val="142640"/>
+                </a:solidFill>
+                <a:latin typeface="Calibri"/>
+              </a:rPr>
+              <a:t>LLM-as-a-Judge · Self-Reflection — ReAct ya no pertenece a esta lista: es el patrón principal implementado en los tres agentes.</a:t>
+            </a:r>
+          </a:p>
+        </p:txBody>
+      </p:sp>
+      <p:sp>
+        <p:nvSpPr>
+          <p:cNvPr id="43" name="Rounded Rectangle 42"/>
+          <p:cNvSpPr/>
+          <p:nvPr/>
+        </p:nvSpPr>
+        <p:spPr>
+          <a:xfrm>
+            <a:off x="6172200" y="5468112"/>
+            <a:ext cx="5532120" cy="960120"/>
           </a:xfrm>
           <a:prstGeom prst="roundRect">
             <a:avLst>
@@ -18663,14 +17851,14 @@
       </p:sp>
       <p:sp>
         <p:nvSpPr>
-          <p:cNvPr id="23" name="TextBox 22"/>
+          <p:cNvPr id="44" name="TextBox 43"/>
           <p:cNvSpPr txBox="1"/>
           <p:nvPr/>
         </p:nvSpPr>
         <p:spPr>
           <a:xfrm>
-            <a:off x="6355080" y="5687568"/>
-            <a:ext cx="5166360" cy="256032"/>
+            <a:off x="6355080" y="5532120"/>
+            <a:ext cx="5166360" cy="237744"/>
           </a:xfrm>
           <a:prstGeom prst="rect">
             <a:avLst/>
@@ -18689,7 +17877,7 @@
               </a:lnSpc>
             </a:pPr>
             <a:r>
-              <a:rPr sz="1050" b="1" i="0">
+              <a:rPr sz="1000" b="1" i="0">
                 <a:solidFill>
                   <a:srgbClr val="9FC1E0"/>
                 </a:solidFill>
@@ -18702,14 +17890,14 @@
       </p:sp>
       <p:sp>
         <p:nvSpPr>
-          <p:cNvPr id="24" name="TextBox 23"/>
+          <p:cNvPr id="45" name="TextBox 44"/>
           <p:cNvSpPr txBox="1"/>
           <p:nvPr/>
         </p:nvSpPr>
         <p:spPr>
           <a:xfrm>
-            <a:off x="6355080" y="5943600"/>
-            <a:ext cx="5166360" cy="457200"/>
+            <a:off x="6355080" y="5788152"/>
+            <a:ext cx="5166360" cy="594360"/>
           </a:xfrm>
           <a:prstGeom prst="rect">
             <a:avLst/>
@@ -18728,13 +17916,13 @@
               </a:lnSpc>
             </a:pPr>
             <a:r>
-              <a:rPr sz="1000" b="0" i="0">
+              <a:rPr sz="930" b="0" i="0">
                 <a:solidFill>
                   <a:srgbClr val="FFFFFF"/>
                 </a:solidFill>
                 <a:latin typeface="Calibri"/>
               </a:rPr>
-              <a:t>El razonamiento interno del bucle ReAct nunca se expone ni se persiste — solo la respuesta final llega al usuario o al historial (CLAUDE.md §10).</a:t>
+              <a:t>El razonamiento interno del bucle ReAct nunca se expone al usuario ni se persiste — solo la respuesta final (CLAUDE.md §10).</a:t>
             </a:r>
           </a:p>
         </p:txBody>
